--- a/session21-python/submission/CampusFix-Capstone-Deck.pptx
+++ b/session21-python/submission/CampusFix-Capstone-Deck.pptx
@@ -2,21 +2,21 @@
 <file path=ppt/presentation.xml><?xml version="1.0" encoding="utf-8"?>
 <p:presentation xmlns:p="http://schemas.openxmlformats.org/presentationml/2006/main">
   <p:sldMasterIdLst>
-    <p:sldMasterId xmlns:r="http://schemas.openxmlformats.org/officeDocument/2006/relationships" id="2147483648" r:id="R857b2243dfee4a47"/>
+    <p:sldMasterId xmlns:r="http://schemas.openxmlformats.org/officeDocument/2006/relationships" id="2147483648" r:id="R95a8ec4e7bd34178"/>
   </p:sldMasterIdLst>
   <p:notesMasterIdLst>
-    <p:notesMasterId xmlns:r="http://schemas.openxmlformats.org/officeDocument/2006/relationships" r:id="R06ffd9ba8a764ff4"/>
+    <p:notesMasterId xmlns:r="http://schemas.openxmlformats.org/officeDocument/2006/relationships" r:id="R904cabaf72c840e9"/>
   </p:notesMasterIdLst>
   <p:sldIdLst>
-    <p:sldId xmlns:r="http://schemas.openxmlformats.org/officeDocument/2006/relationships" id="256" r:id="R796d052a98124326"/>
-    <p:sldId xmlns:r="http://schemas.openxmlformats.org/officeDocument/2006/relationships" id="257" r:id="R839a675930064078"/>
-    <p:sldId xmlns:r="http://schemas.openxmlformats.org/officeDocument/2006/relationships" id="258" r:id="R8f6d82acd4be46b3"/>
-    <p:sldId xmlns:r="http://schemas.openxmlformats.org/officeDocument/2006/relationships" id="259" r:id="R1a517e3c185047a3"/>
-    <p:sldId xmlns:r="http://schemas.openxmlformats.org/officeDocument/2006/relationships" id="260" r:id="Rc7960ecedc17425f"/>
-    <p:sldId xmlns:r="http://schemas.openxmlformats.org/officeDocument/2006/relationships" id="261" r:id="R192410f4ed394384"/>
-    <p:sldId xmlns:r="http://schemas.openxmlformats.org/officeDocument/2006/relationships" id="262" r:id="Reaf12194233e452a"/>
-    <p:sldId xmlns:r="http://schemas.openxmlformats.org/officeDocument/2006/relationships" id="263" r:id="R85b8b80a33f745fe"/>
-    <p:sldId xmlns:r="http://schemas.openxmlformats.org/officeDocument/2006/relationships" id="264" r:id="R2759b26485794ef6"/>
+    <p:sldId xmlns:r="http://schemas.openxmlformats.org/officeDocument/2006/relationships" id="256" r:id="Rd04606e82f9d4968"/>
+    <p:sldId xmlns:r="http://schemas.openxmlformats.org/officeDocument/2006/relationships" id="257" r:id="R203bcf91248c44ce"/>
+    <p:sldId xmlns:r="http://schemas.openxmlformats.org/officeDocument/2006/relationships" id="258" r:id="Rbcdd733fde224155"/>
+    <p:sldId xmlns:r="http://schemas.openxmlformats.org/officeDocument/2006/relationships" id="259" r:id="R406b3d4764d047d5"/>
+    <p:sldId xmlns:r="http://schemas.openxmlformats.org/officeDocument/2006/relationships" id="260" r:id="R58a350e7187c48ac"/>
+    <p:sldId xmlns:r="http://schemas.openxmlformats.org/officeDocument/2006/relationships" id="261" r:id="Rdda65acd595a4a69"/>
+    <p:sldId xmlns:r="http://schemas.openxmlformats.org/officeDocument/2006/relationships" id="262" r:id="R69872275003d422a"/>
+    <p:sldId xmlns:r="http://schemas.openxmlformats.org/officeDocument/2006/relationships" id="263" r:id="Rdaf8ea296bea4f52"/>
+    <p:sldId xmlns:r="http://schemas.openxmlformats.org/officeDocument/2006/relationships" id="264" r:id="R808b592911db4609"/>
   </p:sldIdLst>
   <p:sldSz cx="12192000" cy="6858000"/>
   <p:notesSz cx="6858000" cy="9144000"/>
@@ -1010,7 +1010,7 @@
           <a:lstStyle xmlns:a="http://schemas.openxmlformats.org/drawingml/2006/main"/>
           <a:p xmlns:a="http://schemas.openxmlformats.org/drawingml/2006/main">
             <a:r>
-              <a:t>Recording guide, about 25 seconds: close by stating exactly what is done and what remains. Terraform configuration is validated, but the AWS account and infrastructure have not been set up. Do not say AWS or the GitHub pipeline is complete. The instructor expects the M10 demo to show a pushed change, pipeline run, and deployment update once those are available. End by inviting questions.</a:t>
+              <a:t>Recording guide, about 25 seconds: show the verified CI run and describe what it proves. Run #4 on commit ba32c7a succeeded. Backend tests, frontend build, both Trivy scans, and GHCR publication of public SHA-tagged images passed. No findings matched the configured HIGH/CRITICAL gate. Deployment skipped because this workflow deploys only from main. AWS resources are not provisioned yet. After connecting the personal account, record the Terraform plan, provision EKS, deploy with Helm, and show the rollout.</a:t>
             </a:r>
           </a:p>
         </p:txBody>
@@ -1108,6 +1108,7 @@
                 <a:spcPts val="0"/>
               </a:spcAft>
               <a:buNone/>
+              <a:defRPr/>
             </a:lvl1pPr>
             <a:lvl2pPr marL="0" indent="0">
               <a:lnSpc>
@@ -1120,6 +1121,7 @@
                 <a:spcPts val="0"/>
               </a:spcAft>
               <a:buNone/>
+              <a:defRPr/>
             </a:lvl2pPr>
             <a:lvl3pPr marL="0" indent="0">
               <a:lnSpc>
@@ -1132,6 +1134,7 @@
                 <a:spcPts val="0"/>
               </a:spcAft>
               <a:buNone/>
+              <a:defRPr/>
             </a:lvl3pPr>
             <a:lvl4pPr marL="0" indent="0">
               <a:lnSpc>
@@ -1144,6 +1147,7 @@
                 <a:spcPts val="0"/>
               </a:spcAft>
               <a:buNone/>
+              <a:defRPr/>
             </a:lvl4pPr>
             <a:lvl5pPr marL="0" indent="0">
               <a:lnSpc>
@@ -1156,6 +1160,7 @@
                 <a:spcPts val="0"/>
               </a:spcAft>
               <a:buNone/>
+              <a:defRPr/>
             </a:lvl5pPr>
             <a:lvl6pPr marL="0" indent="0">
               <a:lnSpc>
@@ -1168,6 +1173,7 @@
                 <a:spcPts val="0"/>
               </a:spcAft>
               <a:buNone/>
+              <a:defRPr/>
             </a:lvl6pPr>
             <a:lvl7pPr marL="0" indent="0">
               <a:lnSpc>
@@ -1180,6 +1186,7 @@
                 <a:spcPts val="0"/>
               </a:spcAft>
               <a:buNone/>
+              <a:defRPr/>
             </a:lvl7pPr>
             <a:lvl8pPr marL="0" indent="0">
               <a:lnSpc>
@@ -1192,6 +1199,7 @@
                 <a:spcPts val="0"/>
               </a:spcAft>
               <a:buNone/>
+              <a:defRPr/>
             </a:lvl8pPr>
             <a:lvl9pPr marL="0" indent="0">
               <a:lnSpc>
@@ -1204,6 +1212,7 @@
                 <a:spcPts val="0"/>
               </a:spcAft>
               <a:buNone/>
+              <a:defRPr/>
             </a:lvl9pPr>
           </a:lstStyle>
           <a:p xmlns:a="http://schemas.openxmlformats.org/drawingml/2006/main"/>
@@ -1265,6 +1274,7 @@
                 <a:spcPts val="0"/>
               </a:spcAft>
               <a:buNone/>
+              <a:defRPr/>
             </a:lvl1pPr>
             <a:lvl2pPr marL="0" indent="0">
               <a:lnSpc>
@@ -1277,6 +1287,7 @@
                 <a:spcPts val="0"/>
               </a:spcAft>
               <a:buNone/>
+              <a:defRPr/>
             </a:lvl2pPr>
             <a:lvl3pPr marL="0" indent="0">
               <a:lnSpc>
@@ -1289,6 +1300,7 @@
                 <a:spcPts val="0"/>
               </a:spcAft>
               <a:buNone/>
+              <a:defRPr/>
             </a:lvl3pPr>
             <a:lvl4pPr marL="0" indent="0">
               <a:lnSpc>
@@ -1301,6 +1313,7 @@
                 <a:spcPts val="0"/>
               </a:spcAft>
               <a:buNone/>
+              <a:defRPr/>
             </a:lvl4pPr>
             <a:lvl5pPr marL="0" indent="0">
               <a:lnSpc>
@@ -1313,6 +1326,7 @@
                 <a:spcPts val="0"/>
               </a:spcAft>
               <a:buNone/>
+              <a:defRPr/>
             </a:lvl5pPr>
             <a:lvl6pPr marL="0" indent="0">
               <a:lnSpc>
@@ -1325,6 +1339,7 @@
                 <a:spcPts val="0"/>
               </a:spcAft>
               <a:buNone/>
+              <a:defRPr/>
             </a:lvl6pPr>
             <a:lvl7pPr marL="0" indent="0">
               <a:lnSpc>
@@ -1337,6 +1352,7 @@
                 <a:spcPts val="0"/>
               </a:spcAft>
               <a:buNone/>
+              <a:defRPr/>
             </a:lvl7pPr>
             <a:lvl8pPr marL="0" indent="0">
               <a:lnSpc>
@@ -1349,6 +1365,7 @@
                 <a:spcPts val="0"/>
               </a:spcAft>
               <a:buNone/>
+              <a:defRPr/>
             </a:lvl8pPr>
             <a:lvl9pPr marL="0" indent="0">
               <a:lnSpc>
@@ -1361,6 +1378,7 @@
                 <a:spcPts val="0"/>
               </a:spcAft>
               <a:buNone/>
+              <a:defRPr/>
             </a:lvl9pPr>
           </a:lstStyle>
           <a:p xmlns:a="http://schemas.openxmlformats.org/drawingml/2006/main"/>
@@ -1439,6 +1457,7 @@
                 <a:spcPts val="0"/>
               </a:spcAft>
               <a:buNone/>
+              <a:defRPr/>
             </a:lvl1pPr>
             <a:lvl2pPr marL="0" indent="0">
               <a:lnSpc>
@@ -1451,6 +1470,7 @@
                 <a:spcPts val="0"/>
               </a:spcAft>
               <a:buNone/>
+              <a:defRPr/>
             </a:lvl2pPr>
             <a:lvl3pPr marL="0" indent="0">
               <a:lnSpc>
@@ -1463,6 +1483,7 @@
                 <a:spcPts val="0"/>
               </a:spcAft>
               <a:buNone/>
+              <a:defRPr/>
             </a:lvl3pPr>
             <a:lvl4pPr marL="0" indent="0">
               <a:lnSpc>
@@ -1475,6 +1496,7 @@
                 <a:spcPts val="0"/>
               </a:spcAft>
               <a:buNone/>
+              <a:defRPr/>
             </a:lvl4pPr>
             <a:lvl5pPr marL="0" indent="0">
               <a:lnSpc>
@@ -1487,6 +1509,7 @@
                 <a:spcPts val="0"/>
               </a:spcAft>
               <a:buNone/>
+              <a:defRPr/>
             </a:lvl5pPr>
             <a:lvl6pPr marL="0" indent="0">
               <a:lnSpc>
@@ -1499,6 +1522,7 @@
                 <a:spcPts val="0"/>
               </a:spcAft>
               <a:buNone/>
+              <a:defRPr/>
             </a:lvl6pPr>
             <a:lvl7pPr marL="0" indent="0">
               <a:lnSpc>
@@ -1511,6 +1535,7 @@
                 <a:spcPts val="0"/>
               </a:spcAft>
               <a:buNone/>
+              <a:defRPr/>
             </a:lvl7pPr>
             <a:lvl8pPr marL="0" indent="0">
               <a:lnSpc>
@@ -1523,6 +1548,7 @@
                 <a:spcPts val="0"/>
               </a:spcAft>
               <a:buNone/>
+              <a:defRPr/>
             </a:lvl8pPr>
             <a:lvl9pPr marL="0" indent="0">
               <a:lnSpc>
@@ -1535,6 +1561,7 @@
                 <a:spcPts val="0"/>
               </a:spcAft>
               <a:buNone/>
+              <a:defRPr/>
             </a:lvl9pPr>
           </a:lstStyle>
           <a:p xmlns:a="http://schemas.openxmlformats.org/drawingml/2006/main"/>
@@ -1613,6 +1640,7 @@
                 <a:spcPts val="0"/>
               </a:spcAft>
               <a:buNone/>
+              <a:defRPr/>
             </a:lvl1pPr>
             <a:lvl2pPr marL="0" indent="0">
               <a:lnSpc>
@@ -1625,6 +1653,7 @@
                 <a:spcPts val="0"/>
               </a:spcAft>
               <a:buNone/>
+              <a:defRPr/>
             </a:lvl2pPr>
             <a:lvl3pPr marL="0" indent="0">
               <a:lnSpc>
@@ -1637,6 +1666,7 @@
                 <a:spcPts val="0"/>
               </a:spcAft>
               <a:buNone/>
+              <a:defRPr/>
             </a:lvl3pPr>
             <a:lvl4pPr marL="0" indent="0">
               <a:lnSpc>
@@ -1649,6 +1679,7 @@
                 <a:spcPts val="0"/>
               </a:spcAft>
               <a:buNone/>
+              <a:defRPr/>
             </a:lvl4pPr>
             <a:lvl5pPr marL="0" indent="0">
               <a:lnSpc>
@@ -1661,6 +1692,7 @@
                 <a:spcPts val="0"/>
               </a:spcAft>
               <a:buNone/>
+              <a:defRPr/>
             </a:lvl5pPr>
             <a:lvl6pPr marL="0" indent="0">
               <a:lnSpc>
@@ -1673,6 +1705,7 @@
                 <a:spcPts val="0"/>
               </a:spcAft>
               <a:buNone/>
+              <a:defRPr/>
             </a:lvl6pPr>
             <a:lvl7pPr marL="0" indent="0">
               <a:lnSpc>
@@ -1685,6 +1718,7 @@
                 <a:spcPts val="0"/>
               </a:spcAft>
               <a:buNone/>
+              <a:defRPr/>
             </a:lvl7pPr>
             <a:lvl8pPr marL="0" indent="0">
               <a:lnSpc>
@@ -1697,6 +1731,7 @@
                 <a:spcPts val="0"/>
               </a:spcAft>
               <a:buNone/>
+              <a:defRPr/>
             </a:lvl8pPr>
             <a:lvl9pPr marL="0" indent="0">
               <a:lnSpc>
@@ -1709,6 +1744,7 @@
                 <a:spcPts val="0"/>
               </a:spcAft>
               <a:buNone/>
+              <a:defRPr/>
             </a:lvl9pPr>
           </a:lstStyle>
           <a:p xmlns:a="http://schemas.openxmlformats.org/drawingml/2006/main"/>
@@ -1770,6 +1806,7 @@
                 <a:spcPts val="1200"/>
               </a:spcAft>
               <a:buChar char="•"/>
+              <a:defRPr/>
             </a:lvl1pPr>
             <a:lvl2pPr marL="533400" indent="-228600">
               <a:lnSpc>
@@ -1782,6 +1819,7 @@
                 <a:spcPts val="1200"/>
               </a:spcAft>
               <a:buChar char="•"/>
+              <a:defRPr/>
             </a:lvl2pPr>
             <a:lvl3pPr marL="838200" indent="-228600">
               <a:lnSpc>
@@ -1794,6 +1832,7 @@
                 <a:spcPts val="1200"/>
               </a:spcAft>
               <a:buChar char="•"/>
+              <a:defRPr/>
             </a:lvl3pPr>
             <a:lvl4pPr marL="1143000" indent="-228600">
               <a:lnSpc>
@@ -1806,6 +1845,7 @@
                 <a:spcPts val="1200"/>
               </a:spcAft>
               <a:buChar char="•"/>
+              <a:defRPr/>
             </a:lvl4pPr>
             <a:lvl5pPr marL="1447800" indent="-228600">
               <a:lnSpc>
@@ -1818,6 +1858,7 @@
                 <a:spcPts val="1200"/>
               </a:spcAft>
               <a:buChar char="•"/>
+              <a:defRPr/>
             </a:lvl5pPr>
             <a:lvl6pPr marL="1752600" indent="-228600">
               <a:lnSpc>
@@ -1830,6 +1871,7 @@
                 <a:spcPts val="1200"/>
               </a:spcAft>
               <a:buChar char="•"/>
+              <a:defRPr/>
             </a:lvl6pPr>
             <a:lvl7pPr marL="2057400" indent="-228600">
               <a:lnSpc>
@@ -1842,6 +1884,7 @@
                 <a:spcPts val="1200"/>
               </a:spcAft>
               <a:buChar char="•"/>
+              <a:defRPr/>
             </a:lvl7pPr>
             <a:lvl8pPr marL="2362200" indent="-228600">
               <a:lnSpc>
@@ -1854,6 +1897,7 @@
                 <a:spcPts val="1200"/>
               </a:spcAft>
               <a:buChar char="•"/>
+              <a:defRPr/>
             </a:lvl8pPr>
             <a:lvl9pPr marL="2667000" indent="-228600">
               <a:lnSpc>
@@ -1866,6 +1910,7 @@
                 <a:spcPts val="1200"/>
               </a:spcAft>
               <a:buChar char="•"/>
+              <a:defRPr/>
             </a:lvl9pPr>
           </a:lstStyle>
           <a:p xmlns:a="http://schemas.openxmlformats.org/drawingml/2006/main"/>
@@ -1944,6 +1989,7 @@
                 <a:spcPts val="0"/>
               </a:spcAft>
               <a:buNone/>
+              <a:defRPr/>
             </a:lvl1pPr>
             <a:lvl2pPr marL="0" indent="0">
               <a:lnSpc>
@@ -1956,6 +2002,7 @@
                 <a:spcPts val="0"/>
               </a:spcAft>
               <a:buNone/>
+              <a:defRPr/>
             </a:lvl2pPr>
             <a:lvl3pPr marL="0" indent="0">
               <a:lnSpc>
@@ -1968,6 +2015,7 @@
                 <a:spcPts val="0"/>
               </a:spcAft>
               <a:buNone/>
+              <a:defRPr/>
             </a:lvl3pPr>
             <a:lvl4pPr marL="0" indent="0">
               <a:lnSpc>
@@ -1980,6 +2028,7 @@
                 <a:spcPts val="0"/>
               </a:spcAft>
               <a:buNone/>
+              <a:defRPr/>
             </a:lvl4pPr>
             <a:lvl5pPr marL="0" indent="0">
               <a:lnSpc>
@@ -1992,6 +2041,7 @@
                 <a:spcPts val="0"/>
               </a:spcAft>
               <a:buNone/>
+              <a:defRPr/>
             </a:lvl5pPr>
             <a:lvl6pPr marL="0" indent="0">
               <a:lnSpc>
@@ -2004,6 +2054,7 @@
                 <a:spcPts val="0"/>
               </a:spcAft>
               <a:buNone/>
+              <a:defRPr/>
             </a:lvl6pPr>
             <a:lvl7pPr marL="0" indent="0">
               <a:lnSpc>
@@ -2016,6 +2067,7 @@
                 <a:spcPts val="0"/>
               </a:spcAft>
               <a:buNone/>
+              <a:defRPr/>
             </a:lvl7pPr>
             <a:lvl8pPr marL="0" indent="0">
               <a:lnSpc>
@@ -2028,6 +2080,7 @@
                 <a:spcPts val="0"/>
               </a:spcAft>
               <a:buNone/>
+              <a:defRPr/>
             </a:lvl8pPr>
             <a:lvl9pPr marL="0" indent="0">
               <a:lnSpc>
@@ -2040,6 +2093,7 @@
                 <a:spcPts val="0"/>
               </a:spcAft>
               <a:buNone/>
+              <a:defRPr/>
             </a:lvl9pPr>
           </a:lstStyle>
           <a:p xmlns:a="http://schemas.openxmlformats.org/drawingml/2006/main"/>
@@ -2101,6 +2155,7 @@
                 <a:spcPts val="1200"/>
               </a:spcAft>
               <a:buChar char="•"/>
+              <a:defRPr/>
             </a:lvl1pPr>
             <a:lvl2pPr marL="533400" indent="-228600">
               <a:lnSpc>
@@ -2113,6 +2168,7 @@
                 <a:spcPts val="1200"/>
               </a:spcAft>
               <a:buChar char="•"/>
+              <a:defRPr/>
             </a:lvl2pPr>
             <a:lvl3pPr marL="838200" indent="-228600">
               <a:lnSpc>
@@ -2125,6 +2181,7 @@
                 <a:spcPts val="1200"/>
               </a:spcAft>
               <a:buChar char="•"/>
+              <a:defRPr/>
             </a:lvl3pPr>
             <a:lvl4pPr marL="1143000" indent="-228600">
               <a:lnSpc>
@@ -2137,6 +2194,7 @@
                 <a:spcPts val="1200"/>
               </a:spcAft>
               <a:buChar char="•"/>
+              <a:defRPr/>
             </a:lvl4pPr>
             <a:lvl5pPr marL="1447800" indent="-228600">
               <a:lnSpc>
@@ -2149,6 +2207,7 @@
                 <a:spcPts val="1200"/>
               </a:spcAft>
               <a:buChar char="•"/>
+              <a:defRPr/>
             </a:lvl5pPr>
             <a:lvl6pPr marL="1752600" indent="-228600">
               <a:lnSpc>
@@ -2161,6 +2220,7 @@
                 <a:spcPts val="1200"/>
               </a:spcAft>
               <a:buChar char="•"/>
+              <a:defRPr/>
             </a:lvl6pPr>
             <a:lvl7pPr marL="2057400" indent="-228600">
               <a:lnSpc>
@@ -2173,6 +2233,7 @@
                 <a:spcPts val="1200"/>
               </a:spcAft>
               <a:buChar char="•"/>
+              <a:defRPr/>
             </a:lvl7pPr>
             <a:lvl8pPr marL="2362200" indent="-228600">
               <a:lnSpc>
@@ -2185,6 +2246,7 @@
                 <a:spcPts val="1200"/>
               </a:spcAft>
               <a:buChar char="•"/>
+              <a:defRPr/>
             </a:lvl8pPr>
             <a:lvl9pPr marL="2667000" indent="-228600">
               <a:lnSpc>
@@ -2197,6 +2259,7 @@
                 <a:spcPts val="1200"/>
               </a:spcAft>
               <a:buChar char="•"/>
+              <a:defRPr/>
             </a:lvl9pPr>
           </a:lstStyle>
           <a:p xmlns:a="http://schemas.openxmlformats.org/drawingml/2006/main"/>
@@ -2258,6 +2321,7 @@
                 <a:spcPts val="1200"/>
               </a:spcAft>
               <a:buChar char="•"/>
+              <a:defRPr/>
             </a:lvl1pPr>
             <a:lvl2pPr marL="533400" indent="-228600">
               <a:lnSpc>
@@ -2270,6 +2334,7 @@
                 <a:spcPts val="1200"/>
               </a:spcAft>
               <a:buChar char="•"/>
+              <a:defRPr/>
             </a:lvl2pPr>
             <a:lvl3pPr marL="838200" indent="-228600">
               <a:lnSpc>
@@ -2282,6 +2347,7 @@
                 <a:spcPts val="1200"/>
               </a:spcAft>
               <a:buChar char="•"/>
+              <a:defRPr/>
             </a:lvl3pPr>
             <a:lvl4pPr marL="1143000" indent="-228600">
               <a:lnSpc>
@@ -2294,6 +2360,7 @@
                 <a:spcPts val="1200"/>
               </a:spcAft>
               <a:buChar char="•"/>
+              <a:defRPr/>
             </a:lvl4pPr>
             <a:lvl5pPr marL="1447800" indent="-228600">
               <a:lnSpc>
@@ -2306,6 +2373,7 @@
                 <a:spcPts val="1200"/>
               </a:spcAft>
               <a:buChar char="•"/>
+              <a:defRPr/>
             </a:lvl5pPr>
             <a:lvl6pPr marL="1752600" indent="-228600">
               <a:lnSpc>
@@ -2318,6 +2386,7 @@
                 <a:spcPts val="1200"/>
               </a:spcAft>
               <a:buChar char="•"/>
+              <a:defRPr/>
             </a:lvl6pPr>
             <a:lvl7pPr marL="2057400" indent="-228600">
               <a:lnSpc>
@@ -2330,6 +2399,7 @@
                 <a:spcPts val="1200"/>
               </a:spcAft>
               <a:buChar char="•"/>
+              <a:defRPr/>
             </a:lvl7pPr>
             <a:lvl8pPr marL="2362200" indent="-228600">
               <a:lnSpc>
@@ -2342,6 +2412,7 @@
                 <a:spcPts val="1200"/>
               </a:spcAft>
               <a:buChar char="•"/>
+              <a:defRPr/>
             </a:lvl8pPr>
             <a:lvl9pPr marL="2667000" indent="-228600">
               <a:lnSpc>
@@ -2354,6 +2425,7 @@
                 <a:spcPts val="1200"/>
               </a:spcAft>
               <a:buChar char="•"/>
+              <a:defRPr/>
             </a:lvl9pPr>
           </a:lstStyle>
           <a:p xmlns:a="http://schemas.openxmlformats.org/drawingml/2006/main"/>
@@ -2432,6 +2504,7 @@
                 <a:spcPts val="0"/>
               </a:spcAft>
               <a:buNone/>
+              <a:defRPr/>
             </a:lvl1pPr>
             <a:lvl2pPr marL="0" indent="0">
               <a:lnSpc>
@@ -2444,6 +2517,7 @@
                 <a:spcPts val="0"/>
               </a:spcAft>
               <a:buNone/>
+              <a:defRPr/>
             </a:lvl2pPr>
             <a:lvl3pPr marL="0" indent="0">
               <a:lnSpc>
@@ -2456,6 +2530,7 @@
                 <a:spcPts val="0"/>
               </a:spcAft>
               <a:buNone/>
+              <a:defRPr/>
             </a:lvl3pPr>
             <a:lvl4pPr marL="0" indent="0">
               <a:lnSpc>
@@ -2468,6 +2543,7 @@
                 <a:spcPts val="0"/>
               </a:spcAft>
               <a:buNone/>
+              <a:defRPr/>
             </a:lvl4pPr>
             <a:lvl5pPr marL="0" indent="0">
               <a:lnSpc>
@@ -2480,6 +2556,7 @@
                 <a:spcPts val="0"/>
               </a:spcAft>
               <a:buNone/>
+              <a:defRPr/>
             </a:lvl5pPr>
             <a:lvl6pPr marL="0" indent="0">
               <a:lnSpc>
@@ -2492,6 +2569,7 @@
                 <a:spcPts val="0"/>
               </a:spcAft>
               <a:buNone/>
+              <a:defRPr/>
             </a:lvl6pPr>
             <a:lvl7pPr marL="0" indent="0">
               <a:lnSpc>
@@ -2504,6 +2582,7 @@
                 <a:spcPts val="0"/>
               </a:spcAft>
               <a:buNone/>
+              <a:defRPr/>
             </a:lvl7pPr>
             <a:lvl8pPr marL="0" indent="0">
               <a:lnSpc>
@@ -2516,6 +2595,7 @@
                 <a:spcPts val="0"/>
               </a:spcAft>
               <a:buNone/>
+              <a:defRPr/>
             </a:lvl8pPr>
             <a:lvl9pPr marL="0" indent="0">
               <a:lnSpc>
@@ -2528,6 +2608,7 @@
                 <a:spcPts val="0"/>
               </a:spcAft>
               <a:buNone/>
+              <a:defRPr/>
             </a:lvl9pPr>
           </a:lstStyle>
           <a:p xmlns:a="http://schemas.openxmlformats.org/drawingml/2006/main"/>
@@ -2589,6 +2670,7 @@
                 <a:spcPts val="1200"/>
               </a:spcAft>
               <a:buChar char="•"/>
+              <a:defRPr/>
             </a:lvl1pPr>
             <a:lvl2pPr marL="533400" indent="-228600">
               <a:lnSpc>
@@ -2601,6 +2683,7 @@
                 <a:spcPts val="1200"/>
               </a:spcAft>
               <a:buChar char="•"/>
+              <a:defRPr/>
             </a:lvl2pPr>
             <a:lvl3pPr marL="838200" indent="-228600">
               <a:lnSpc>
@@ -2613,6 +2696,7 @@
                 <a:spcPts val="1200"/>
               </a:spcAft>
               <a:buChar char="•"/>
+              <a:defRPr/>
             </a:lvl3pPr>
             <a:lvl4pPr marL="1143000" indent="-228600">
               <a:lnSpc>
@@ -2625,6 +2709,7 @@
                 <a:spcPts val="1200"/>
               </a:spcAft>
               <a:buChar char="•"/>
+              <a:defRPr/>
             </a:lvl4pPr>
             <a:lvl5pPr marL="1447800" indent="-228600">
               <a:lnSpc>
@@ -2637,6 +2722,7 @@
                 <a:spcPts val="1200"/>
               </a:spcAft>
               <a:buChar char="•"/>
+              <a:defRPr/>
             </a:lvl5pPr>
             <a:lvl6pPr marL="1752600" indent="-228600">
               <a:lnSpc>
@@ -2649,6 +2735,7 @@
                 <a:spcPts val="1200"/>
               </a:spcAft>
               <a:buChar char="•"/>
+              <a:defRPr/>
             </a:lvl6pPr>
             <a:lvl7pPr marL="2057400" indent="-228600">
               <a:lnSpc>
@@ -2661,6 +2748,7 @@
                 <a:spcPts val="1200"/>
               </a:spcAft>
               <a:buChar char="•"/>
+              <a:defRPr/>
             </a:lvl7pPr>
             <a:lvl8pPr marL="2362200" indent="-228600">
               <a:lnSpc>
@@ -2673,6 +2761,7 @@
                 <a:spcPts val="1200"/>
               </a:spcAft>
               <a:buChar char="•"/>
+              <a:defRPr/>
             </a:lvl8pPr>
             <a:lvl9pPr marL="2667000" indent="-228600">
               <a:lnSpc>
@@ -2685,6 +2774,7 @@
                 <a:spcPts val="1200"/>
               </a:spcAft>
               <a:buChar char="•"/>
+              <a:defRPr/>
             </a:lvl9pPr>
           </a:lstStyle>
           <a:p xmlns:a="http://schemas.openxmlformats.org/drawingml/2006/main"/>
@@ -2733,12 +2823,12 @@
   </p:cSld>
   <p:clrMap bg1="lt1" tx1="dk1" bg2="lt2" tx2="dk2" accent1="accent1" accent2="accent2" accent3="accent3" accent4="accent4" accent5="accent5" accent6="accent6" hlink="hlink" folHlink="folHlink"/>
   <p:sldLayoutIdLst>
-    <p:sldLayoutId xmlns:r="http://schemas.openxmlformats.org/officeDocument/2006/relationships" id="2147483649" r:id="Rb8c06e34a4654895"/>
-    <p:sldLayoutId xmlns:r="http://schemas.openxmlformats.org/officeDocument/2006/relationships" id="2147483650" r:id="R5241afcf49364afd"/>
-    <p:sldLayoutId xmlns:r="http://schemas.openxmlformats.org/officeDocument/2006/relationships" id="2147483651" r:id="Rceba5749dc854f4a"/>
-    <p:sldLayoutId xmlns:r="http://schemas.openxmlformats.org/officeDocument/2006/relationships" id="2147483652" r:id="R27df871f590c4660"/>
-    <p:sldLayoutId xmlns:r="http://schemas.openxmlformats.org/officeDocument/2006/relationships" id="2147483653" r:id="R1d8348a017e34c27"/>
-    <p:sldLayoutId xmlns:r="http://schemas.openxmlformats.org/officeDocument/2006/relationships" id="2147483654" r:id="Rbc5b8f3f004741e2"/>
+    <p:sldLayoutId xmlns:r="http://schemas.openxmlformats.org/officeDocument/2006/relationships" id="2147483649" r:id="Rf4f179eaa97346bf"/>
+    <p:sldLayoutId xmlns:r="http://schemas.openxmlformats.org/officeDocument/2006/relationships" id="2147483650" r:id="Rad895cfae2454cd5"/>
+    <p:sldLayoutId xmlns:r="http://schemas.openxmlformats.org/officeDocument/2006/relationships" id="2147483651" r:id="R77dd26f8894942f3"/>
+    <p:sldLayoutId xmlns:r="http://schemas.openxmlformats.org/officeDocument/2006/relationships" id="2147483652" r:id="Rf51287e2312c4aa5"/>
+    <p:sldLayoutId xmlns:r="http://schemas.openxmlformats.org/officeDocument/2006/relationships" id="2147483653" r:id="R98076215252b4d07"/>
+    <p:sldLayoutId xmlns:r="http://schemas.openxmlformats.org/officeDocument/2006/relationships" id="2147483654" r:id="R1f5a2d6935d4474a"/>
   </p:sldLayoutIdLst>
   <p:txStyles>
     <p:titleStyle>
@@ -3330,6 +3420,7 @@
           </a:lstStyle>
           <a:p xmlns:a="http://schemas.openxmlformats.org/drawingml/2006/main">
             <a:pPr algn="l">
+              <a:buNone/>
               <a:defRPr sz="5400" b="1">
                 <a:solidFill>
                   <a:srgbClr val="FFFFFF"/>
@@ -3399,6 +3490,7 @@
           </a:lstStyle>
           <a:p xmlns:a="http://schemas.openxmlformats.org/drawingml/2006/main">
             <a:pPr algn="l">
+              <a:buNone/>
               <a:defRPr sz="2550">
                 <a:solidFill>
                   <a:srgbClr val="D7E6F7"/>
@@ -3468,6 +3560,7 @@
           </a:lstStyle>
           <a:p xmlns:a="http://schemas.openxmlformats.org/drawingml/2006/main">
             <a:pPr algn="l">
+              <a:buNone/>
               <a:defRPr sz="1725">
                 <a:solidFill>
                   <a:srgbClr val="D7E6F7"/>
@@ -3566,6 +3659,7 @@
           </a:lstStyle>
           <a:p xmlns:a="http://schemas.openxmlformats.org/drawingml/2006/main">
             <a:pPr algn="l">
+              <a:buNone/>
               <a:defRPr sz="3450" b="1">
                 <a:solidFill>
                   <a:srgbClr val="0B1F3A"/>
@@ -3635,6 +3729,7 @@
           </a:lstStyle>
           <a:p xmlns:a="http://schemas.openxmlformats.org/drawingml/2006/main">
             <a:pPr algn="l">
+              <a:buNone/>
               <a:defRPr sz="2175" b="1">
                 <a:solidFill>
                   <a:srgbClr val="142033"/>
@@ -3704,6 +3799,7 @@
           </a:lstStyle>
           <a:p xmlns:a="http://schemas.openxmlformats.org/drawingml/2006/main">
             <a:pPr algn="l">
+              <a:buNone/>
               <a:defRPr sz="1800">
                 <a:solidFill>
                   <a:srgbClr val="526174"/>
@@ -3732,7 +3828,7 @@
           <p:cNvPr id="4" name="">
             <a:extLst xmlns:a="http://schemas.openxmlformats.org/drawingml/2006/main">
               <a:ext uri="{FF2B5EF4-FFF2-40B4-BE49-F238E27FC236}">
-                <a16:creationId xmlns:a16="http://schemas.microsoft.com/office/drawing/2014/main" id="{71230DEA-48B0-4760-969E-508A50D7DA52}"/>
+                <a16:creationId xmlns:a16="http://schemas.microsoft.com/office/drawing/2014/main" id="{3F8AEE42-E828-4634-9127-06B1B4E05D44}"/>
               </a:ext>
             </a:extLst>
           </p:cNvPr>
@@ -3742,7 +3838,7 @@
           <p:nvPr/>
         </p:nvPicPr>
         <p:blipFill>
-          <a:blip xmlns:r="http://schemas.openxmlformats.org/officeDocument/2006/relationships" xmlns:a="http://schemas.openxmlformats.org/drawingml/2006/main" r:embed="R696a46c930104989"/>
+          <a:blip xmlns:r="http://schemas.openxmlformats.org/officeDocument/2006/relationships" xmlns:a="http://schemas.openxmlformats.org/drawingml/2006/main" r:embed="R82486c023e9c43a2"/>
           <a:stretch xmlns:a="http://schemas.openxmlformats.org/drawingml/2006/main"/>
         </p:blipFill>
         <p:spPr>
@@ -3789,7 +3885,7 @@
           <p:cNvPr id="9" name="">
             <a:extLst xmlns:a="http://schemas.openxmlformats.org/drawingml/2006/main">
               <a:ext uri="{FF2B5EF4-FFF2-40B4-BE49-F238E27FC236}">
-                <a16:creationId xmlns:a16="http://schemas.microsoft.com/office/drawing/2014/main" id="{3B303836-AB17-4F13-9C17-67D2BC8A2534}"/>
+                <a16:creationId xmlns:a16="http://schemas.microsoft.com/office/drawing/2014/main" id="{3933C9BF-8191-442E-A681-A6432579856B}"/>
               </a:ext>
             </a:extLst>
           </p:cNvPr>
@@ -3821,7 +3917,7 @@
           <p:cNvPr id="8" name="">
             <a:extLst xmlns:a="http://schemas.openxmlformats.org/drawingml/2006/main">
               <a:ext uri="{FF2B5EF4-FFF2-40B4-BE49-F238E27FC236}">
-                <a16:creationId xmlns:a16="http://schemas.microsoft.com/office/drawing/2014/main" id="{0CADEB2A-3042-4F7D-BC02-7912AF8791D3}"/>
+                <a16:creationId xmlns:a16="http://schemas.microsoft.com/office/drawing/2014/main" id="{5829F6B6-21F4-446F-ABEF-2B6897F6D821}"/>
               </a:ext>
             </a:extLst>
           </p:cNvPr>
@@ -3853,7 +3949,7 @@
           <p:cNvPr id="7" name="">
             <a:extLst xmlns:a="http://schemas.openxmlformats.org/drawingml/2006/main">
               <a:ext uri="{FF2B5EF4-FFF2-40B4-BE49-F238E27FC236}">
-                <a16:creationId xmlns:a16="http://schemas.microsoft.com/office/drawing/2014/main" id="{0CE1EDAA-1508-4B4E-B4E7-F748832130A1}"/>
+                <a16:creationId xmlns:a16="http://schemas.microsoft.com/office/drawing/2014/main" id="{70F39450-2E3C-448E-B972-FD712D7ACEB1}"/>
               </a:ext>
             </a:extLst>
           </p:cNvPr>
@@ -3926,6 +4022,7 @@
           </a:lstStyle>
           <a:p xmlns:a="http://schemas.openxmlformats.org/drawingml/2006/main">
             <a:pPr algn="l">
+              <a:buNone/>
               <a:defRPr sz="3450" b="1">
                 <a:solidFill>
                   <a:srgbClr val="0B1F3A"/>
@@ -3995,6 +4092,7 @@
           </a:lstStyle>
           <a:p xmlns:a="http://schemas.openxmlformats.org/drawingml/2006/main">
             <a:pPr algn="l">
+              <a:buNone/>
               <a:defRPr sz="1875">
                 <a:solidFill>
                   <a:srgbClr val="526174"/>
@@ -4070,6 +4168,7 @@
           </a:lstStyle>
           <a:p xmlns:a="http://schemas.openxmlformats.org/drawingml/2006/main">
             <a:pPr algn="ctr">
+              <a:buNone/>
               <a:defRPr sz="1800" b="1">
                 <a:solidFill>
                   <a:srgbClr val="0B1F3A"/>
@@ -4145,6 +4244,7 @@
           </a:lstStyle>
           <a:p xmlns:a="http://schemas.openxmlformats.org/drawingml/2006/main">
             <a:pPr algn="ctr">
+              <a:buNone/>
               <a:defRPr sz="1800" b="1">
                 <a:solidFill>
                   <a:srgbClr val="0B1F3A"/>
@@ -4168,6 +4268,7 @@
           </a:p>
           <a:p xmlns:a="http://schemas.openxmlformats.org/drawingml/2006/main">
             <a:pPr algn="ctr">
+              <a:buNone/>
               <a:defRPr sz="1800" b="1">
                 <a:solidFill>
                   <a:srgbClr val="0B1F3A"/>
@@ -4243,6 +4344,7 @@
           </a:lstStyle>
           <a:p xmlns:a="http://schemas.openxmlformats.org/drawingml/2006/main">
             <a:pPr algn="ctr">
+              <a:buNone/>
               <a:defRPr sz="1800" b="1">
                 <a:solidFill>
                   <a:srgbClr val="0B1F3A"/>
@@ -4266,6 +4368,7 @@
           </a:p>
           <a:p xmlns:a="http://schemas.openxmlformats.org/drawingml/2006/main">
             <a:pPr algn="ctr">
+              <a:buNone/>
               <a:defRPr sz="1800" b="1">
                 <a:solidFill>
                   <a:srgbClr val="0B1F3A"/>
@@ -4341,6 +4444,7 @@
           </a:lstStyle>
           <a:p xmlns:a="http://schemas.openxmlformats.org/drawingml/2006/main">
             <a:pPr algn="ctr">
+              <a:buNone/>
               <a:defRPr sz="1800" b="1">
                 <a:solidFill>
                   <a:srgbClr val="0B1F3A"/>
@@ -4364,6 +4468,7 @@
           </a:p>
           <a:p xmlns:a="http://schemas.openxmlformats.org/drawingml/2006/main">
             <a:pPr algn="ctr">
+              <a:buNone/>
               <a:defRPr sz="1800" b="1">
                 <a:solidFill>
                   <a:srgbClr val="0B1F3A"/>
@@ -4433,6 +4538,7 @@
           </a:lstStyle>
           <a:p xmlns:a="http://schemas.openxmlformats.org/drawingml/2006/main">
             <a:pPr algn="ctr">
+              <a:buNone/>
               <a:defRPr sz="2175" b="1">
                 <a:solidFill>
                   <a:srgbClr val="0F766E"/>
@@ -4502,6 +4608,7 @@
           </a:lstStyle>
           <a:p xmlns:a="http://schemas.openxmlformats.org/drawingml/2006/main">
             <a:pPr algn="ctr">
+              <a:buNone/>
               <a:defRPr sz="1650">
                 <a:solidFill>
                   <a:srgbClr val="526174"/>
@@ -4600,6 +4707,7 @@
           </a:lstStyle>
           <a:p xmlns:a="http://schemas.openxmlformats.org/drawingml/2006/main">
             <a:pPr algn="l">
+              <a:buNone/>
               <a:defRPr sz="3450" b="1">
                 <a:solidFill>
                   <a:srgbClr val="0B1F3A"/>
@@ -4628,7 +4736,7 @@
           <p:cNvPr id="2" name="">
             <a:extLst xmlns:a="http://schemas.openxmlformats.org/drawingml/2006/main">
               <a:ext uri="{FF2B5EF4-FFF2-40B4-BE49-F238E27FC236}">
-                <a16:creationId xmlns:a16="http://schemas.microsoft.com/office/drawing/2014/main" id="{27C15C7D-7B25-4154-A4C8-E8CF9FC80A18}"/>
+                <a16:creationId xmlns:a16="http://schemas.microsoft.com/office/drawing/2014/main" id="{ADA7F3FA-8DA5-4B7C-966D-7F660C747316}"/>
               </a:ext>
             </a:extLst>
           </p:cNvPr>
@@ -4638,7 +4746,7 @@
           <p:nvPr/>
         </p:nvPicPr>
         <p:blipFill>
-          <a:blip xmlns:r="http://schemas.openxmlformats.org/officeDocument/2006/relationships" xmlns:a="http://schemas.openxmlformats.org/drawingml/2006/main" r:embed="R291410d6b50f4ca2"/>
+          <a:blip xmlns:r="http://schemas.openxmlformats.org/officeDocument/2006/relationships" xmlns:a="http://schemas.openxmlformats.org/drawingml/2006/main" r:embed="Rb2a5a5deb95e40a6"/>
           <a:stretch xmlns:a="http://schemas.openxmlformats.org/drawingml/2006/main"/>
         </p:blipFill>
         <p:spPr>
@@ -4697,6 +4805,7 @@
           </a:lstStyle>
           <a:p xmlns:a="http://schemas.openxmlformats.org/drawingml/2006/main">
             <a:pPr algn="l">
+              <a:buNone/>
               <a:defRPr sz="3000" b="1">
                 <a:solidFill>
                   <a:srgbClr val="1D4ED8"/>
@@ -4766,6 +4875,7 @@
           </a:lstStyle>
           <a:p xmlns:a="http://schemas.openxmlformats.org/drawingml/2006/main">
             <a:pPr algn="l">
+              <a:buNone/>
               <a:defRPr sz="1800">
                 <a:solidFill>
                   <a:srgbClr val="142033"/>
@@ -4835,6 +4945,7 @@
           </a:lstStyle>
           <a:p xmlns:a="http://schemas.openxmlformats.org/drawingml/2006/main">
             <a:pPr algn="l">
+              <a:buNone/>
               <a:defRPr sz="1650" b="1">
                 <a:solidFill>
                   <a:srgbClr val="C2410C"/>
@@ -4933,6 +5044,7 @@
           </a:lstStyle>
           <a:p xmlns:a="http://schemas.openxmlformats.org/drawingml/2006/main">
             <a:pPr algn="l">
+              <a:buNone/>
               <a:defRPr sz="3450" b="1">
                 <a:solidFill>
                   <a:srgbClr val="0B1F3A"/>
@@ -5002,6 +5114,7 @@
           </a:lstStyle>
           <a:p xmlns:a="http://schemas.openxmlformats.org/drawingml/2006/main">
             <a:pPr algn="l">
+              <a:buNone/>
               <a:defRPr sz="2325" b="1">
                 <a:solidFill>
                   <a:srgbClr val="142033"/>
@@ -5071,6 +5184,7 @@
           </a:lstStyle>
           <a:p xmlns:a="http://schemas.openxmlformats.org/drawingml/2006/main">
             <a:pPr algn="l">
+              <a:buNone/>
               <a:defRPr sz="1875">
                 <a:solidFill>
                   <a:srgbClr val="526174"/>
@@ -5140,6 +5254,7 @@
           </a:lstStyle>
           <a:p xmlns:a="http://schemas.openxmlformats.org/drawingml/2006/main">
             <a:pPr algn="l">
+              <a:buNone/>
               <a:defRPr sz="1875">
                 <a:solidFill>
                   <a:srgbClr val="526174"/>
@@ -5209,6 +5324,7 @@
           </a:lstStyle>
           <a:p xmlns:a="http://schemas.openxmlformats.org/drawingml/2006/main">
             <a:pPr algn="l">
+              <a:buNone/>
               <a:defRPr sz="1650" b="1">
                 <a:solidFill>
                   <a:srgbClr val="C2410C"/>
@@ -5232,6 +5348,7 @@
           </a:p>
           <a:p xmlns:a="http://schemas.openxmlformats.org/drawingml/2006/main">
             <a:pPr algn="l">
+              <a:buNone/>
               <a:defRPr sz="1650" b="1">
                 <a:solidFill>
                   <a:srgbClr val="C2410C"/>
@@ -5330,6 +5447,7 @@
           </a:lstStyle>
           <a:p xmlns:a="http://schemas.openxmlformats.org/drawingml/2006/main">
             <a:pPr algn="l">
+              <a:buNone/>
               <a:defRPr sz="3450" b="1">
                 <a:solidFill>
                   <a:srgbClr val="0B1F3A"/>
@@ -5399,6 +5517,7 @@
           </a:lstStyle>
           <a:p xmlns:a="http://schemas.openxmlformats.org/drawingml/2006/main">
             <a:pPr algn="l">
+              <a:buNone/>
               <a:defRPr sz="2325" b="1">
                 <a:solidFill>
                   <a:srgbClr val="142033"/>
@@ -5468,6 +5587,7 @@
           </a:lstStyle>
           <a:p xmlns:a="http://schemas.openxmlformats.org/drawingml/2006/main">
             <a:pPr algn="l">
+              <a:buNone/>
               <a:defRPr sz="1875">
                 <a:solidFill>
                   <a:srgbClr val="526174"/>
@@ -5491,6 +5611,7 @@
           </a:p>
           <a:p xmlns:a="http://schemas.openxmlformats.org/drawingml/2006/main">
             <a:pPr algn="l">
+              <a:buNone/>
               <a:defRPr sz="1875">
                 <a:solidFill>
                   <a:srgbClr val="526174"/>
@@ -5514,6 +5635,7 @@
           </a:p>
           <a:p xmlns:a="http://schemas.openxmlformats.org/drawingml/2006/main">
             <a:pPr algn="l">
+              <a:buNone/>
               <a:defRPr sz="1875">
                 <a:solidFill>
                   <a:srgbClr val="526174"/>
@@ -5537,6 +5659,7 @@
           </a:p>
           <a:p xmlns:a="http://schemas.openxmlformats.org/drawingml/2006/main">
             <a:pPr algn="l">
+              <a:buNone/>
               <a:defRPr sz="1875">
                 <a:solidFill>
                   <a:srgbClr val="526174"/>
@@ -5606,6 +5729,7 @@
           </a:lstStyle>
           <a:p xmlns:a="http://schemas.openxmlformats.org/drawingml/2006/main">
             <a:pPr algn="l">
+              <a:buNone/>
               <a:defRPr sz="1575" b="1">
                 <a:solidFill>
                   <a:srgbClr val="C2410C"/>
@@ -5634,7 +5758,7 @@
           <p:cNvPr id="5" name="">
             <a:extLst xmlns:a="http://schemas.openxmlformats.org/drawingml/2006/main">
               <a:ext uri="{FF2B5EF4-FFF2-40B4-BE49-F238E27FC236}">
-                <a16:creationId xmlns:a16="http://schemas.microsoft.com/office/drawing/2014/main" id="{3495ED1C-24EE-45BF-8DEF-8CEF4B270550}"/>
+                <a16:creationId xmlns:a16="http://schemas.microsoft.com/office/drawing/2014/main" id="{EAA1AD99-E11A-493C-8170-41438A3901F1}"/>
               </a:ext>
             </a:extLst>
           </p:cNvPr>
@@ -5644,7 +5768,7 @@
           <p:nvPr/>
         </p:nvPicPr>
         <p:blipFill>
-          <a:blip xmlns:r="http://schemas.openxmlformats.org/officeDocument/2006/relationships" xmlns:a="http://schemas.openxmlformats.org/drawingml/2006/main" r:embed="R19054a1d4d064493"/>
+          <a:blip xmlns:r="http://schemas.openxmlformats.org/officeDocument/2006/relationships" xmlns:a="http://schemas.openxmlformats.org/drawingml/2006/main" r:embed="Rd587d8842e95445c"/>
           <a:stretch xmlns:a="http://schemas.openxmlformats.org/drawingml/2006/main"/>
         </p:blipFill>
         <p:spPr>
@@ -5732,6 +5856,7 @@
           </a:lstStyle>
           <a:p xmlns:a="http://schemas.openxmlformats.org/drawingml/2006/main">
             <a:pPr algn="l">
+              <a:buNone/>
               <a:defRPr sz="3450" b="1">
                 <a:solidFill>
                   <a:srgbClr val="0B1F3A"/>
@@ -5760,7 +5885,7 @@
           <p:cNvPr id="2" name="">
             <a:extLst xmlns:a="http://schemas.openxmlformats.org/drawingml/2006/main">
               <a:ext uri="{FF2B5EF4-FFF2-40B4-BE49-F238E27FC236}">
-                <a16:creationId xmlns:a16="http://schemas.microsoft.com/office/drawing/2014/main" id="{A7A04C52-C605-4D75-896B-44CCFF69F209}"/>
+                <a16:creationId xmlns:a16="http://schemas.microsoft.com/office/drawing/2014/main" id="{B4388E93-8130-479F-AC0C-888E8023B963}"/>
               </a:ext>
             </a:extLst>
           </p:cNvPr>
@@ -5770,7 +5895,7 @@
           <p:nvPr/>
         </p:nvPicPr>
         <p:blipFill>
-          <a:blip xmlns:r="http://schemas.openxmlformats.org/officeDocument/2006/relationships" xmlns:a="http://schemas.openxmlformats.org/drawingml/2006/main" r:embed="R81a245b1a7b84f0f"/>
+          <a:blip xmlns:r="http://schemas.openxmlformats.org/officeDocument/2006/relationships" xmlns:a="http://schemas.openxmlformats.org/drawingml/2006/main" r:embed="R38d9511345ef4e3a"/>
           <a:stretch xmlns:a="http://schemas.openxmlformats.org/drawingml/2006/main"/>
         </p:blipFill>
         <p:spPr>
@@ -5788,7 +5913,7 @@
           <p:cNvPr id="3" name="">
             <a:extLst xmlns:a="http://schemas.openxmlformats.org/drawingml/2006/main">
               <a:ext uri="{FF2B5EF4-FFF2-40B4-BE49-F238E27FC236}">
-                <a16:creationId xmlns:a16="http://schemas.microsoft.com/office/drawing/2014/main" id="{E15CD4C6-CF24-48FC-AA41-E59B362D1A35}"/>
+                <a16:creationId xmlns:a16="http://schemas.microsoft.com/office/drawing/2014/main" id="{F13FF220-D7D3-4C2F-B93C-E9E3183E3FE6}"/>
               </a:ext>
             </a:extLst>
           </p:cNvPr>
@@ -5798,7 +5923,7 @@
           <p:nvPr/>
         </p:nvPicPr>
         <p:blipFill>
-          <a:blip xmlns:r="http://schemas.openxmlformats.org/officeDocument/2006/relationships" xmlns:a="http://schemas.openxmlformats.org/drawingml/2006/main" r:embed="R001a235cf1cc402a"/>
+          <a:blip xmlns:r="http://schemas.openxmlformats.org/officeDocument/2006/relationships" xmlns:a="http://schemas.openxmlformats.org/drawingml/2006/main" r:embed="R5cc81b14a7084549"/>
           <a:stretch xmlns:a="http://schemas.openxmlformats.org/drawingml/2006/main"/>
         </p:blipFill>
         <p:spPr>
@@ -5857,6 +5982,7 @@
           </a:lstStyle>
           <a:p xmlns:a="http://schemas.openxmlformats.org/drawingml/2006/main">
             <a:pPr algn="ctr">
+              <a:buNone/>
               <a:defRPr sz="1800" b="1">
                 <a:solidFill>
                   <a:srgbClr val="142033"/>
@@ -5955,6 +6081,7 @@
           </a:lstStyle>
           <a:p xmlns:a="http://schemas.openxmlformats.org/drawingml/2006/main">
             <a:pPr algn="l">
+              <a:buNone/>
               <a:defRPr sz="3450" b="1">
                 <a:solidFill>
                   <a:srgbClr val="0B1F3A"/>
@@ -6024,6 +6151,7 @@
           </a:lstStyle>
           <a:p xmlns:a="http://schemas.openxmlformats.org/drawingml/2006/main">
             <a:pPr algn="l">
+              <a:buNone/>
               <a:defRPr sz="1950" b="1">
                 <a:solidFill>
                   <a:srgbClr val="0B1F3A"/>
@@ -6047,6 +6175,7 @@
           </a:p>
           <a:p xmlns:a="http://schemas.openxmlformats.org/drawingml/2006/main">
             <a:pPr algn="l">
+              <a:buNone/>
               <a:defRPr sz="1950" b="1">
                 <a:solidFill>
                   <a:srgbClr val="0B1F3A"/>
@@ -6116,6 +6245,7 @@
           </a:lstStyle>
           <a:p xmlns:a="http://schemas.openxmlformats.org/drawingml/2006/main">
             <a:pPr algn="l">
+              <a:buNone/>
               <a:defRPr sz="1800">
                 <a:solidFill>
                   <a:srgbClr val="142033"/>
@@ -6185,6 +6315,7 @@
           </a:lstStyle>
           <a:p xmlns:a="http://schemas.openxmlformats.org/drawingml/2006/main">
             <a:pPr algn="l">
+              <a:buNone/>
               <a:defRPr sz="1875" b="1">
                 <a:solidFill>
                   <a:srgbClr val="C2410C"/>
@@ -6254,6 +6385,7 @@
           </a:lstStyle>
           <a:p xmlns:a="http://schemas.openxmlformats.org/drawingml/2006/main">
             <a:pPr algn="l">
+              <a:buNone/>
               <a:defRPr sz="1725">
                 <a:solidFill>
                   <a:srgbClr val="526174"/>
@@ -6352,6 +6484,7 @@
           </a:lstStyle>
           <a:p xmlns:a="http://schemas.openxmlformats.org/drawingml/2006/main">
             <a:pPr algn="l">
+              <a:buNone/>
               <a:defRPr sz="3600" b="1">
                 <a:solidFill>
                   <a:srgbClr val="FFFFFF"/>
@@ -6370,7 +6503,7 @@
                 <a:ea typeface="Arial"/>
                 <a:cs typeface="Arial"/>
               </a:rPr>
-              <a:t>Cloud deployment remains pending</a:t>
+              <a:t>CI is green; AWS deployment is next</a:t>
             </a:r>
           </a:p>
         </p:txBody>
@@ -6421,6 +6554,7 @@
           </a:lstStyle>
           <a:p xmlns:a="http://schemas.openxmlformats.org/drawingml/2006/main">
             <a:pPr algn="l">
+              <a:buNone/>
               <a:defRPr sz="2025">
                 <a:solidFill>
                   <a:srgbClr val="D7E6F7"/>
@@ -6439,7 +6573,7 @@
                 <a:ea typeface="Arial"/>
                 <a:cs typeface="Arial"/>
               </a:rPr>
-              <a:t>Terraform configuration is present and `fmt`, `init`, and `validate` passed. There is no AWS account configured, so no plan, apply, EKS deployment, or destroy was performed.</a:t>
+              <a:t>Terraform `fmt`, `init`, and `validate` passed. AWS credentials are not connected to this workspace, so plan, apply, EKS deployment, and destroy have not run.</a:t>
             </a:r>
           </a:p>
         </p:txBody>
@@ -6490,6 +6624,7 @@
           </a:lstStyle>
           <a:p xmlns:a="http://schemas.openxmlformats.org/drawingml/2006/main">
             <a:pPr algn="l">
+              <a:buNone/>
               <a:defRPr sz="2025">
                 <a:solidFill>
                   <a:srgbClr val="FFFFFF"/>
@@ -6508,7 +6643,7 @@
                 <a:ea typeface="Arial"/>
                 <a:cs typeface="Arial"/>
               </a:rPr>
-              <a:t>For the recorded walkthrough: show the working app, Compose services, tests, Minikube Ingress, Prometheus, and Grafana. State clearly that the GitHub Actions run and AWS deployment are still pending.</a:t>
+              <a:t>Run #4 passed tests, the frontend build, and both Trivy scans. Public SHA-tagged images were published to GHCR. Deployment skipped because the workflow deploys only from main. Next: connect AWS and deploy to EKS with Helm.</a:t>
             </a:r>
           </a:p>
         </p:txBody>
@@ -6559,6 +6694,7 @@
           </a:lstStyle>
           <a:p xmlns:a="http://schemas.openxmlformats.org/drawingml/2006/main">
             <a:pPr algn="l">
+              <a:buNone/>
               <a:defRPr sz="1725" b="1">
                 <a:solidFill>
                   <a:srgbClr val="92D9D0"/>

--- a/session21-python/submission/CampusFix-Capstone-Deck.pptx
+++ b/session21-python/submission/CampusFix-Capstone-Deck.pptx
@@ -1,34 +1,149 @@
 
 <file path=ppt/presentation.xml><?xml version="1.0" encoding="utf-8"?>
-<p:presentation xmlns:p="http://schemas.openxmlformats.org/presentationml/2006/main">
+<p:presentation xmlns:a="http://schemas.openxmlformats.org/drawingml/2006/main" xmlns:r="http://schemas.openxmlformats.org/officeDocument/2006/relationships" xmlns:p="http://schemas.openxmlformats.org/presentationml/2006/main">
   <p:sldMasterIdLst>
-    <p:sldMasterId xmlns:r="http://schemas.openxmlformats.org/officeDocument/2006/relationships" id="2147483648" r:id="R95a8ec4e7bd34178"/>
+    <p:sldMasterId id="2147483648" r:id="rId1"/>
   </p:sldMasterIdLst>
   <p:notesMasterIdLst>
-    <p:notesMasterId xmlns:r="http://schemas.openxmlformats.org/officeDocument/2006/relationships" r:id="R904cabaf72c840e9"/>
+    <p:notesMasterId r:id="rId10"/>
   </p:notesMasterIdLst>
   <p:sldIdLst>
-    <p:sldId xmlns:r="http://schemas.openxmlformats.org/officeDocument/2006/relationships" id="256" r:id="Rd04606e82f9d4968"/>
-    <p:sldId xmlns:r="http://schemas.openxmlformats.org/officeDocument/2006/relationships" id="257" r:id="R203bcf91248c44ce"/>
-    <p:sldId xmlns:r="http://schemas.openxmlformats.org/officeDocument/2006/relationships" id="258" r:id="Rbcdd733fde224155"/>
-    <p:sldId xmlns:r="http://schemas.openxmlformats.org/officeDocument/2006/relationships" id="259" r:id="R406b3d4764d047d5"/>
-    <p:sldId xmlns:r="http://schemas.openxmlformats.org/officeDocument/2006/relationships" id="260" r:id="R58a350e7187c48ac"/>
-    <p:sldId xmlns:r="http://schemas.openxmlformats.org/officeDocument/2006/relationships" id="261" r:id="Rdda65acd595a4a69"/>
-    <p:sldId xmlns:r="http://schemas.openxmlformats.org/officeDocument/2006/relationships" id="262" r:id="R69872275003d422a"/>
-    <p:sldId xmlns:r="http://schemas.openxmlformats.org/officeDocument/2006/relationships" id="263" r:id="Rdaf8ea296bea4f52"/>
-    <p:sldId xmlns:r="http://schemas.openxmlformats.org/officeDocument/2006/relationships" id="264" r:id="R808b592911db4609"/>
+    <p:sldId id="256" r:id="rId2"/>
+    <p:sldId id="257" r:id="rId3"/>
+    <p:sldId id="258" r:id="rId4"/>
+    <p:sldId id="259" r:id="rId5"/>
+    <p:sldId id="260" r:id="rId6"/>
+    <p:sldId id="261" r:id="rId7"/>
+    <p:sldId id="262" r:id="rId8"/>
+    <p:sldId id="263" r:id="rId9"/>
   </p:sldIdLst>
   <p:sldSz cx="12192000" cy="6858000"/>
   <p:notesSz cx="6858000" cy="9144000"/>
+  <p:defaultTextStyle>
+    <a:defPPr>
+      <a:defRPr lang="en-US"/>
+    </a:defPPr>
+    <a:lvl1pPr marL="0" algn="l" defTabSz="914400" rtl="0" eaLnBrk="1" latinLnBrk="0" hangingPunct="1">
+      <a:defRPr sz="1800" kern="1200">
+        <a:solidFill>
+          <a:schemeClr val="tx1"/>
+        </a:solidFill>
+        <a:latin typeface="+mn-lt"/>
+        <a:ea typeface="+mn-ea"/>
+        <a:cs typeface="+mn-cs"/>
+      </a:defRPr>
+    </a:lvl1pPr>
+    <a:lvl2pPr marL="457200" algn="l" defTabSz="914400" rtl="0" eaLnBrk="1" latinLnBrk="0" hangingPunct="1">
+      <a:defRPr sz="1800" kern="1200">
+        <a:solidFill>
+          <a:schemeClr val="tx1"/>
+        </a:solidFill>
+        <a:latin typeface="+mn-lt"/>
+        <a:ea typeface="+mn-ea"/>
+        <a:cs typeface="+mn-cs"/>
+      </a:defRPr>
+    </a:lvl2pPr>
+    <a:lvl3pPr marL="914400" algn="l" defTabSz="914400" rtl="0" eaLnBrk="1" latinLnBrk="0" hangingPunct="1">
+      <a:defRPr sz="1800" kern="1200">
+        <a:solidFill>
+          <a:schemeClr val="tx1"/>
+        </a:solidFill>
+        <a:latin typeface="+mn-lt"/>
+        <a:ea typeface="+mn-ea"/>
+        <a:cs typeface="+mn-cs"/>
+      </a:defRPr>
+    </a:lvl3pPr>
+    <a:lvl4pPr marL="1371600" algn="l" defTabSz="914400" rtl="0" eaLnBrk="1" latinLnBrk="0" hangingPunct="1">
+      <a:defRPr sz="1800" kern="1200">
+        <a:solidFill>
+          <a:schemeClr val="tx1"/>
+        </a:solidFill>
+        <a:latin typeface="+mn-lt"/>
+        <a:ea typeface="+mn-ea"/>
+        <a:cs typeface="+mn-cs"/>
+      </a:defRPr>
+    </a:lvl4pPr>
+    <a:lvl5pPr marL="1828800" algn="l" defTabSz="914400" rtl="0" eaLnBrk="1" latinLnBrk="0" hangingPunct="1">
+      <a:defRPr sz="1800" kern="1200">
+        <a:solidFill>
+          <a:schemeClr val="tx1"/>
+        </a:solidFill>
+        <a:latin typeface="+mn-lt"/>
+        <a:ea typeface="+mn-ea"/>
+        <a:cs typeface="+mn-cs"/>
+      </a:defRPr>
+    </a:lvl5pPr>
+    <a:lvl6pPr marL="2286000" algn="l" defTabSz="914400" rtl="0" eaLnBrk="1" latinLnBrk="0" hangingPunct="1">
+      <a:defRPr sz="1800" kern="1200">
+        <a:solidFill>
+          <a:schemeClr val="tx1"/>
+        </a:solidFill>
+        <a:latin typeface="+mn-lt"/>
+        <a:ea typeface="+mn-ea"/>
+        <a:cs typeface="+mn-cs"/>
+      </a:defRPr>
+    </a:lvl6pPr>
+    <a:lvl7pPr marL="2743200" algn="l" defTabSz="914400" rtl="0" eaLnBrk="1" latinLnBrk="0" hangingPunct="1">
+      <a:defRPr sz="1800" kern="1200">
+        <a:solidFill>
+          <a:schemeClr val="tx1"/>
+        </a:solidFill>
+        <a:latin typeface="+mn-lt"/>
+        <a:ea typeface="+mn-ea"/>
+        <a:cs typeface="+mn-cs"/>
+      </a:defRPr>
+    </a:lvl7pPr>
+    <a:lvl8pPr marL="3200400" algn="l" defTabSz="914400" rtl="0" eaLnBrk="1" latinLnBrk="0" hangingPunct="1">
+      <a:defRPr sz="1800" kern="1200">
+        <a:solidFill>
+          <a:schemeClr val="tx1"/>
+        </a:solidFill>
+        <a:latin typeface="+mn-lt"/>
+        <a:ea typeface="+mn-ea"/>
+        <a:cs typeface="+mn-cs"/>
+      </a:defRPr>
+    </a:lvl8pPr>
+    <a:lvl9pPr marL="3657600" algn="l" defTabSz="914400" rtl="0" eaLnBrk="1" latinLnBrk="0" hangingPunct="1">
+      <a:defRPr sz="1800" kern="1200">
+        <a:solidFill>
+          <a:schemeClr val="tx1"/>
+        </a:solidFill>
+        <a:latin typeface="+mn-lt"/>
+        <a:ea typeface="+mn-ea"/>
+        <a:cs typeface="+mn-cs"/>
+      </a:defRPr>
+    </a:lvl9pPr>
+  </p:defaultTextStyle>
 </p:presentation>
 </file>
 
+<file path=ppt/changesInfos/changesInfo1.xml><?xml version="1.0" encoding="utf-8"?>
+<pc:chgInfo xmlns:a="http://schemas.openxmlformats.org/drawingml/2006/main" xmlns:r="http://schemas.openxmlformats.org/officeDocument/2006/relationships" xmlns:ac="http://schemas.microsoft.com/office/drawing/2013/main/command" xmlns:pc="http://schemas.microsoft.com/office/powerpoint/2013/main/command">
+  <pc:docChgLst>
+    <pc:chgData name="Shreeya Reddy. L" userId="7ee774c2013c48a3" providerId="LiveId" clId="{30187567-5C2E-44DE-B446-40AA8BC80A68}"/>
+    <pc:docChg chg="delSld">
+      <pc:chgData name="Shreeya Reddy. L" userId="7ee774c2013c48a3" providerId="LiveId" clId="{30187567-5C2E-44DE-B446-40AA8BC80A68}" dt="2026-10-16T18:06:17.640" v="0" actId="2696"/>
+      <pc:docMkLst>
+        <pc:docMk/>
+      </pc:docMkLst>
+      <pc:sldChg chg="del">
+        <pc:chgData name="Shreeya Reddy. L" userId="7ee774c2013c48a3" providerId="LiveId" clId="{30187567-5C2E-44DE-B446-40AA8BC80A68}" dt="2026-10-16T18:06:17.640" v="0" actId="2696"/>
+        <pc:sldMkLst>
+          <pc:docMk/>
+          <pc:sldMk cId="545301366" sldId="264"/>
+        </pc:sldMkLst>
+      </pc:sldChg>
+    </pc:docChg>
+  </pc:docChgLst>
+</pc:chgInfo>
+</file>
+
 <file path=ppt/notesMasters/notesMaster1.xml><?xml version="1.0" encoding="utf-8"?>
-<p:notesMaster xmlns:p="http://schemas.openxmlformats.org/presentationml/2006/main">
+<p:notesMaster xmlns:a="http://schemas.openxmlformats.org/drawingml/2006/main" xmlns:r="http://schemas.openxmlformats.org/officeDocument/2006/relationships" xmlns:p="http://schemas.openxmlformats.org/presentationml/2006/main">
   <p:cSld>
     <p:bg>
       <p:bgRef idx="1001">
-        <a:schemeClr xmlns:a="http://schemas.openxmlformats.org/drawingml/2006/main" val="bg1"/>
+        <a:schemeClr val="bg1"/>
       </p:bgRef>
     </p:bg>
     <p:spTree>
@@ -38,380 +153,164 @@
         <p:nvPr/>
       </p:nvGrpSpPr>
       <p:grpSpPr>
-        <a:xfrm xmlns:a="http://schemas.openxmlformats.org/drawingml/2006/main"/>
+        <a:xfrm>
+          <a:off x="0" y="0"/>
+          <a:ext cx="0" cy="0"/>
+          <a:chOff x="0" y="0"/>
+          <a:chExt cx="0" cy="0"/>
+        </a:xfrm>
       </p:grpSpPr>
       <p:sp>
         <p:nvSpPr>
           <p:cNvPr id="2" name="Header Placeholder"/>
-          <p:cNvSpPr/>
+          <p:cNvSpPr>
+            <a:spLocks noGrp="1"/>
+          </p:cNvSpPr>
           <p:nvPr>
             <p:ph type="hdr" sz="quarter"/>
           </p:nvPr>
         </p:nvSpPr>
         <p:spPr>
-          <a:prstGeom xmlns:a="http://schemas.openxmlformats.org/drawingml/2006/main" prst="rect">
+          <a:prstGeom prst="rect">
             <a:avLst/>
           </a:prstGeom>
         </p:spPr>
         <p:txBody>
-          <a:bodyPr xmlns:a="http://schemas.openxmlformats.org/drawingml/2006/main"/>
-          <a:lstStyle xmlns:a="http://schemas.openxmlformats.org/drawingml/2006/main"/>
-          <a:p xmlns:a="http://schemas.openxmlformats.org/drawingml/2006/main"/>
+          <a:bodyPr/>
+          <a:lstStyle/>
+          <a:p>
+            <a:endParaRPr/>
+          </a:p>
         </p:txBody>
       </p:sp>
       <p:sp>
         <p:nvSpPr>
           <p:cNvPr id="3" name="Date Placeholder"/>
-          <p:cNvSpPr/>
+          <p:cNvSpPr>
+            <a:spLocks noGrp="1"/>
+          </p:cNvSpPr>
           <p:nvPr>
             <p:ph type="dt" sz="quarter" idx="1"/>
           </p:nvPr>
         </p:nvSpPr>
         <p:spPr>
-          <a:prstGeom xmlns:a="http://schemas.openxmlformats.org/drawingml/2006/main" prst="rect">
+          <a:prstGeom prst="rect">
             <a:avLst/>
           </a:prstGeom>
         </p:spPr>
         <p:txBody>
-          <a:bodyPr xmlns:a="http://schemas.openxmlformats.org/drawingml/2006/main"/>
-          <a:lstStyle xmlns:a="http://schemas.openxmlformats.org/drawingml/2006/main"/>
-          <a:p xmlns:a="http://schemas.openxmlformats.org/drawingml/2006/main"/>
+          <a:bodyPr/>
+          <a:lstStyle/>
+          <a:p>
+            <a:endParaRPr/>
+          </a:p>
         </p:txBody>
       </p:sp>
       <p:sp>
         <p:nvSpPr>
           <p:cNvPr id="4" name="Slide Image Placeholder"/>
-          <p:cNvSpPr/>
+          <p:cNvSpPr>
+            <a:spLocks noGrp="1" noRot="1" noChangeAspect="1"/>
+          </p:cNvSpPr>
           <p:nvPr>
             <p:ph type="sldImg" idx="2"/>
           </p:nvPr>
         </p:nvSpPr>
         <p:spPr>
-          <a:prstGeom xmlns:a="http://schemas.openxmlformats.org/drawingml/2006/main" prst="rect">
+          <a:prstGeom prst="rect">
             <a:avLst/>
           </a:prstGeom>
         </p:spPr>
         <p:txBody>
-          <a:bodyPr xmlns:a="http://schemas.openxmlformats.org/drawingml/2006/main"/>
-          <a:lstStyle xmlns:a="http://schemas.openxmlformats.org/drawingml/2006/main"/>
-          <a:p xmlns:a="http://schemas.openxmlformats.org/drawingml/2006/main"/>
+          <a:bodyPr/>
+          <a:lstStyle/>
+          <a:p>
+            <a:endParaRPr/>
+          </a:p>
         </p:txBody>
       </p:sp>
       <p:sp>
         <p:nvSpPr>
           <p:cNvPr id="5" name="Notes Placeholder"/>
-          <p:cNvSpPr/>
+          <p:cNvSpPr>
+            <a:spLocks noGrp="1"/>
+          </p:cNvSpPr>
           <p:nvPr>
             <p:ph type="body" sz="quarter" idx="3"/>
           </p:nvPr>
         </p:nvSpPr>
         <p:spPr>
-          <a:prstGeom xmlns:a="http://schemas.openxmlformats.org/drawingml/2006/main" prst="rect">
+          <a:prstGeom prst="rect">
             <a:avLst/>
           </a:prstGeom>
         </p:spPr>
         <p:txBody>
-          <a:bodyPr xmlns:a="http://schemas.openxmlformats.org/drawingml/2006/main"/>
-          <a:lstStyle xmlns:a="http://schemas.openxmlformats.org/drawingml/2006/main"/>
-          <a:p xmlns:a="http://schemas.openxmlformats.org/drawingml/2006/main"/>
+          <a:bodyPr/>
+          <a:lstStyle/>
+          <a:p>
+            <a:endParaRPr/>
+          </a:p>
         </p:txBody>
       </p:sp>
       <p:sp>
         <p:nvSpPr>
           <p:cNvPr id="6" name="Footer Placeholder"/>
-          <p:cNvSpPr/>
+          <p:cNvSpPr>
+            <a:spLocks noGrp="1"/>
+          </p:cNvSpPr>
           <p:nvPr>
             <p:ph type="ftr" sz="quarter" idx="4"/>
           </p:nvPr>
         </p:nvSpPr>
         <p:spPr>
-          <a:prstGeom xmlns:a="http://schemas.openxmlformats.org/drawingml/2006/main" prst="rect">
+          <a:prstGeom prst="rect">
             <a:avLst/>
           </a:prstGeom>
         </p:spPr>
         <p:txBody>
-          <a:bodyPr xmlns:a="http://schemas.openxmlformats.org/drawingml/2006/main"/>
-          <a:lstStyle xmlns:a="http://schemas.openxmlformats.org/drawingml/2006/main"/>
-          <a:p xmlns:a="http://schemas.openxmlformats.org/drawingml/2006/main"/>
+          <a:bodyPr/>
+          <a:lstStyle/>
+          <a:p>
+            <a:endParaRPr/>
+          </a:p>
         </p:txBody>
       </p:sp>
       <p:sp>
         <p:nvSpPr>
           <p:cNvPr id="7" name="Slide Number Placeholder"/>
-          <p:cNvSpPr/>
+          <p:cNvSpPr>
+            <a:spLocks noGrp="1"/>
+          </p:cNvSpPr>
           <p:nvPr>
             <p:ph type="sldNum" sz="quarter" idx="5"/>
           </p:nvPr>
         </p:nvSpPr>
         <p:spPr>
-          <a:prstGeom xmlns:a="http://schemas.openxmlformats.org/drawingml/2006/main" prst="rect">
+          <a:prstGeom prst="rect">
             <a:avLst/>
           </a:prstGeom>
         </p:spPr>
         <p:txBody>
-          <a:bodyPr xmlns:a="http://schemas.openxmlformats.org/drawingml/2006/main"/>
-          <a:lstStyle xmlns:a="http://schemas.openxmlformats.org/drawingml/2006/main"/>
-          <a:p xmlns:a="http://schemas.openxmlformats.org/drawingml/2006/main"/>
+          <a:bodyPr/>
+          <a:lstStyle/>
+          <a:p>
+            <a:endParaRPr/>
+          </a:p>
         </p:txBody>
       </p:sp>
     </p:spTree>
   </p:cSld>
   <p:clrMap bg1="lt1" tx1="dk1" bg2="lt2" tx2="dk2" accent1="accent1" accent2="accent2" accent3="accent3" accent4="accent4" accent5="accent5" accent6="accent6" hlink="hlink" folHlink="folHlink"/>
   <p:notesStyle>
-    <a:lvl1pPr xmlns:a="http://schemas.openxmlformats.org/drawingml/2006/main" marL="0" algn="l" defTabSz="914400" rtl="0" eaLnBrk="1" latinLnBrk="0" hangingPunct="1">
+    <a:lvl1pPr marL="0" algn="l" defTabSz="914400" rtl="0" eaLnBrk="1" latinLnBrk="0" hangingPunct="1">
       <a:defRPr sz="1200" kern="1200"/>
     </a:lvl1pPr>
   </p:notesStyle>
 </p:notesMaster>
 </file>
 
-<file path=ppt/notesMasters/theme/theme3.xml><?xml version="1.0" encoding="utf-8"?>
-<a:theme xmlns:a="http://schemas.openxmlformats.org/drawingml/2006/main" name="ChatGPT">
-  <a:themeElements>
-    <a:clrScheme name="ChatGPT">
-      <a:dk1>
-        <a:srgbClr val="000000"/>
-      </a:dk1>
-      <a:lt1>
-        <a:srgbClr val="FFFFFF"/>
-      </a:lt1>
-      <a:dk2>
-        <a:srgbClr val="0E2841"/>
-      </a:dk2>
-      <a:lt2>
-        <a:srgbClr val="E8E8E8"/>
-      </a:lt2>
-      <a:accent1>
-        <a:srgbClr val="156082"/>
-      </a:accent1>
-      <a:accent2>
-        <a:srgbClr val="E97132"/>
-      </a:accent2>
-      <a:accent3>
-        <a:srgbClr val="196B24"/>
-      </a:accent3>
-      <a:accent4>
-        <a:srgbClr val="0F9ED5"/>
-      </a:accent4>
-      <a:accent5>
-        <a:srgbClr val="A02B93"/>
-      </a:accent5>
-      <a:accent6>
-        <a:srgbClr val="4EA72E"/>
-      </a:accent6>
-      <a:hlink>
-        <a:srgbClr val="467886"/>
-      </a:hlink>
-      <a:folHlink>
-        <a:srgbClr val="96607D"/>
-      </a:folHlink>
-    </a:clrScheme>
-    <a:fontScheme name="">
-      <a:majorFont>
-        <a:latin typeface="Aptos"/>
-        <a:ea typeface=""/>
-        <a:cs typeface=""/>
-      </a:majorFont>
-      <a:minorFont>
-        <a:latin typeface="Aptos"/>
-        <a:ea typeface=""/>
-        <a:cs typeface=""/>
-      </a:minorFont>
-    </a:fontScheme>
-    <a:fmtScheme name="ChatGPT">
-      <a:fillStyleLst>
-        <a:solidFill>
-          <a:schemeClr val="phClr"/>
-        </a:solidFill>
-        <a:gradFill>
-          <a:gsLst>
-            <a:gs pos="0">
-              <a:schemeClr val="phClr">
-                <a:tint val="67000"/>
-                <a:lumMod val="110000"/>
-                <a:satMod val="105000"/>
-              </a:schemeClr>
-            </a:gs>
-            <a:gs pos="50000">
-              <a:schemeClr val="phClr">
-                <a:tint val="73000"/>
-                <a:lumMod val="105000"/>
-                <a:satMod val="103000"/>
-              </a:schemeClr>
-            </a:gs>
-            <a:gs pos="100000">
-              <a:schemeClr val="phClr">
-                <a:tint val="81000"/>
-                <a:lumMod val="105000"/>
-                <a:satMod val="109000"/>
-              </a:schemeClr>
-            </a:gs>
-          </a:gsLst>
-          <a:lin ang="5400000" scaled="0"/>
-        </a:gradFill>
-        <a:gradFill>
-          <a:gsLst>
-            <a:gs pos="0">
-              <a:schemeClr val="phClr">
-                <a:tint val="94000"/>
-                <a:lumMod val="102000"/>
-                <a:satMod val="103000"/>
-              </a:schemeClr>
-            </a:gs>
-            <a:gs pos="50000">
-              <a:schemeClr val="phClr">
-                <a:shade val="100000"/>
-                <a:lumMod val="100000"/>
-                <a:satMod val="110000"/>
-              </a:schemeClr>
-            </a:gs>
-            <a:gs pos="100000">
-              <a:schemeClr val="phClr">
-                <a:shade val="78000"/>
-                <a:lumMod val="99000"/>
-                <a:satMod val="120000"/>
-              </a:schemeClr>
-            </a:gs>
-          </a:gsLst>
-          <a:lin ang="5400000" scaled="0"/>
-        </a:gradFill>
-      </a:fillStyleLst>
-      <a:lnStyleLst>
-        <a:ln w="12700">
-          <a:solidFill>
-            <a:schemeClr val="phClr"/>
-          </a:solidFill>
-          <a:prstDash val="solid"/>
-        </a:ln>
-        <a:ln w="19050">
-          <a:solidFill>
-            <a:schemeClr val="phClr"/>
-          </a:solidFill>
-          <a:prstDash val="solid"/>
-        </a:ln>
-        <a:ln w="25400">
-          <a:solidFill>
-            <a:schemeClr val="phClr"/>
-          </a:solidFill>
-          <a:prstDash val="solid"/>
-        </a:ln>
-      </a:lnStyleLst>
-      <a:effectStyleLst>
-        <a:effectStyle>
-          <a:effectLst/>
-        </a:effectStyle>
-        <a:effectStyle>
-          <a:effectLst/>
-        </a:effectStyle>
-        <a:effectStyle>
-          <a:effectLst>
-            <a:outerShdw blurRad="57150" dist="19050" dir="5400000">
-              <a:srgbClr val="000000">
-                <a:alpha val="16000"/>
-              </a:srgbClr>
-            </a:outerShdw>
-          </a:effectLst>
-        </a:effectStyle>
-        <a:effectStyle>
-          <a:effectLst>
-            <a:outerShdw blurRad="19050" dist="9525" dir="5400000">
-              <a:srgbClr val="000000">
-                <a:alpha val="6000"/>
-              </a:srgbClr>
-            </a:outerShdw>
-          </a:effectLst>
-        </a:effectStyle>
-        <a:effectStyle>
-          <a:effectLst>
-            <a:outerShdw blurRad="28575" dist="9525" dir="5400000">
-              <a:srgbClr val="000000">
-                <a:alpha val="8000"/>
-              </a:srgbClr>
-            </a:outerShdw>
-          </a:effectLst>
-        </a:effectStyle>
-        <a:effectStyle>
-          <a:effectLst>
-            <a:outerShdw blurRad="57150" dist="19050" dir="5400000">
-              <a:srgbClr val="000000">
-                <a:alpha val="10000"/>
-              </a:srgbClr>
-            </a:outerShdw>
-          </a:effectLst>
-        </a:effectStyle>
-        <a:effectStyle>
-          <a:effectLst>
-            <a:outerShdw blurRad="114300" dist="38100" dir="5400000">
-              <a:srgbClr val="000000">
-                <a:alpha val="12000"/>
-              </a:srgbClr>
-            </a:outerShdw>
-          </a:effectLst>
-        </a:effectStyle>
-        <a:effectStyle>
-          <a:effectLst>
-            <a:outerShdw blurRad="171450" dist="57150" dir="5400000">
-              <a:srgbClr val="000000">
-                <a:alpha val="16000"/>
-              </a:srgbClr>
-            </a:outerShdw>
-          </a:effectLst>
-        </a:effectStyle>
-        <a:effectStyle>
-          <a:effectLst>
-            <a:outerShdw blurRad="266700" dist="95250" dir="5400000">
-              <a:srgbClr val="000000">
-                <a:alpha val="24000"/>
-              </a:srgbClr>
-            </a:outerShdw>
-          </a:effectLst>
-        </a:effectStyle>
-      </a:effectStyleLst>
-      <a:bgFillStyleLst>
-        <a:solidFill>
-          <a:schemeClr val="phClr"/>
-        </a:solidFill>
-        <a:solidFill>
-          <a:schemeClr val="phClr">
-            <a:tint val="95000"/>
-            <a:satMod val="170000"/>
-          </a:schemeClr>
-        </a:solidFill>
-        <a:gradFill>
-          <a:gsLst>
-            <a:gs pos="0">
-              <a:schemeClr val="phClr">
-                <a:tint val="93000"/>
-                <a:shade val="98000"/>
-                <a:lumMod val="102000"/>
-                <a:satMod val="150000"/>
-              </a:schemeClr>
-            </a:gs>
-            <a:gs pos="50000">
-              <a:schemeClr val="phClr">
-                <a:tint val="98000"/>
-                <a:shade val="90000"/>
-                <a:lumMod val="103000"/>
-                <a:satMod val="130000"/>
-              </a:schemeClr>
-            </a:gs>
-            <a:gs pos="100000">
-              <a:schemeClr val="phClr">
-                <a:shade val="63000"/>
-                <a:satMod val="120000"/>
-              </a:schemeClr>
-            </a:gs>
-          </a:gsLst>
-          <a:lin ang="5400000" scaled="0"/>
-        </a:gradFill>
-      </a:bgFillStyleLst>
-    </a:fmtScheme>
-  </a:themeElements>
-</a:theme>
-</file>
-
 <file path=ppt/notesSlides/notesSlide1.xml><?xml version="1.0" encoding="utf-8"?>
-<p:notes xmlns:p="http://schemas.openxmlformats.org/presentationml/2006/main">
+<p:notes xmlns:a="http://schemas.openxmlformats.org/drawingml/2006/main" xmlns:r="http://schemas.openxmlformats.org/officeDocument/2006/relationships" xmlns:p="http://schemas.openxmlformats.org/presentationml/2006/main">
   <p:cSld>
     <p:spTree>
       <p:nvGrpSpPr>
@@ -420,16 +319,21 @@
         <p:nvPr/>
       </p:nvGrpSpPr>
       <p:grpSpPr>
-        <a:xfrm xmlns:a="http://schemas.openxmlformats.org/drawingml/2006/main"/>
+        <a:xfrm>
+          <a:off x="0" y="0"/>
+          <a:ext cx="0" cy="0"/>
+          <a:chOff x="0" y="0"/>
+          <a:chExt cx="0" cy="0"/>
+        </a:xfrm>
       </p:grpSpPr>
       <p:sp>
         <p:nvSpPr>
           <p:cNvPr id="2" name="Slide Image Placeholder 1"/>
           <p:cNvSpPr>
-            <a:spLocks xmlns:a="http://schemas.openxmlformats.org/drawingml/2006/main" noGrp="1"/>
+            <a:spLocks noGrp="1" noRot="1" noChangeAspect="1"/>
           </p:cNvSpPr>
           <p:nvPr>
-            <p:ph type="sldImg" idx="0"/>
+            <p:ph type="sldImg"/>
           </p:nvPr>
         </p:nvSpPr>
         <p:spPr/>
@@ -438,7 +342,7 @@
         <p:nvSpPr>
           <p:cNvPr id="3" name="Notes Placeholder 2"/>
           <p:cNvSpPr>
-            <a:spLocks xmlns:a="http://schemas.openxmlformats.org/drawingml/2006/main" noGrp="1"/>
+            <a:spLocks noGrp="1"/>
           </p:cNvSpPr>
           <p:nvPr>
             <p:ph type="body" idx="1"/>
@@ -446,9 +350,9 @@
         </p:nvSpPr>
         <p:spPr/>
         <p:txBody>
-          <a:bodyPr xmlns:a="http://schemas.openxmlformats.org/drawingml/2006/main"/>
-          <a:lstStyle xmlns:a="http://schemas.openxmlformats.org/drawingml/2006/main"/>
-          <a:p xmlns:a="http://schemas.openxmlformats.org/drawingml/2006/main">
+          <a:bodyPr/>
+          <a:lstStyle/>
+          <a:p>
             <a:r>
               <a:t>Recording guide, 10–15 seconds: introduce CampusFix as a campus issue reporting and tracking application. Say the project name is CampusFix because the capstone rubric asks for the student's own application domain; TaskBoard is the reference starter, not the required product name.</a:t>
             </a:r>
@@ -459,7 +363,7 @@
         <p:nvSpPr>
           <p:cNvPr id="4" name="Slide Number Placeholder 3"/>
           <p:cNvSpPr>
-            <a:spLocks xmlns:a="http://schemas.openxmlformats.org/drawingml/2006/main" noGrp="1"/>
+            <a:spLocks noGrp="1"/>
           </p:cNvSpPr>
           <p:nvPr>
             <p:ph type="sldNum" idx="5"/>
@@ -467,21 +371,23 @@
         </p:nvSpPr>
         <p:spPr/>
         <p:txBody>
-          <a:bodyPr xmlns:a="http://schemas.openxmlformats.org/drawingml/2006/main"/>
-          <a:lstStyle xmlns:a="http://schemas.openxmlformats.org/drawingml/2006/main"/>
-          <a:p xmlns:a="http://schemas.openxmlformats.org/drawingml/2006/main"/>
+          <a:bodyPr/>
+          <a:lstStyle/>
+          <a:p>
+            <a:endParaRPr/>
+          </a:p>
         </p:txBody>
       </p:sp>
     </p:spTree>
   </p:cSld>
   <p:clrMapOvr>
-    <a:masterClrMapping xmlns:a="http://schemas.openxmlformats.org/drawingml/2006/main"/>
+    <a:masterClrMapping/>
   </p:clrMapOvr>
 </p:notes>
 </file>
 
 <file path=ppt/notesSlides/notesSlide2.xml><?xml version="1.0" encoding="utf-8"?>
-<p:notes xmlns:p="http://schemas.openxmlformats.org/presentationml/2006/main">
+<p:notes xmlns:a="http://schemas.openxmlformats.org/drawingml/2006/main" xmlns:r="http://schemas.openxmlformats.org/officeDocument/2006/relationships" xmlns:p="http://schemas.openxmlformats.org/presentationml/2006/main">
   <p:cSld>
     <p:spTree>
       <p:nvGrpSpPr>
@@ -490,16 +396,21 @@
         <p:nvPr/>
       </p:nvGrpSpPr>
       <p:grpSpPr>
-        <a:xfrm xmlns:a="http://schemas.openxmlformats.org/drawingml/2006/main"/>
+        <a:xfrm>
+          <a:off x="0" y="0"/>
+          <a:ext cx="0" cy="0"/>
+          <a:chOff x="0" y="0"/>
+          <a:chExt cx="0" cy="0"/>
+        </a:xfrm>
       </p:grpSpPr>
       <p:sp>
         <p:nvSpPr>
           <p:cNvPr id="2" name="Slide Image Placeholder 1"/>
           <p:cNvSpPr>
-            <a:spLocks xmlns:a="http://schemas.openxmlformats.org/drawingml/2006/main" noGrp="1"/>
+            <a:spLocks noGrp="1" noRot="1" noChangeAspect="1"/>
           </p:cNvSpPr>
           <p:nvPr>
-            <p:ph type="sldImg" idx="0"/>
+            <p:ph type="sldImg"/>
           </p:nvPr>
         </p:nvSpPr>
         <p:spPr/>
@@ -508,7 +419,7 @@
         <p:nvSpPr>
           <p:cNvPr id="3" name="Notes Placeholder 2"/>
           <p:cNvSpPr>
-            <a:spLocks xmlns:a="http://schemas.openxmlformats.org/drawingml/2006/main" noGrp="1"/>
+            <a:spLocks noGrp="1"/>
           </p:cNvSpPr>
           <p:nvPr>
             <p:ph type="body" idx="1"/>
@@ -516,9 +427,9 @@
         </p:nvSpPr>
         <p:spPr/>
         <p:txBody>
-          <a:bodyPr xmlns:a="http://schemas.openxmlformats.org/drawingml/2006/main"/>
-          <a:lstStyle xmlns:a="http://schemas.openxmlformats.org/drawingml/2006/main"/>
-          <a:p xmlns:a="http://schemas.openxmlformats.org/drawingml/2006/main">
+          <a:bodyPr/>
+          <a:lstStyle/>
+          <a:p>
             <a:r>
               <a:t>Recording guide, about 30 seconds: show the current Compose app in the browser. Explain the custom campus domain, then create one safe demo ticket if a live demonstration is required. The current image is evidence from the running Compose stack; screenshots 09 and 10 are older captures.</a:t>
             </a:r>
@@ -529,7 +440,7 @@
         <p:nvSpPr>
           <p:cNvPr id="4" name="Slide Number Placeholder 3"/>
           <p:cNvSpPr>
-            <a:spLocks xmlns:a="http://schemas.openxmlformats.org/drawingml/2006/main" noGrp="1"/>
+            <a:spLocks noGrp="1"/>
           </p:cNvSpPr>
           <p:nvPr>
             <p:ph type="sldNum" idx="5"/>
@@ -537,21 +448,23 @@
         </p:nvSpPr>
         <p:spPr/>
         <p:txBody>
-          <a:bodyPr xmlns:a="http://schemas.openxmlformats.org/drawingml/2006/main"/>
-          <a:lstStyle xmlns:a="http://schemas.openxmlformats.org/drawingml/2006/main"/>
-          <a:p xmlns:a="http://schemas.openxmlformats.org/drawingml/2006/main"/>
+          <a:bodyPr/>
+          <a:lstStyle/>
+          <a:p>
+            <a:endParaRPr/>
+          </a:p>
         </p:txBody>
       </p:sp>
     </p:spTree>
   </p:cSld>
   <p:clrMapOvr>
-    <a:masterClrMapping xmlns:a="http://schemas.openxmlformats.org/drawingml/2006/main"/>
+    <a:masterClrMapping/>
   </p:clrMapOvr>
 </p:notes>
 </file>
 
 <file path=ppt/notesSlides/notesSlide3.xml><?xml version="1.0" encoding="utf-8"?>
-<p:notes xmlns:p="http://schemas.openxmlformats.org/presentationml/2006/main">
+<p:notes xmlns:a="http://schemas.openxmlformats.org/drawingml/2006/main" xmlns:r="http://schemas.openxmlformats.org/officeDocument/2006/relationships" xmlns:p="http://schemas.openxmlformats.org/presentationml/2006/main">
   <p:cSld>
     <p:spTree>
       <p:nvGrpSpPr>
@@ -560,16 +473,21 @@
         <p:nvPr/>
       </p:nvGrpSpPr>
       <p:grpSpPr>
-        <a:xfrm xmlns:a="http://schemas.openxmlformats.org/drawingml/2006/main"/>
+        <a:xfrm>
+          <a:off x="0" y="0"/>
+          <a:ext cx="0" cy="0"/>
+          <a:chOff x="0" y="0"/>
+          <a:chExt cx="0" cy="0"/>
+        </a:xfrm>
       </p:grpSpPr>
       <p:sp>
         <p:nvSpPr>
           <p:cNvPr id="2" name="Slide Image Placeholder 1"/>
           <p:cNvSpPr>
-            <a:spLocks xmlns:a="http://schemas.openxmlformats.org/drawingml/2006/main" noGrp="1"/>
+            <a:spLocks noGrp="1" noRot="1" noChangeAspect="1"/>
           </p:cNvSpPr>
           <p:nvPr>
-            <p:ph type="sldImg" idx="0"/>
+            <p:ph type="sldImg"/>
           </p:nvPr>
         </p:nvSpPr>
         <p:spPr/>
@@ -578,7 +496,7 @@
         <p:nvSpPr>
           <p:cNvPr id="3" name="Notes Placeholder 2"/>
           <p:cNvSpPr>
-            <a:spLocks xmlns:a="http://schemas.openxmlformats.org/drawingml/2006/main" noGrp="1"/>
+            <a:spLocks noGrp="1"/>
           </p:cNvSpPr>
           <p:nvPr>
             <p:ph type="body" idx="1"/>
@@ -586,9 +504,9 @@
         </p:nvSpPr>
         <p:spPr/>
         <p:txBody>
-          <a:bodyPr xmlns:a="http://schemas.openxmlformats.org/drawingml/2006/main"/>
-          <a:lstStyle xmlns:a="http://schemas.openxmlformats.org/drawingml/2006/main"/>
-          <a:p xmlns:a="http://schemas.openxmlformats.org/drawingml/2006/main">
+          <a:bodyPr/>
+          <a:lstStyle/>
+          <a:p>
             <a:r>
               <a:t>Recording guide, about 25 seconds: trace one ticket request from the browser to the API and PostgreSQL. Then explain that the /metrics endpoint is scraped by Prometheus and visualized in Grafana. Mention that Compose runs this locally and Helm deploys it to Kubernetes.</a:t>
             </a:r>
@@ -599,7 +517,7 @@
         <p:nvSpPr>
           <p:cNvPr id="4" name="Slide Number Placeholder 3"/>
           <p:cNvSpPr>
-            <a:spLocks xmlns:a="http://schemas.openxmlformats.org/drawingml/2006/main" noGrp="1"/>
+            <a:spLocks noGrp="1"/>
           </p:cNvSpPr>
           <p:nvPr>
             <p:ph type="sldNum" idx="5"/>
@@ -607,21 +525,23 @@
         </p:nvSpPr>
         <p:spPr/>
         <p:txBody>
-          <a:bodyPr xmlns:a="http://schemas.openxmlformats.org/drawingml/2006/main"/>
-          <a:lstStyle xmlns:a="http://schemas.openxmlformats.org/drawingml/2006/main"/>
-          <a:p xmlns:a="http://schemas.openxmlformats.org/drawingml/2006/main"/>
+          <a:bodyPr/>
+          <a:lstStyle/>
+          <a:p>
+            <a:endParaRPr/>
+          </a:p>
         </p:txBody>
       </p:sp>
     </p:spTree>
   </p:cSld>
   <p:clrMapOvr>
-    <a:masterClrMapping xmlns:a="http://schemas.openxmlformats.org/drawingml/2006/main"/>
+    <a:masterClrMapping/>
   </p:clrMapOvr>
 </p:notes>
 </file>
 
 <file path=ppt/notesSlides/notesSlide4.xml><?xml version="1.0" encoding="utf-8"?>
-<p:notes xmlns:p="http://schemas.openxmlformats.org/presentationml/2006/main">
+<p:notes xmlns:a="http://schemas.openxmlformats.org/drawingml/2006/main" xmlns:r="http://schemas.openxmlformats.org/officeDocument/2006/relationships" xmlns:p="http://schemas.openxmlformats.org/presentationml/2006/main">
   <p:cSld>
     <p:spTree>
       <p:nvGrpSpPr>
@@ -630,16 +550,21 @@
         <p:nvPr/>
       </p:nvGrpSpPr>
       <p:grpSpPr>
-        <a:xfrm xmlns:a="http://schemas.openxmlformats.org/drawingml/2006/main"/>
+        <a:xfrm>
+          <a:off x="0" y="0"/>
+          <a:ext cx="0" cy="0"/>
+          <a:chOff x="0" y="0"/>
+          <a:chExt cx="0" cy="0"/>
+        </a:xfrm>
       </p:grpSpPr>
       <p:sp>
         <p:nvSpPr>
           <p:cNvPr id="2" name="Slide Image Placeholder 1"/>
           <p:cNvSpPr>
-            <a:spLocks xmlns:a="http://schemas.openxmlformats.org/drawingml/2006/main" noGrp="1"/>
+            <a:spLocks noGrp="1" noRot="1" noChangeAspect="1"/>
           </p:cNvSpPr>
           <p:nvPr>
-            <p:ph type="sldImg" idx="0"/>
+            <p:ph type="sldImg"/>
           </p:nvPr>
         </p:nvSpPr>
         <p:spPr/>
@@ -648,7 +573,7 @@
         <p:nvSpPr>
           <p:cNvPr id="3" name="Notes Placeholder 2"/>
           <p:cNvSpPr>
-            <a:spLocks xmlns:a="http://schemas.openxmlformats.org/drawingml/2006/main" noGrp="1"/>
+            <a:spLocks noGrp="1"/>
           </p:cNvSpPr>
           <p:nvPr>
             <p:ph type="body" idx="1"/>
@@ -656,9 +581,9 @@
         </p:nvSpPr>
         <p:spPr/>
         <p:txBody>
-          <a:bodyPr xmlns:a="http://schemas.openxmlformats.org/drawingml/2006/main"/>
-          <a:lstStyle xmlns:a="http://schemas.openxmlformats.org/drawingml/2006/main"/>
-          <a:p xmlns:a="http://schemas.openxmlformats.org/drawingml/2006/main">
+          <a:bodyPr/>
+          <a:lstStyle/>
+          <a:p>
             <a:r>
               <a:t>Recording guide, about 30 seconds: show the metrics endpoint screenshot, then switch to a real terminal and run `python -m pytest -v backend` from the repository root or the documented equivalent inside the backend container. The last local run passed 25 tests with two third-party deprecation warnings. Capture that terminal output separately; this deck image is not a terminal screenshot.</a:t>
             </a:r>
@@ -669,7 +594,7 @@
         <p:nvSpPr>
           <p:cNvPr id="4" name="Slide Number Placeholder 3"/>
           <p:cNvSpPr>
-            <a:spLocks xmlns:a="http://schemas.openxmlformats.org/drawingml/2006/main" noGrp="1"/>
+            <a:spLocks noGrp="1"/>
           </p:cNvSpPr>
           <p:nvPr>
             <p:ph type="sldNum" idx="5"/>
@@ -677,21 +602,23 @@
         </p:nvSpPr>
         <p:spPr/>
         <p:txBody>
-          <a:bodyPr xmlns:a="http://schemas.openxmlformats.org/drawingml/2006/main"/>
-          <a:lstStyle xmlns:a="http://schemas.openxmlformats.org/drawingml/2006/main"/>
-          <a:p xmlns:a="http://schemas.openxmlformats.org/drawingml/2006/main"/>
+          <a:bodyPr/>
+          <a:lstStyle/>
+          <a:p>
+            <a:endParaRPr/>
+          </a:p>
         </p:txBody>
       </p:sp>
     </p:spTree>
   </p:cSld>
   <p:clrMapOvr>
-    <a:masterClrMapping xmlns:a="http://schemas.openxmlformats.org/drawingml/2006/main"/>
+    <a:masterClrMapping/>
   </p:clrMapOvr>
 </p:notes>
 </file>
 
 <file path=ppt/notesSlides/notesSlide5.xml><?xml version="1.0" encoding="utf-8"?>
-<p:notes xmlns:p="http://schemas.openxmlformats.org/presentationml/2006/main">
+<p:notes xmlns:a="http://schemas.openxmlformats.org/drawingml/2006/main" xmlns:r="http://schemas.openxmlformats.org/officeDocument/2006/relationships" xmlns:p="http://schemas.openxmlformats.org/presentationml/2006/main">
   <p:cSld>
     <p:spTree>
       <p:nvGrpSpPr>
@@ -700,16 +627,21 @@
         <p:nvPr/>
       </p:nvGrpSpPr>
       <p:grpSpPr>
-        <a:xfrm xmlns:a="http://schemas.openxmlformats.org/drawingml/2006/main"/>
+        <a:xfrm>
+          <a:off x="0" y="0"/>
+          <a:ext cx="0" cy="0"/>
+          <a:chOff x="0" y="0"/>
+          <a:chExt cx="0" cy="0"/>
+        </a:xfrm>
       </p:grpSpPr>
       <p:sp>
         <p:nvSpPr>
           <p:cNvPr id="2" name="Slide Image Placeholder 1"/>
           <p:cNvSpPr>
-            <a:spLocks xmlns:a="http://schemas.openxmlformats.org/drawingml/2006/main" noGrp="1"/>
+            <a:spLocks noGrp="1" noRot="1" noChangeAspect="1"/>
           </p:cNvSpPr>
           <p:nvPr>
-            <p:ph type="sldImg" idx="0"/>
+            <p:ph type="sldImg"/>
           </p:nvPr>
         </p:nvSpPr>
         <p:spPr/>
@@ -718,7 +650,7 @@
         <p:nvSpPr>
           <p:cNvPr id="3" name="Notes Placeholder 2"/>
           <p:cNvSpPr>
-            <a:spLocks xmlns:a="http://schemas.openxmlformats.org/drawingml/2006/main" noGrp="1"/>
+            <a:spLocks noGrp="1"/>
           </p:cNvSpPr>
           <p:nvPr>
             <p:ph type="body" idx="1"/>
@@ -726,9 +658,9 @@
         </p:nvSpPr>
         <p:spPr/>
         <p:txBody>
-          <a:bodyPr xmlns:a="http://schemas.openxmlformats.org/drawingml/2006/main"/>
-          <a:lstStyle xmlns:a="http://schemas.openxmlformats.org/drawingml/2006/main"/>
-          <a:p xmlns:a="http://schemas.openxmlformats.org/drawingml/2006/main">
+          <a:bodyPr/>
+          <a:lstStyle/>
+          <a:p>
             <a:r>
               <a:t>Recording guide, about 25 seconds: explain that the Windows laptop runs Ubuntu through WSL 2 and Docker Engine inside that Linux environment. Show `docker compose ps` with the three healthy services, then the browser at localhost:3000. Capture `docker compose up --build` output separately for M4.</a:t>
             </a:r>
@@ -739,7 +671,7 @@
         <p:nvSpPr>
           <p:cNvPr id="4" name="Slide Number Placeholder 3"/>
           <p:cNvSpPr>
-            <a:spLocks xmlns:a="http://schemas.openxmlformats.org/drawingml/2006/main" noGrp="1"/>
+            <a:spLocks noGrp="1"/>
           </p:cNvSpPr>
           <p:nvPr>
             <p:ph type="sldNum" idx="5"/>
@@ -747,21 +679,23 @@
         </p:nvSpPr>
         <p:spPr/>
         <p:txBody>
-          <a:bodyPr xmlns:a="http://schemas.openxmlformats.org/drawingml/2006/main"/>
-          <a:lstStyle xmlns:a="http://schemas.openxmlformats.org/drawingml/2006/main"/>
-          <a:p xmlns:a="http://schemas.openxmlformats.org/drawingml/2006/main"/>
+          <a:bodyPr/>
+          <a:lstStyle/>
+          <a:p>
+            <a:endParaRPr/>
+          </a:p>
         </p:txBody>
       </p:sp>
     </p:spTree>
   </p:cSld>
   <p:clrMapOvr>
-    <a:masterClrMapping xmlns:a="http://schemas.openxmlformats.org/drawingml/2006/main"/>
+    <a:masterClrMapping/>
   </p:clrMapOvr>
 </p:notes>
 </file>
 
 <file path=ppt/notesSlides/notesSlide6.xml><?xml version="1.0" encoding="utf-8"?>
-<p:notes xmlns:p="http://schemas.openxmlformats.org/presentationml/2006/main">
+<p:notes xmlns:a="http://schemas.openxmlformats.org/drawingml/2006/main" xmlns:r="http://schemas.openxmlformats.org/officeDocument/2006/relationships" xmlns:p="http://schemas.openxmlformats.org/presentationml/2006/main">
   <p:cSld>
     <p:spTree>
       <p:nvGrpSpPr>
@@ -770,16 +704,21 @@
         <p:nvPr/>
       </p:nvGrpSpPr>
       <p:grpSpPr>
-        <a:xfrm xmlns:a="http://schemas.openxmlformats.org/drawingml/2006/main"/>
+        <a:xfrm>
+          <a:off x="0" y="0"/>
+          <a:ext cx="0" cy="0"/>
+          <a:chOff x="0" y="0"/>
+          <a:chExt cx="0" cy="0"/>
+        </a:xfrm>
       </p:grpSpPr>
       <p:sp>
         <p:nvSpPr>
           <p:cNvPr id="2" name="Slide Image Placeholder 1"/>
           <p:cNvSpPr>
-            <a:spLocks xmlns:a="http://schemas.openxmlformats.org/drawingml/2006/main" noGrp="1"/>
+            <a:spLocks noGrp="1" noRot="1" noChangeAspect="1"/>
           </p:cNvSpPr>
           <p:nvPr>
-            <p:ph type="sldImg" idx="0"/>
+            <p:ph type="sldImg"/>
           </p:nvPr>
         </p:nvSpPr>
         <p:spPr/>
@@ -788,7 +727,7 @@
         <p:nvSpPr>
           <p:cNvPr id="3" name="Notes Placeholder 2"/>
           <p:cNvSpPr>
-            <a:spLocks xmlns:a="http://schemas.openxmlformats.org/drawingml/2006/main" noGrp="1"/>
+            <a:spLocks noGrp="1"/>
           </p:cNvSpPr>
           <p:nvPr>
             <p:ph type="body" idx="1"/>
@@ -796,9 +735,9 @@
         </p:nvSpPr>
         <p:spPr/>
         <p:txBody>
-          <a:bodyPr xmlns:a="http://schemas.openxmlformats.org/drawingml/2006/main"/>
-          <a:lstStyle xmlns:a="http://schemas.openxmlformats.org/drawingml/2006/main"/>
-          <a:p xmlns:a="http://schemas.openxmlformats.org/drawingml/2006/main">
+          <a:bodyPr/>
+          <a:lstStyle/>
+          <a:p>
             <a:r>
               <a:t>Recording guide, about 35 seconds: show the application from the Minikube Ingress, then switch to the Linux terminal and show `kubectl get pods -n campusfix`, `kubectl get svc -n campusfix`, and `helm list -n campusfix`. The current local namespace has five app/database pods running. Capture all three terminal commands as separate rubric evidence.</a:t>
             </a:r>
@@ -809,7 +748,7 @@
         <p:nvSpPr>
           <p:cNvPr id="4" name="Slide Number Placeholder 3"/>
           <p:cNvSpPr>
-            <a:spLocks xmlns:a="http://schemas.openxmlformats.org/drawingml/2006/main" noGrp="1"/>
+            <a:spLocks noGrp="1"/>
           </p:cNvSpPr>
           <p:nvPr>
             <p:ph type="sldNum" idx="5"/>
@@ -817,21 +756,23 @@
         </p:nvSpPr>
         <p:spPr/>
         <p:txBody>
-          <a:bodyPr xmlns:a="http://schemas.openxmlformats.org/drawingml/2006/main"/>
-          <a:lstStyle xmlns:a="http://schemas.openxmlformats.org/drawingml/2006/main"/>
-          <a:p xmlns:a="http://schemas.openxmlformats.org/drawingml/2006/main"/>
+          <a:bodyPr/>
+          <a:lstStyle/>
+          <a:p>
+            <a:endParaRPr/>
+          </a:p>
         </p:txBody>
       </p:sp>
     </p:spTree>
   </p:cSld>
   <p:clrMapOvr>
-    <a:masterClrMapping xmlns:a="http://schemas.openxmlformats.org/drawingml/2006/main"/>
+    <a:masterClrMapping/>
   </p:clrMapOvr>
 </p:notes>
 </file>
 
 <file path=ppt/notesSlides/notesSlide7.xml><?xml version="1.0" encoding="utf-8"?>
-<p:notes xmlns:p="http://schemas.openxmlformats.org/presentationml/2006/main">
+<p:notes xmlns:a="http://schemas.openxmlformats.org/drawingml/2006/main" xmlns:r="http://schemas.openxmlformats.org/officeDocument/2006/relationships" xmlns:p="http://schemas.openxmlformats.org/presentationml/2006/main">
   <p:cSld>
     <p:spTree>
       <p:nvGrpSpPr>
@@ -840,16 +781,21 @@
         <p:nvPr/>
       </p:nvGrpSpPr>
       <p:grpSpPr>
-        <a:xfrm xmlns:a="http://schemas.openxmlformats.org/drawingml/2006/main"/>
+        <a:xfrm>
+          <a:off x="0" y="0"/>
+          <a:ext cx="0" cy="0"/>
+          <a:chOff x="0" y="0"/>
+          <a:chExt cx="0" cy="0"/>
+        </a:xfrm>
       </p:grpSpPr>
       <p:sp>
         <p:nvSpPr>
           <p:cNvPr id="2" name="Slide Image Placeholder 1"/>
           <p:cNvSpPr>
-            <a:spLocks xmlns:a="http://schemas.openxmlformats.org/drawingml/2006/main" noGrp="1"/>
+            <a:spLocks noGrp="1" noRot="1" noChangeAspect="1"/>
           </p:cNvSpPr>
           <p:nvPr>
-            <p:ph type="sldImg" idx="0"/>
+            <p:ph type="sldImg"/>
           </p:nvPr>
         </p:nvSpPr>
         <p:spPr/>
@@ -858,7 +804,7 @@
         <p:nvSpPr>
           <p:cNvPr id="3" name="Notes Placeholder 2"/>
           <p:cNvSpPr>
-            <a:spLocks xmlns:a="http://schemas.openxmlformats.org/drawingml/2006/main" noGrp="1"/>
+            <a:spLocks noGrp="1"/>
           </p:cNvSpPr>
           <p:nvPr>
             <p:ph type="body" idx="1"/>
@@ -866,9 +812,9 @@
         </p:nvSpPr>
         <p:spPr/>
         <p:txBody>
-          <a:bodyPr xmlns:a="http://schemas.openxmlformats.org/drawingml/2006/main"/>
-          <a:lstStyle xmlns:a="http://schemas.openxmlformats.org/drawingml/2006/main"/>
-          <a:p xmlns:a="http://schemas.openxmlformats.org/drawingml/2006/main">
+          <a:bodyPr/>
+          <a:lstStyle/>
+          <a:p>
             <a:r>
               <a:t>Recording guide, about 35 seconds: show the Prometheus Targets page and point out both CampusFix backend targets are UP. Open the CampusFix Grafana dashboard and briefly explain the request, pod, route-rate, latency, and response-status panels. The `/metrics` page is on slide 4; for the rubric also capture the required `curl` output in the terminal.</a:t>
             </a:r>
@@ -879,7 +825,7 @@
         <p:nvSpPr>
           <p:cNvPr id="4" name="Slide Number Placeholder 3"/>
           <p:cNvSpPr>
-            <a:spLocks xmlns:a="http://schemas.openxmlformats.org/drawingml/2006/main" noGrp="1"/>
+            <a:spLocks noGrp="1"/>
           </p:cNvSpPr>
           <p:nvPr>
             <p:ph type="sldNum" idx="5"/>
@@ -887,21 +833,23 @@
         </p:nvSpPr>
         <p:spPr/>
         <p:txBody>
-          <a:bodyPr xmlns:a="http://schemas.openxmlformats.org/drawingml/2006/main"/>
-          <a:lstStyle xmlns:a="http://schemas.openxmlformats.org/drawingml/2006/main"/>
-          <a:p xmlns:a="http://schemas.openxmlformats.org/drawingml/2006/main"/>
+          <a:bodyPr/>
+          <a:lstStyle/>
+          <a:p>
+            <a:endParaRPr/>
+          </a:p>
         </p:txBody>
       </p:sp>
     </p:spTree>
   </p:cSld>
   <p:clrMapOvr>
-    <a:masterClrMapping xmlns:a="http://schemas.openxmlformats.org/drawingml/2006/main"/>
+    <a:masterClrMapping/>
   </p:clrMapOvr>
 </p:notes>
 </file>
 
 <file path=ppt/notesSlides/notesSlide8.xml><?xml version="1.0" encoding="utf-8"?>
-<p:notes xmlns:p="http://schemas.openxmlformats.org/presentationml/2006/main">
+<p:notes xmlns:a="http://schemas.openxmlformats.org/drawingml/2006/main" xmlns:r="http://schemas.openxmlformats.org/officeDocument/2006/relationships" xmlns:p="http://schemas.openxmlformats.org/presentationml/2006/main">
   <p:cSld>
     <p:spTree>
       <p:nvGrpSpPr>
@@ -910,16 +858,21 @@
         <p:nvPr/>
       </p:nvGrpSpPr>
       <p:grpSpPr>
-        <a:xfrm xmlns:a="http://schemas.openxmlformats.org/drawingml/2006/main"/>
+        <a:xfrm>
+          <a:off x="0" y="0"/>
+          <a:ext cx="0" cy="0"/>
+          <a:chOff x="0" y="0"/>
+          <a:chExt cx="0" cy="0"/>
+        </a:xfrm>
       </p:grpSpPr>
       <p:sp>
         <p:nvSpPr>
           <p:cNvPr id="2" name="Slide Image Placeholder 1"/>
           <p:cNvSpPr>
-            <a:spLocks xmlns:a="http://schemas.openxmlformats.org/drawingml/2006/main" noGrp="1"/>
+            <a:spLocks noGrp="1" noRot="1" noChangeAspect="1"/>
           </p:cNvSpPr>
           <p:nvPr>
-            <p:ph type="sldImg" idx="0"/>
+            <p:ph type="sldImg"/>
           </p:nvPr>
         </p:nvSpPr>
         <p:spPr/>
@@ -928,7 +881,7 @@
         <p:nvSpPr>
           <p:cNvPr id="3" name="Notes Placeholder 2"/>
           <p:cNvSpPr>
-            <a:spLocks xmlns:a="http://schemas.openxmlformats.org/drawingml/2006/main" noGrp="1"/>
+            <a:spLocks noGrp="1"/>
           </p:cNvSpPr>
           <p:nvPr>
             <p:ph type="body" idx="1"/>
@@ -936,9 +889,9 @@
         </p:nvSpPr>
         <p:spPr/>
         <p:txBody>
-          <a:bodyPr xmlns:a="http://schemas.openxmlformats.org/drawingml/2006/main"/>
-          <a:lstStyle xmlns:a="http://schemas.openxmlformats.org/drawingml/2006/main"/>
-          <a:p xmlns:a="http://schemas.openxmlformats.org/drawingml/2006/main">
+          <a:bodyPr/>
+          <a:lstStyle/>
+          <a:p>
             <a:r>
               <a:t>Recording guide, about 40 seconds: describe the pipeline stages from the workflow file. Explain that local Trivy scans are clean for HIGH and CRITICAL findings, but distinguish those local results from the required Actions run output. Do not claim GHCR publication or a live pipeline run; no push was made. The M10 live demo remains outstanding until a change is pushed and deployment credentials are available.</a:t>
             </a:r>
@@ -949,7 +902,7 @@
         <p:nvSpPr>
           <p:cNvPr id="4" name="Slide Number Placeholder 3"/>
           <p:cNvSpPr>
-            <a:spLocks xmlns:a="http://schemas.openxmlformats.org/drawingml/2006/main" noGrp="1"/>
+            <a:spLocks noGrp="1"/>
           </p:cNvSpPr>
           <p:nvPr>
             <p:ph type="sldNum" idx="5"/>
@@ -957,91 +910,23 @@
         </p:nvSpPr>
         <p:spPr/>
         <p:txBody>
-          <a:bodyPr xmlns:a="http://schemas.openxmlformats.org/drawingml/2006/main"/>
-          <a:lstStyle xmlns:a="http://schemas.openxmlformats.org/drawingml/2006/main"/>
-          <a:p xmlns:a="http://schemas.openxmlformats.org/drawingml/2006/main"/>
+          <a:bodyPr/>
+          <a:lstStyle/>
+          <a:p>
+            <a:endParaRPr/>
+          </a:p>
         </p:txBody>
       </p:sp>
     </p:spTree>
   </p:cSld>
   <p:clrMapOvr>
-    <a:masterClrMapping xmlns:a="http://schemas.openxmlformats.org/drawingml/2006/main"/>
-  </p:clrMapOvr>
-</p:notes>
-</file>
-
-<file path=ppt/notesSlides/notesSlide9.xml><?xml version="1.0" encoding="utf-8"?>
-<p:notes xmlns:p="http://schemas.openxmlformats.org/presentationml/2006/main">
-  <p:cSld>
-    <p:spTree>
-      <p:nvGrpSpPr>
-        <p:cNvPr id="1" name=""/>
-        <p:cNvGrpSpPr/>
-        <p:nvPr/>
-      </p:nvGrpSpPr>
-      <p:grpSpPr>
-        <a:xfrm xmlns:a="http://schemas.openxmlformats.org/drawingml/2006/main"/>
-      </p:grpSpPr>
-      <p:sp>
-        <p:nvSpPr>
-          <p:cNvPr id="2" name="Slide Image Placeholder 1"/>
-          <p:cNvSpPr>
-            <a:spLocks xmlns:a="http://schemas.openxmlformats.org/drawingml/2006/main" noGrp="1"/>
-          </p:cNvSpPr>
-          <p:nvPr>
-            <p:ph type="sldImg" idx="0"/>
-          </p:nvPr>
-        </p:nvSpPr>
-        <p:spPr/>
-      </p:sp>
-      <p:sp>
-        <p:nvSpPr>
-          <p:cNvPr id="3" name="Notes Placeholder 2"/>
-          <p:cNvSpPr>
-            <a:spLocks xmlns:a="http://schemas.openxmlformats.org/drawingml/2006/main" noGrp="1"/>
-          </p:cNvSpPr>
-          <p:nvPr>
-            <p:ph type="body" idx="1"/>
-          </p:nvPr>
-        </p:nvSpPr>
-        <p:spPr/>
-        <p:txBody>
-          <a:bodyPr xmlns:a="http://schemas.openxmlformats.org/drawingml/2006/main"/>
-          <a:lstStyle xmlns:a="http://schemas.openxmlformats.org/drawingml/2006/main"/>
-          <a:p xmlns:a="http://schemas.openxmlformats.org/drawingml/2006/main">
-            <a:r>
-              <a:t>Recording guide, about 25 seconds: show the verified CI run and describe what it proves. Run #4 on commit ba32c7a succeeded. Backend tests, frontend build, both Trivy scans, and GHCR publication of public SHA-tagged images passed. No findings matched the configured HIGH/CRITICAL gate. Deployment skipped because this workflow deploys only from main. AWS resources are not provisioned yet. After connecting the personal account, record the Terraform plan, provision EKS, deploy with Helm, and show the rollout.</a:t>
-            </a:r>
-          </a:p>
-        </p:txBody>
-      </p:sp>
-      <p:sp>
-        <p:nvSpPr>
-          <p:cNvPr id="4" name="Slide Number Placeholder 3"/>
-          <p:cNvSpPr>
-            <a:spLocks xmlns:a="http://schemas.openxmlformats.org/drawingml/2006/main" noGrp="1"/>
-          </p:cNvSpPr>
-          <p:nvPr>
-            <p:ph type="sldNum" idx="5"/>
-          </p:nvPr>
-        </p:nvSpPr>
-        <p:spPr/>
-        <p:txBody>
-          <a:bodyPr xmlns:a="http://schemas.openxmlformats.org/drawingml/2006/main"/>
-          <a:lstStyle xmlns:a="http://schemas.openxmlformats.org/drawingml/2006/main"/>
-          <a:p xmlns:a="http://schemas.openxmlformats.org/drawingml/2006/main"/>
-        </p:txBody>
-      </p:sp>
-    </p:spTree>
-  </p:cSld>
-  <p:clrMapOvr>
-    <a:masterClrMapping xmlns:a="http://schemas.openxmlformats.org/drawingml/2006/main"/>
+    <a:masterClrMapping/>
   </p:clrMapOvr>
 </p:notes>
 </file>
 
 <file path=ppt/slideLayouts/slideLayout1.xml><?xml version="1.0" encoding="utf-8"?>
-<p:sldLayout xmlns:p="http://schemas.openxmlformats.org/presentationml/2006/main" type="title">
+<p:sldLayout xmlns:a="http://schemas.openxmlformats.org/drawingml/2006/main" xmlns:r="http://schemas.openxmlformats.org/officeDocument/2006/relationships" xmlns:p="http://schemas.openxmlformats.org/presentationml/2006/main" type="title">
   <p:cSld name="Title Slide">
     <p:spTree>
       <p:nvGrpSpPr>
@@ -1050,43 +935,48 @@
         <p:nvPr/>
       </p:nvGrpSpPr>
       <p:grpSpPr>
-        <a:xfrm xmlns:a="http://schemas.openxmlformats.org/drawingml/2006/main"/>
+        <a:xfrm>
+          <a:off x="0" y="0"/>
+          <a:ext cx="0" cy="0"/>
+          <a:chOff x="0" y="0"/>
+          <a:chExt cx="0" cy="0"/>
+        </a:xfrm>
       </p:grpSpPr>
       <p:sp>
         <p:nvSpPr>
           <p:cNvPr id="3" name="Title">
-            <a:extLst xmlns:a="http://schemas.openxmlformats.org/drawingml/2006/main">
+            <a:extLst>
               <a:ext uri="{FF2B5EF4-FFF2-40B4-BE49-F238E27FC236}">
                 <a16:creationId xmlns:a16="http://schemas.microsoft.com/office/drawing/2014/main" id="{267F36D0-8784-4346-9D7E-63EA1994B73E}"/>
               </a:ext>
             </a:extLst>
           </p:cNvPr>
           <p:cNvSpPr>
-            <a:spLocks xmlns:a="http://schemas.openxmlformats.org/drawingml/2006/main" noGrp="1"/>
+            <a:spLocks noGrp="1"/>
           </p:cNvSpPr>
           <p:nvPr>
-            <p:ph type="title" idx="0"/>
+            <p:ph type="title"/>
           </p:nvPr>
         </p:nvSpPr>
         <p:spPr>
-          <a:xfrm xmlns:a="http://schemas.openxmlformats.org/drawingml/2006/main">
+          <a:xfrm>
             <a:off x="1219200" y="2590800"/>
             <a:ext cx="9753600" cy="990600"/>
           </a:xfrm>
-          <a:prstGeom xmlns:a="http://schemas.openxmlformats.org/drawingml/2006/main" prst="rect">
+          <a:prstGeom prst="rect">
             <a:avLst/>
           </a:prstGeom>
-          <a:noFill xmlns:a="http://schemas.openxmlformats.org/drawingml/2006/main"/>
-          <a:ln xmlns:a="http://schemas.openxmlformats.org/drawingml/2006/main">
+          <a:noFill/>
+          <a:ln>
             <a:noFill/>
             <a:prstDash val="solid"/>
           </a:ln>
         </p:spPr>
         <p:txBody>
-          <a:bodyPr xmlns:a="http://schemas.openxmlformats.org/drawingml/2006/main" wrap="square" lIns="0" tIns="0" rIns="0" bIns="0" anchor="ctr">
+          <a:bodyPr wrap="square" lIns="0" tIns="0" rIns="0" bIns="0" anchor="ctr">
             <a:normAutofit/>
           </a:bodyPr>
-          <a:lstStyle xmlns:a="http://schemas.openxmlformats.org/drawingml/2006/main">
+          <a:lstStyle>
             <a:defPPr algn="ctr">
               <a:defRPr sz="4800" b="1">
                 <a:solidFill>
@@ -1215,44 +1105,46 @@
               <a:defRPr/>
             </a:lvl9pPr>
           </a:lstStyle>
-          <a:p xmlns:a="http://schemas.openxmlformats.org/drawingml/2006/main"/>
+          <a:p>
+            <a:endParaRPr/>
+          </a:p>
         </p:txBody>
       </p:sp>
       <p:sp>
         <p:nvSpPr>
           <p:cNvPr id="2" name="Subtitle">
-            <a:extLst xmlns:a="http://schemas.openxmlformats.org/drawingml/2006/main">
+            <a:extLst>
               <a:ext uri="{FF2B5EF4-FFF2-40B4-BE49-F238E27FC236}">
                 <a16:creationId xmlns:a16="http://schemas.microsoft.com/office/drawing/2014/main" id="{002E2D9C-58C7-44B1-8274-F7F8AE02D80B}"/>
               </a:ext>
             </a:extLst>
           </p:cNvPr>
           <p:cNvSpPr>
-            <a:spLocks xmlns:a="http://schemas.openxmlformats.org/drawingml/2006/main" noGrp="1"/>
+            <a:spLocks noGrp="1"/>
           </p:cNvSpPr>
           <p:nvPr>
             <p:ph type="subTitle" idx="1"/>
           </p:nvPr>
         </p:nvSpPr>
         <p:spPr>
-          <a:xfrm xmlns:a="http://schemas.openxmlformats.org/drawingml/2006/main">
+          <a:xfrm>
             <a:off x="1828800" y="3771900"/>
             <a:ext cx="8534400" cy="762000"/>
           </a:xfrm>
-          <a:prstGeom xmlns:a="http://schemas.openxmlformats.org/drawingml/2006/main" prst="rect">
+          <a:prstGeom prst="rect">
             <a:avLst/>
           </a:prstGeom>
-          <a:noFill xmlns:a="http://schemas.openxmlformats.org/drawingml/2006/main"/>
-          <a:ln xmlns:a="http://schemas.openxmlformats.org/drawingml/2006/main">
+          <a:noFill/>
+          <a:ln>
             <a:noFill/>
             <a:prstDash val="solid"/>
           </a:ln>
         </p:spPr>
         <p:txBody>
-          <a:bodyPr xmlns:a="http://schemas.openxmlformats.org/drawingml/2006/main" wrap="square" lIns="0" tIns="0" rIns="0" bIns="0" anchor="ctr">
+          <a:bodyPr wrap="square" lIns="0" tIns="0" rIns="0" bIns="0" anchor="ctr">
             <a:normAutofit/>
           </a:bodyPr>
-          <a:lstStyle xmlns:a="http://schemas.openxmlformats.org/drawingml/2006/main">
+          <a:lstStyle>
             <a:defPPr algn="ctr">
               <a:defRPr sz="2100" b="0">
                 <a:solidFill>
@@ -1381,16 +1273,21 @@
               <a:defRPr/>
             </a:lvl9pPr>
           </a:lstStyle>
-          <a:p xmlns:a="http://schemas.openxmlformats.org/drawingml/2006/main"/>
+          <a:p>
+            <a:endParaRPr/>
+          </a:p>
         </p:txBody>
       </p:sp>
     </p:spTree>
   </p:cSld>
+  <p:clrMapOvr>
+    <a:masterClrMapping/>
+  </p:clrMapOvr>
 </p:sldLayout>
 </file>
 
 <file path=ppt/slideLayouts/slideLayout2.xml><?xml version="1.0" encoding="utf-8"?>
-<p:sldLayout xmlns:p="http://schemas.openxmlformats.org/presentationml/2006/main">
+<p:sldLayout xmlns:a="http://schemas.openxmlformats.org/drawingml/2006/main" xmlns:r="http://schemas.openxmlformats.org/officeDocument/2006/relationships" xmlns:p="http://schemas.openxmlformats.org/presentationml/2006/main">
   <p:cSld name="Section Header">
     <p:spTree>
       <p:nvGrpSpPr>
@@ -1399,43 +1296,48 @@
         <p:nvPr/>
       </p:nvGrpSpPr>
       <p:grpSpPr>
-        <a:xfrm xmlns:a="http://schemas.openxmlformats.org/drawingml/2006/main"/>
+        <a:xfrm>
+          <a:off x="0" y="0"/>
+          <a:ext cx="0" cy="0"/>
+          <a:chOff x="0" y="0"/>
+          <a:chExt cx="0" cy="0"/>
+        </a:xfrm>
       </p:grpSpPr>
       <p:sp>
         <p:nvSpPr>
           <p:cNvPr id="2" name="Section title">
-            <a:extLst xmlns:a="http://schemas.openxmlformats.org/drawingml/2006/main">
+            <a:extLst>
               <a:ext uri="{FF2B5EF4-FFF2-40B4-BE49-F238E27FC236}">
                 <a16:creationId xmlns:a16="http://schemas.microsoft.com/office/drawing/2014/main" id="{7DE5AB12-5164-4B61-A8C2-97E08904AC58}"/>
               </a:ext>
             </a:extLst>
           </p:cNvPr>
           <p:cNvSpPr>
-            <a:spLocks xmlns:a="http://schemas.openxmlformats.org/drawingml/2006/main" noGrp="1"/>
+            <a:spLocks noGrp="1"/>
           </p:cNvSpPr>
           <p:nvPr>
-            <p:ph type="title" idx="0"/>
+            <p:ph type="title"/>
           </p:nvPr>
         </p:nvSpPr>
         <p:spPr>
-          <a:xfrm xmlns:a="http://schemas.openxmlformats.org/drawingml/2006/main">
+          <a:xfrm>
             <a:off x="1219200" y="2857500"/>
             <a:ext cx="9753600" cy="1143000"/>
           </a:xfrm>
-          <a:prstGeom xmlns:a="http://schemas.openxmlformats.org/drawingml/2006/main" prst="rect">
+          <a:prstGeom prst="rect">
             <a:avLst/>
           </a:prstGeom>
-          <a:noFill xmlns:a="http://schemas.openxmlformats.org/drawingml/2006/main"/>
-          <a:ln xmlns:a="http://schemas.openxmlformats.org/drawingml/2006/main">
+          <a:noFill/>
+          <a:ln>
             <a:noFill/>
             <a:prstDash val="solid"/>
           </a:ln>
         </p:spPr>
         <p:txBody>
-          <a:bodyPr xmlns:a="http://schemas.openxmlformats.org/drawingml/2006/main" wrap="square" lIns="0" tIns="0" rIns="0" bIns="0" anchor="ctr">
+          <a:bodyPr wrap="square" lIns="0" tIns="0" rIns="0" bIns="0" anchor="ctr">
             <a:normAutofit/>
           </a:bodyPr>
-          <a:lstStyle xmlns:a="http://schemas.openxmlformats.org/drawingml/2006/main">
+          <a:lstStyle>
             <a:defPPr algn="ctr">
               <a:defRPr sz="4200" b="1">
                 <a:solidFill>
@@ -1564,16 +1466,21 @@
               <a:defRPr/>
             </a:lvl9pPr>
           </a:lstStyle>
-          <a:p xmlns:a="http://schemas.openxmlformats.org/drawingml/2006/main"/>
+          <a:p>
+            <a:endParaRPr/>
+          </a:p>
         </p:txBody>
       </p:sp>
     </p:spTree>
   </p:cSld>
+  <p:clrMapOvr>
+    <a:masterClrMapping/>
+  </p:clrMapOvr>
 </p:sldLayout>
 </file>
 
 <file path=ppt/slideLayouts/slideLayout3.xml><?xml version="1.0" encoding="utf-8"?>
-<p:sldLayout xmlns:p="http://schemas.openxmlformats.org/presentationml/2006/main">
+<p:sldLayout xmlns:a="http://schemas.openxmlformats.org/drawingml/2006/main" xmlns:r="http://schemas.openxmlformats.org/officeDocument/2006/relationships" xmlns:p="http://schemas.openxmlformats.org/presentationml/2006/main">
   <p:cSld name="Title and Body">
     <p:spTree>
       <p:nvGrpSpPr>
@@ -1582,43 +1489,48 @@
         <p:nvPr/>
       </p:nvGrpSpPr>
       <p:grpSpPr>
-        <a:xfrm xmlns:a="http://schemas.openxmlformats.org/drawingml/2006/main"/>
+        <a:xfrm>
+          <a:off x="0" y="0"/>
+          <a:ext cx="0" cy="0"/>
+          <a:chOff x="0" y="0"/>
+          <a:chExt cx="0" cy="0"/>
+        </a:xfrm>
       </p:grpSpPr>
       <p:sp>
         <p:nvSpPr>
           <p:cNvPr id="3" name="Title">
-            <a:extLst xmlns:a="http://schemas.openxmlformats.org/drawingml/2006/main">
+            <a:extLst>
               <a:ext uri="{FF2B5EF4-FFF2-40B4-BE49-F238E27FC236}">
                 <a16:creationId xmlns:a16="http://schemas.microsoft.com/office/drawing/2014/main" id="{475E55C9-3B1C-4806-A1F0-3B05A63FA56F}"/>
               </a:ext>
             </a:extLst>
           </p:cNvPr>
           <p:cNvSpPr>
-            <a:spLocks xmlns:a="http://schemas.openxmlformats.org/drawingml/2006/main" noGrp="1"/>
+            <a:spLocks noGrp="1"/>
           </p:cNvSpPr>
           <p:nvPr>
-            <p:ph type="title" idx="0"/>
+            <p:ph type="title"/>
           </p:nvPr>
         </p:nvSpPr>
         <p:spPr>
-          <a:xfrm xmlns:a="http://schemas.openxmlformats.org/drawingml/2006/main">
+          <a:xfrm>
             <a:off x="685800" y="533400"/>
             <a:ext cx="10820400" cy="838200"/>
           </a:xfrm>
-          <a:prstGeom xmlns:a="http://schemas.openxmlformats.org/drawingml/2006/main" prst="rect">
+          <a:prstGeom prst="rect">
             <a:avLst/>
           </a:prstGeom>
-          <a:noFill xmlns:a="http://schemas.openxmlformats.org/drawingml/2006/main"/>
-          <a:ln xmlns:a="http://schemas.openxmlformats.org/drawingml/2006/main">
+          <a:noFill/>
+          <a:ln>
             <a:noFill/>
             <a:prstDash val="solid"/>
           </a:ln>
         </p:spPr>
         <p:txBody>
-          <a:bodyPr xmlns:a="http://schemas.openxmlformats.org/drawingml/2006/main" wrap="square" lIns="0" tIns="0" rIns="0" bIns="0" anchor="t">
+          <a:bodyPr wrap="square" lIns="0" tIns="0" rIns="0" bIns="0" anchor="t">
             <a:normAutofit/>
           </a:bodyPr>
-          <a:lstStyle xmlns:a="http://schemas.openxmlformats.org/drawingml/2006/main">
+          <a:lstStyle>
             <a:defPPr algn="l">
               <a:defRPr sz="3300" b="1">
                 <a:solidFill>
@@ -1747,44 +1659,46 @@
               <a:defRPr/>
             </a:lvl9pPr>
           </a:lstStyle>
-          <a:p xmlns:a="http://schemas.openxmlformats.org/drawingml/2006/main"/>
+          <a:p>
+            <a:endParaRPr/>
+          </a:p>
         </p:txBody>
       </p:sp>
       <p:sp>
         <p:nvSpPr>
           <p:cNvPr id="2" name="Body">
-            <a:extLst xmlns:a="http://schemas.openxmlformats.org/drawingml/2006/main">
+            <a:extLst>
               <a:ext uri="{FF2B5EF4-FFF2-40B4-BE49-F238E27FC236}">
                 <a16:creationId xmlns:a16="http://schemas.microsoft.com/office/drawing/2014/main" id="{2CED1163-8E4C-4E0B-BB6B-EC93D51356C6}"/>
               </a:ext>
             </a:extLst>
           </p:cNvPr>
           <p:cNvSpPr>
-            <a:spLocks xmlns:a="http://schemas.openxmlformats.org/drawingml/2006/main" noGrp="1"/>
+            <a:spLocks noGrp="1"/>
           </p:cNvSpPr>
           <p:nvPr>
             <p:ph type="body" idx="1"/>
           </p:nvPr>
         </p:nvSpPr>
         <p:spPr>
-          <a:xfrm xmlns:a="http://schemas.openxmlformats.org/drawingml/2006/main">
+          <a:xfrm>
             <a:off x="685800" y="1905000"/>
             <a:ext cx="10820400" cy="4267200"/>
           </a:xfrm>
-          <a:prstGeom xmlns:a="http://schemas.openxmlformats.org/drawingml/2006/main" prst="rect">
+          <a:prstGeom prst="rect">
             <a:avLst/>
           </a:prstGeom>
-          <a:noFill xmlns:a="http://schemas.openxmlformats.org/drawingml/2006/main"/>
-          <a:ln xmlns:a="http://schemas.openxmlformats.org/drawingml/2006/main">
+          <a:noFill/>
+          <a:ln>
             <a:noFill/>
             <a:prstDash val="solid"/>
           </a:ln>
         </p:spPr>
         <p:txBody>
-          <a:bodyPr xmlns:a="http://schemas.openxmlformats.org/drawingml/2006/main" wrap="square" lIns="0" tIns="0" rIns="0" bIns="0" anchor="t">
+          <a:bodyPr wrap="square" lIns="0" tIns="0" rIns="0" bIns="0" anchor="t">
             <a:normAutofit/>
           </a:bodyPr>
-          <a:lstStyle xmlns:a="http://schemas.openxmlformats.org/drawingml/2006/main">
+          <a:lstStyle>
             <a:defPPr algn="l">
               <a:defRPr sz="2250" b="0">
                 <a:solidFill>
@@ -1913,16 +1827,21 @@
               <a:defRPr/>
             </a:lvl9pPr>
           </a:lstStyle>
-          <a:p xmlns:a="http://schemas.openxmlformats.org/drawingml/2006/main"/>
+          <a:p>
+            <a:endParaRPr/>
+          </a:p>
         </p:txBody>
       </p:sp>
     </p:spTree>
   </p:cSld>
+  <p:clrMapOvr>
+    <a:masterClrMapping/>
+  </p:clrMapOvr>
 </p:sldLayout>
 </file>
 
 <file path=ppt/slideLayouts/slideLayout4.xml><?xml version="1.0" encoding="utf-8"?>
-<p:sldLayout xmlns:p="http://schemas.openxmlformats.org/presentationml/2006/main">
+<p:sldLayout xmlns:a="http://schemas.openxmlformats.org/drawingml/2006/main" xmlns:r="http://schemas.openxmlformats.org/officeDocument/2006/relationships" xmlns:p="http://schemas.openxmlformats.org/presentationml/2006/main">
   <p:cSld name="Title and Two Column">
     <p:spTree>
       <p:nvGrpSpPr>
@@ -1931,43 +1850,48 @@
         <p:nvPr/>
       </p:nvGrpSpPr>
       <p:grpSpPr>
-        <a:xfrm xmlns:a="http://schemas.openxmlformats.org/drawingml/2006/main"/>
+        <a:xfrm>
+          <a:off x="0" y="0"/>
+          <a:ext cx="0" cy="0"/>
+          <a:chOff x="0" y="0"/>
+          <a:chExt cx="0" cy="0"/>
+        </a:xfrm>
       </p:grpSpPr>
       <p:sp>
         <p:nvSpPr>
           <p:cNvPr id="4" name="Title">
-            <a:extLst xmlns:a="http://schemas.openxmlformats.org/drawingml/2006/main">
+            <a:extLst>
               <a:ext uri="{FF2B5EF4-FFF2-40B4-BE49-F238E27FC236}">
                 <a16:creationId xmlns:a16="http://schemas.microsoft.com/office/drawing/2014/main" id="{51A85857-CD5D-4AF2-AE07-AB60A62D7866}"/>
               </a:ext>
             </a:extLst>
           </p:cNvPr>
           <p:cNvSpPr>
-            <a:spLocks xmlns:a="http://schemas.openxmlformats.org/drawingml/2006/main" noGrp="1"/>
+            <a:spLocks noGrp="1"/>
           </p:cNvSpPr>
           <p:nvPr>
-            <p:ph type="title" idx="0"/>
+            <p:ph type="title"/>
           </p:nvPr>
         </p:nvSpPr>
         <p:spPr>
-          <a:xfrm xmlns:a="http://schemas.openxmlformats.org/drawingml/2006/main">
+          <a:xfrm>
             <a:off x="685800" y="533400"/>
             <a:ext cx="10820400" cy="838200"/>
           </a:xfrm>
-          <a:prstGeom xmlns:a="http://schemas.openxmlformats.org/drawingml/2006/main" prst="rect">
+          <a:prstGeom prst="rect">
             <a:avLst/>
           </a:prstGeom>
-          <a:noFill xmlns:a="http://schemas.openxmlformats.org/drawingml/2006/main"/>
-          <a:ln xmlns:a="http://schemas.openxmlformats.org/drawingml/2006/main">
+          <a:noFill/>
+          <a:ln>
             <a:noFill/>
             <a:prstDash val="solid"/>
           </a:ln>
         </p:spPr>
         <p:txBody>
-          <a:bodyPr xmlns:a="http://schemas.openxmlformats.org/drawingml/2006/main" wrap="square" lIns="0" tIns="0" rIns="0" bIns="0" anchor="t">
+          <a:bodyPr wrap="square" lIns="0" tIns="0" rIns="0" bIns="0" anchor="t">
             <a:normAutofit/>
           </a:bodyPr>
-          <a:lstStyle xmlns:a="http://schemas.openxmlformats.org/drawingml/2006/main">
+          <a:lstStyle>
             <a:defPPr algn="l">
               <a:defRPr sz="3300" b="1">
                 <a:solidFill>
@@ -2096,44 +2020,46 @@
               <a:defRPr/>
             </a:lvl9pPr>
           </a:lstStyle>
-          <a:p xmlns:a="http://schemas.openxmlformats.org/drawingml/2006/main"/>
+          <a:p>
+            <a:endParaRPr/>
+          </a:p>
         </p:txBody>
       </p:sp>
       <p:sp>
         <p:nvSpPr>
           <p:cNvPr id="2" name="Left column">
-            <a:extLst xmlns:a="http://schemas.openxmlformats.org/drawingml/2006/main">
+            <a:extLst>
               <a:ext uri="{FF2B5EF4-FFF2-40B4-BE49-F238E27FC236}">
                 <a16:creationId xmlns:a16="http://schemas.microsoft.com/office/drawing/2014/main" id="{7F199048-8FFD-4A5D-A3C1-22A80A3D5D01}"/>
               </a:ext>
             </a:extLst>
           </p:cNvPr>
           <p:cNvSpPr>
-            <a:spLocks xmlns:a="http://schemas.openxmlformats.org/drawingml/2006/main" noGrp="1"/>
+            <a:spLocks noGrp="1"/>
           </p:cNvSpPr>
           <p:nvPr>
             <p:ph type="body" idx="1"/>
           </p:nvPr>
         </p:nvSpPr>
         <p:spPr>
-          <a:xfrm xmlns:a="http://schemas.openxmlformats.org/drawingml/2006/main">
+          <a:xfrm>
             <a:off x="685800" y="1905000"/>
             <a:ext cx="5029200" cy="4267200"/>
           </a:xfrm>
-          <a:prstGeom xmlns:a="http://schemas.openxmlformats.org/drawingml/2006/main" prst="rect">
+          <a:prstGeom prst="rect">
             <a:avLst/>
           </a:prstGeom>
-          <a:noFill xmlns:a="http://schemas.openxmlformats.org/drawingml/2006/main"/>
-          <a:ln xmlns:a="http://schemas.openxmlformats.org/drawingml/2006/main">
+          <a:noFill/>
+          <a:ln>
             <a:noFill/>
             <a:prstDash val="solid"/>
           </a:ln>
         </p:spPr>
         <p:txBody>
-          <a:bodyPr xmlns:a="http://schemas.openxmlformats.org/drawingml/2006/main" wrap="square" lIns="0" tIns="0" rIns="0" bIns="0" anchor="t">
+          <a:bodyPr wrap="square" lIns="0" tIns="0" rIns="0" bIns="0" anchor="t">
             <a:normAutofit/>
           </a:bodyPr>
-          <a:lstStyle xmlns:a="http://schemas.openxmlformats.org/drawingml/2006/main">
+          <a:lstStyle>
             <a:defPPr algn="l">
               <a:defRPr sz="2100" b="0">
                 <a:solidFill>
@@ -2262,44 +2188,46 @@
               <a:defRPr/>
             </a:lvl9pPr>
           </a:lstStyle>
-          <a:p xmlns:a="http://schemas.openxmlformats.org/drawingml/2006/main"/>
+          <a:p>
+            <a:endParaRPr/>
+          </a:p>
         </p:txBody>
       </p:sp>
       <p:sp>
         <p:nvSpPr>
           <p:cNvPr id="3" name="Right column">
-            <a:extLst xmlns:a="http://schemas.openxmlformats.org/drawingml/2006/main">
+            <a:extLst>
               <a:ext uri="{FF2B5EF4-FFF2-40B4-BE49-F238E27FC236}">
                 <a16:creationId xmlns:a16="http://schemas.microsoft.com/office/drawing/2014/main" id="{973F9F64-B420-45E6-8386-BD75427A2820}"/>
               </a:ext>
             </a:extLst>
           </p:cNvPr>
           <p:cNvSpPr>
-            <a:spLocks xmlns:a="http://schemas.openxmlformats.org/drawingml/2006/main" noGrp="1"/>
+            <a:spLocks noGrp="1"/>
           </p:cNvSpPr>
           <p:nvPr>
             <p:ph type="body" idx="2"/>
           </p:nvPr>
         </p:nvSpPr>
         <p:spPr>
-          <a:xfrm xmlns:a="http://schemas.openxmlformats.org/drawingml/2006/main">
+          <a:xfrm>
             <a:off x="6477000" y="1905000"/>
             <a:ext cx="5029200" cy="4267200"/>
           </a:xfrm>
-          <a:prstGeom xmlns:a="http://schemas.openxmlformats.org/drawingml/2006/main" prst="rect">
+          <a:prstGeom prst="rect">
             <a:avLst/>
           </a:prstGeom>
-          <a:noFill xmlns:a="http://schemas.openxmlformats.org/drawingml/2006/main"/>
-          <a:ln xmlns:a="http://schemas.openxmlformats.org/drawingml/2006/main">
+          <a:noFill/>
+          <a:ln>
             <a:noFill/>
             <a:prstDash val="solid"/>
           </a:ln>
         </p:spPr>
         <p:txBody>
-          <a:bodyPr xmlns:a="http://schemas.openxmlformats.org/drawingml/2006/main" wrap="square" lIns="0" tIns="0" rIns="0" bIns="0" anchor="t">
+          <a:bodyPr wrap="square" lIns="0" tIns="0" rIns="0" bIns="0" anchor="t">
             <a:normAutofit/>
           </a:bodyPr>
-          <a:lstStyle xmlns:a="http://schemas.openxmlformats.org/drawingml/2006/main">
+          <a:lstStyle>
             <a:defPPr algn="l">
               <a:defRPr sz="2100" b="0">
                 <a:solidFill>
@@ -2428,16 +2356,21 @@
               <a:defRPr/>
             </a:lvl9pPr>
           </a:lstStyle>
-          <a:p xmlns:a="http://schemas.openxmlformats.org/drawingml/2006/main"/>
+          <a:p>
+            <a:endParaRPr/>
+          </a:p>
         </p:txBody>
       </p:sp>
     </p:spTree>
   </p:cSld>
+  <p:clrMapOvr>
+    <a:masterClrMapping/>
+  </p:clrMapOvr>
 </p:sldLayout>
 </file>
 
 <file path=ppt/slideLayouts/slideLayout5.xml><?xml version="1.0" encoding="utf-8"?>
-<p:sldLayout xmlns:p="http://schemas.openxmlformats.org/presentationml/2006/main">
+<p:sldLayout xmlns:a="http://schemas.openxmlformats.org/drawingml/2006/main" xmlns:r="http://schemas.openxmlformats.org/officeDocument/2006/relationships" xmlns:p="http://schemas.openxmlformats.org/presentationml/2006/main">
   <p:cSld name="Title and One Column">
     <p:spTree>
       <p:nvGrpSpPr>
@@ -2446,43 +2379,48 @@
         <p:nvPr/>
       </p:nvGrpSpPr>
       <p:grpSpPr>
-        <a:xfrm xmlns:a="http://schemas.openxmlformats.org/drawingml/2006/main"/>
+        <a:xfrm>
+          <a:off x="0" y="0"/>
+          <a:ext cx="0" cy="0"/>
+          <a:chOff x="0" y="0"/>
+          <a:chExt cx="0" cy="0"/>
+        </a:xfrm>
       </p:grpSpPr>
       <p:sp>
         <p:nvSpPr>
           <p:cNvPr id="3" name="Title">
-            <a:extLst xmlns:a="http://schemas.openxmlformats.org/drawingml/2006/main">
+            <a:extLst>
               <a:ext uri="{FF2B5EF4-FFF2-40B4-BE49-F238E27FC236}">
                 <a16:creationId xmlns:a16="http://schemas.microsoft.com/office/drawing/2014/main" id="{80D7DD4F-DED9-40DA-9DDE-46065225C947}"/>
               </a:ext>
             </a:extLst>
           </p:cNvPr>
           <p:cNvSpPr>
-            <a:spLocks xmlns:a="http://schemas.openxmlformats.org/drawingml/2006/main" noGrp="1"/>
+            <a:spLocks noGrp="1"/>
           </p:cNvSpPr>
           <p:nvPr>
-            <p:ph type="title" idx="0"/>
+            <p:ph type="title"/>
           </p:nvPr>
         </p:nvSpPr>
         <p:spPr>
-          <a:xfrm xmlns:a="http://schemas.openxmlformats.org/drawingml/2006/main">
+          <a:xfrm>
             <a:off x="685800" y="533400"/>
             <a:ext cx="10820400" cy="838200"/>
           </a:xfrm>
-          <a:prstGeom xmlns:a="http://schemas.openxmlformats.org/drawingml/2006/main" prst="rect">
+          <a:prstGeom prst="rect">
             <a:avLst/>
           </a:prstGeom>
-          <a:noFill xmlns:a="http://schemas.openxmlformats.org/drawingml/2006/main"/>
-          <a:ln xmlns:a="http://schemas.openxmlformats.org/drawingml/2006/main">
+          <a:noFill/>
+          <a:ln>
             <a:noFill/>
             <a:prstDash val="solid"/>
           </a:ln>
         </p:spPr>
         <p:txBody>
-          <a:bodyPr xmlns:a="http://schemas.openxmlformats.org/drawingml/2006/main" wrap="square" lIns="0" tIns="0" rIns="0" bIns="0" anchor="t">
+          <a:bodyPr wrap="square" lIns="0" tIns="0" rIns="0" bIns="0" anchor="t">
             <a:normAutofit/>
           </a:bodyPr>
-          <a:lstStyle xmlns:a="http://schemas.openxmlformats.org/drawingml/2006/main">
+          <a:lstStyle>
             <a:defPPr algn="l">
               <a:defRPr sz="3300" b="1">
                 <a:solidFill>
@@ -2611,44 +2549,46 @@
               <a:defRPr/>
             </a:lvl9pPr>
           </a:lstStyle>
-          <a:p xmlns:a="http://schemas.openxmlformats.org/drawingml/2006/main"/>
+          <a:p>
+            <a:endParaRPr/>
+          </a:p>
         </p:txBody>
       </p:sp>
       <p:sp>
         <p:nvSpPr>
           <p:cNvPr id="2" name="Left column">
-            <a:extLst xmlns:a="http://schemas.openxmlformats.org/drawingml/2006/main">
+            <a:extLst>
               <a:ext uri="{FF2B5EF4-FFF2-40B4-BE49-F238E27FC236}">
                 <a16:creationId xmlns:a16="http://schemas.microsoft.com/office/drawing/2014/main" id="{B9214C13-1161-4E35-A94A-F11B69C0C5D8}"/>
               </a:ext>
             </a:extLst>
           </p:cNvPr>
           <p:cNvSpPr>
-            <a:spLocks xmlns:a="http://schemas.openxmlformats.org/drawingml/2006/main" noGrp="1"/>
+            <a:spLocks noGrp="1"/>
           </p:cNvSpPr>
           <p:nvPr>
             <p:ph type="body" idx="1"/>
           </p:nvPr>
         </p:nvSpPr>
         <p:spPr>
-          <a:xfrm xmlns:a="http://schemas.openxmlformats.org/drawingml/2006/main">
+          <a:xfrm>
             <a:off x="685800" y="1905000"/>
             <a:ext cx="5029200" cy="4267200"/>
           </a:xfrm>
-          <a:prstGeom xmlns:a="http://schemas.openxmlformats.org/drawingml/2006/main" prst="rect">
+          <a:prstGeom prst="rect">
             <a:avLst/>
           </a:prstGeom>
-          <a:noFill xmlns:a="http://schemas.openxmlformats.org/drawingml/2006/main"/>
-          <a:ln xmlns:a="http://schemas.openxmlformats.org/drawingml/2006/main">
+          <a:noFill/>
+          <a:ln>
             <a:noFill/>
             <a:prstDash val="solid"/>
           </a:ln>
         </p:spPr>
         <p:txBody>
-          <a:bodyPr xmlns:a="http://schemas.openxmlformats.org/drawingml/2006/main" wrap="square" lIns="0" tIns="0" rIns="0" bIns="0" anchor="t">
+          <a:bodyPr wrap="square" lIns="0" tIns="0" rIns="0" bIns="0" anchor="t">
             <a:normAutofit/>
           </a:bodyPr>
-          <a:lstStyle xmlns:a="http://schemas.openxmlformats.org/drawingml/2006/main">
+          <a:lstStyle>
             <a:defPPr algn="l">
               <a:defRPr sz="2250" b="0">
                 <a:solidFill>
@@ -2777,16 +2717,21 @@
               <a:defRPr/>
             </a:lvl9pPr>
           </a:lstStyle>
-          <a:p xmlns:a="http://schemas.openxmlformats.org/drawingml/2006/main"/>
+          <a:p>
+            <a:endParaRPr/>
+          </a:p>
         </p:txBody>
       </p:sp>
     </p:spTree>
   </p:cSld>
+  <p:clrMapOvr>
+    <a:masterClrMapping/>
+  </p:clrMapOvr>
 </p:sldLayout>
 </file>
 
 <file path=ppt/slideLayouts/slideLayout6.xml><?xml version="1.0" encoding="utf-8"?>
-<p:sldLayout xmlns:p="http://schemas.openxmlformats.org/presentationml/2006/main" type="blank">
+<p:sldLayout xmlns:a="http://schemas.openxmlformats.org/drawingml/2006/main" xmlns:r="http://schemas.openxmlformats.org/officeDocument/2006/relationships" xmlns:p="http://schemas.openxmlformats.org/presentationml/2006/main" type="blank">
   <p:cSld name="Blank">
     <p:spTree>
       <p:nvGrpSpPr>
@@ -2795,19 +2740,27 @@
         <p:nvPr/>
       </p:nvGrpSpPr>
       <p:grpSpPr>
-        <a:xfrm xmlns:a="http://schemas.openxmlformats.org/drawingml/2006/main"/>
+        <a:xfrm>
+          <a:off x="0" y="0"/>
+          <a:ext cx="0" cy="0"/>
+          <a:chOff x="0" y="0"/>
+          <a:chExt cx="0" cy="0"/>
+        </a:xfrm>
       </p:grpSpPr>
     </p:spTree>
   </p:cSld>
+  <p:clrMapOvr>
+    <a:masterClrMapping/>
+  </p:clrMapOvr>
 </p:sldLayout>
 </file>
 
 <file path=ppt/slideMasters/slideMaster1.xml><?xml version="1.0" encoding="utf-8"?>
-<p:sldMaster xmlns:p="http://schemas.openxmlformats.org/presentationml/2006/main">
+<p:sldMaster xmlns:a="http://schemas.openxmlformats.org/drawingml/2006/main" xmlns:r="http://schemas.openxmlformats.org/officeDocument/2006/relationships" xmlns:p="http://schemas.openxmlformats.org/presentationml/2006/main">
   <p:cSld name="Master">
     <p:bg>
       <p:bgRef idx="1001">
-        <a:schemeClr xmlns:a="http://schemas.openxmlformats.org/drawingml/2006/main" val="bg1"/>
+        <a:schemeClr val="bg1"/>
       </p:bgRef>
     </p:bg>
     <p:spTree>
@@ -2817,22 +2770,27 @@
         <p:nvPr/>
       </p:nvGrpSpPr>
       <p:grpSpPr>
-        <a:xfrm xmlns:a="http://schemas.openxmlformats.org/drawingml/2006/main"/>
+        <a:xfrm>
+          <a:off x="0" y="0"/>
+          <a:ext cx="0" cy="0"/>
+          <a:chOff x="0" y="0"/>
+          <a:chExt cx="0" cy="0"/>
+        </a:xfrm>
       </p:grpSpPr>
     </p:spTree>
   </p:cSld>
   <p:clrMap bg1="lt1" tx1="dk1" bg2="lt2" tx2="dk2" accent1="accent1" accent2="accent2" accent3="accent3" accent4="accent4" accent5="accent5" accent6="accent6" hlink="hlink" folHlink="folHlink"/>
   <p:sldLayoutIdLst>
-    <p:sldLayoutId xmlns:r="http://schemas.openxmlformats.org/officeDocument/2006/relationships" id="2147483649" r:id="Rf4f179eaa97346bf"/>
-    <p:sldLayoutId xmlns:r="http://schemas.openxmlformats.org/officeDocument/2006/relationships" id="2147483650" r:id="Rad895cfae2454cd5"/>
-    <p:sldLayoutId xmlns:r="http://schemas.openxmlformats.org/officeDocument/2006/relationships" id="2147483651" r:id="R77dd26f8894942f3"/>
-    <p:sldLayoutId xmlns:r="http://schemas.openxmlformats.org/officeDocument/2006/relationships" id="2147483652" r:id="Rf51287e2312c4aa5"/>
-    <p:sldLayoutId xmlns:r="http://schemas.openxmlformats.org/officeDocument/2006/relationships" id="2147483653" r:id="R98076215252b4d07"/>
-    <p:sldLayoutId xmlns:r="http://schemas.openxmlformats.org/officeDocument/2006/relationships" id="2147483654" r:id="R1f5a2d6935d4474a"/>
+    <p:sldLayoutId id="2147483649" r:id="rId1"/>
+    <p:sldLayoutId id="2147483650" r:id="rId2"/>
+    <p:sldLayoutId id="2147483651" r:id="rId3"/>
+    <p:sldLayoutId id="2147483652" r:id="rId4"/>
+    <p:sldLayoutId id="2147483653" r:id="rId5"/>
+    <p:sldLayoutId id="2147483654" r:id="rId6"/>
   </p:sldLayoutIdLst>
   <p:txStyles>
     <p:titleStyle>
-      <a:lvl1pPr xmlns:a="http://schemas.openxmlformats.org/drawingml/2006/main" algn="l">
+      <a:lvl1pPr algn="l">
         <a:lnSpc>
           <a:spcPct val="90000"/>
         </a:lnSpc>
@@ -2851,7 +2809,7 @@
       </a:lvl1pPr>
     </p:titleStyle>
     <p:bodyStyle>
-      <a:lvl1pPr xmlns:a="http://schemas.openxmlformats.org/drawingml/2006/main" marL="228600" indent="-228600" algn="l">
+      <a:lvl1pPr marL="228600" indent="-228600" algn="l">
         <a:lnSpc>
           <a:spcPct val="90000"/>
         </a:lnSpc>
@@ -2868,7 +2826,7 @@
           <a:cs typeface="+mn-lt"/>
         </a:defRPr>
       </a:lvl1pPr>
-      <a:lvl2pPr xmlns:a="http://schemas.openxmlformats.org/drawingml/2006/main" marL="685800" indent="-228600" algn="l">
+      <a:lvl2pPr marL="685800" indent="-228600" algn="l">
         <a:lnSpc>
           <a:spcPct val="90000"/>
         </a:lnSpc>
@@ -2885,7 +2843,7 @@
           <a:cs typeface="+mn-lt"/>
         </a:defRPr>
       </a:lvl2pPr>
-      <a:lvl3pPr xmlns:a="http://schemas.openxmlformats.org/drawingml/2006/main" marL="1143000" indent="-228600" algn="l">
+      <a:lvl3pPr marL="1143000" indent="-228600" algn="l">
         <a:lnSpc>
           <a:spcPct val="90000"/>
         </a:lnSpc>
@@ -2902,7 +2860,7 @@
           <a:cs typeface="+mn-lt"/>
         </a:defRPr>
       </a:lvl3pPr>
-      <a:lvl4pPr xmlns:a="http://schemas.openxmlformats.org/drawingml/2006/main" marL="1600200" indent="-228600" algn="l">
+      <a:lvl4pPr marL="1600200" indent="-228600" algn="l">
         <a:lnSpc>
           <a:spcPct val="90000"/>
         </a:lnSpc>
@@ -2919,7 +2877,7 @@
           <a:cs typeface="+mn-lt"/>
         </a:defRPr>
       </a:lvl4pPr>
-      <a:lvl5pPr xmlns:a="http://schemas.openxmlformats.org/drawingml/2006/main" marL="2057400" indent="-228600" algn="l">
+      <a:lvl5pPr marL="2057400" indent="-228600" algn="l">
         <a:lnSpc>
           <a:spcPct val="90000"/>
         </a:lnSpc>
@@ -2936,7 +2894,7 @@
           <a:cs typeface="+mn-lt"/>
         </a:defRPr>
       </a:lvl5pPr>
-      <a:lvl6pPr xmlns:a="http://schemas.openxmlformats.org/drawingml/2006/main" marL="2514600" indent="-228600" algn="l">
+      <a:lvl6pPr marL="2514600" indent="-228600" algn="l">
         <a:lnSpc>
           <a:spcPct val="90000"/>
         </a:lnSpc>
@@ -2953,7 +2911,7 @@
           <a:cs typeface="+mn-lt"/>
         </a:defRPr>
       </a:lvl6pPr>
-      <a:lvl7pPr xmlns:a="http://schemas.openxmlformats.org/drawingml/2006/main" marL="2971800" indent="-228600" algn="l">
+      <a:lvl7pPr marL="2971800" indent="-228600" algn="l">
         <a:lnSpc>
           <a:spcPct val="90000"/>
         </a:lnSpc>
@@ -2970,7 +2928,7 @@
           <a:cs typeface="+mn-lt"/>
         </a:defRPr>
       </a:lvl7pPr>
-      <a:lvl8pPr xmlns:a="http://schemas.openxmlformats.org/drawingml/2006/main" marL="3429000" indent="-228600" algn="l">
+      <a:lvl8pPr marL="3429000" indent="-228600" algn="l">
         <a:lnSpc>
           <a:spcPct val="90000"/>
         </a:lnSpc>
@@ -2987,7 +2945,7 @@
           <a:cs typeface="+mn-lt"/>
         </a:defRPr>
       </a:lvl8pPr>
-      <a:lvl9pPr xmlns:a="http://schemas.openxmlformats.org/drawingml/2006/main" marL="3886200" indent="-228600" algn="l">
+      <a:lvl9pPr marL="3886200" indent="-228600" algn="l">
         <a:lnSpc>
           <a:spcPct val="90000"/>
         </a:lnSpc>
@@ -3006,7 +2964,7 @@
       </a:lvl9pPr>
     </p:bodyStyle>
     <p:otherStyle>
-      <a:lvl1pPr xmlns:a="http://schemas.openxmlformats.org/drawingml/2006/main" marL="0" algn="l">
+      <a:lvl1pPr marL="0" algn="l">
         <a:buNone/>
         <a:defRPr sz="1800">
           <a:solidFill>
@@ -3017,7 +2975,7 @@
           <a:cs typeface="+mn-lt"/>
         </a:defRPr>
       </a:lvl1pPr>
-      <a:lvl2pPr xmlns:a="http://schemas.openxmlformats.org/drawingml/2006/main" marL="457200" algn="l">
+      <a:lvl2pPr marL="457200" algn="l">
         <a:buNone/>
         <a:defRPr sz="1800">
           <a:solidFill>
@@ -3028,7 +2986,7 @@
           <a:cs typeface="+mn-lt"/>
         </a:defRPr>
       </a:lvl2pPr>
-      <a:lvl3pPr xmlns:a="http://schemas.openxmlformats.org/drawingml/2006/main" marL="914400" algn="l">
+      <a:lvl3pPr marL="914400" algn="l">
         <a:buNone/>
         <a:defRPr sz="1800">
           <a:solidFill>
@@ -3039,7 +2997,7 @@
           <a:cs typeface="+mn-lt"/>
         </a:defRPr>
       </a:lvl3pPr>
-      <a:lvl4pPr xmlns:a="http://schemas.openxmlformats.org/drawingml/2006/main" marL="1371600" algn="l">
+      <a:lvl4pPr marL="1371600" algn="l">
         <a:buNone/>
         <a:defRPr sz="1800">
           <a:solidFill>
@@ -3050,7 +3008,7 @@
           <a:cs typeface="+mn-lt"/>
         </a:defRPr>
       </a:lvl4pPr>
-      <a:lvl5pPr xmlns:a="http://schemas.openxmlformats.org/drawingml/2006/main" marL="1828800" algn="l">
+      <a:lvl5pPr marL="1828800" algn="l">
         <a:buNone/>
         <a:defRPr sz="1800">
           <a:solidFill>
@@ -3061,7 +3019,7 @@
           <a:cs typeface="+mn-lt"/>
         </a:defRPr>
       </a:lvl5pPr>
-      <a:lvl6pPr xmlns:a="http://schemas.openxmlformats.org/drawingml/2006/main" marL="2286000" algn="l">
+      <a:lvl6pPr marL="2286000" algn="l">
         <a:buNone/>
         <a:defRPr sz="1800">
           <a:solidFill>
@@ -3072,7 +3030,7 @@
           <a:cs typeface="+mn-lt"/>
         </a:defRPr>
       </a:lvl6pPr>
-      <a:lvl7pPr xmlns:a="http://schemas.openxmlformats.org/drawingml/2006/main" marL="2743200" algn="l">
+      <a:lvl7pPr marL="2743200" algn="l">
         <a:buNone/>
         <a:defRPr sz="1800">
           <a:solidFill>
@@ -3083,7 +3041,7 @@
           <a:cs typeface="+mn-lt"/>
         </a:defRPr>
       </a:lvl7pPr>
-      <a:lvl8pPr xmlns:a="http://schemas.openxmlformats.org/drawingml/2006/main" marL="3200400" algn="l">
+      <a:lvl8pPr marL="3200400" algn="l">
         <a:buNone/>
         <a:defRPr sz="1800">
           <a:solidFill>
@@ -3094,7 +3052,7 @@
           <a:cs typeface="+mn-lt"/>
         </a:defRPr>
       </a:lvl8pPr>
-      <a:lvl9pPr xmlns:a="http://schemas.openxmlformats.org/drawingml/2006/main" marL="3657600" algn="l">
+      <a:lvl9pPr marL="3657600" algn="l">
         <a:buNone/>
         <a:defRPr sz="1800">
           <a:solidFill>
@@ -3110,259 +3068,15 @@
 </p:sldMaster>
 </file>
 
-<file path=ppt/slideMasters/theme/theme2.xml><?xml version="1.0" encoding="utf-8"?>
-<a:theme xmlns:a="http://schemas.openxmlformats.org/drawingml/2006/main" name="ChatGPT">
-  <a:themeElements>
-    <a:clrScheme name="ChatGPT">
-      <a:dk1>
-        <a:srgbClr val="000000"/>
-      </a:dk1>
-      <a:lt1>
-        <a:srgbClr val="FFFFFF"/>
-      </a:lt1>
-      <a:dk2>
-        <a:srgbClr val="0E2841"/>
-      </a:dk2>
-      <a:lt2>
-        <a:srgbClr val="E8E8E8"/>
-      </a:lt2>
-      <a:accent1>
-        <a:srgbClr val="156082"/>
-      </a:accent1>
-      <a:accent2>
-        <a:srgbClr val="E97132"/>
-      </a:accent2>
-      <a:accent3>
-        <a:srgbClr val="196B24"/>
-      </a:accent3>
-      <a:accent4>
-        <a:srgbClr val="0F9ED5"/>
-      </a:accent4>
-      <a:accent5>
-        <a:srgbClr val="A02B93"/>
-      </a:accent5>
-      <a:accent6>
-        <a:srgbClr val="4EA72E"/>
-      </a:accent6>
-      <a:hlink>
-        <a:srgbClr val="467886"/>
-      </a:hlink>
-      <a:folHlink>
-        <a:srgbClr val="96607D"/>
-      </a:folHlink>
-    </a:clrScheme>
-    <a:fontScheme name="">
-      <a:majorFont>
-        <a:latin typeface="Aptos"/>
-        <a:ea typeface=""/>
-        <a:cs typeface=""/>
-      </a:majorFont>
-      <a:minorFont>
-        <a:latin typeface="Aptos"/>
-        <a:ea typeface=""/>
-        <a:cs typeface=""/>
-      </a:minorFont>
-    </a:fontScheme>
-    <a:fmtScheme name="ChatGPT">
-      <a:fillStyleLst>
-        <a:solidFill>
-          <a:schemeClr val="phClr"/>
-        </a:solidFill>
-        <a:gradFill>
-          <a:gsLst>
-            <a:gs pos="0">
-              <a:schemeClr val="phClr">
-                <a:tint val="67000"/>
-                <a:lumMod val="110000"/>
-                <a:satMod val="105000"/>
-              </a:schemeClr>
-            </a:gs>
-            <a:gs pos="50000">
-              <a:schemeClr val="phClr">
-                <a:tint val="73000"/>
-                <a:lumMod val="105000"/>
-                <a:satMod val="103000"/>
-              </a:schemeClr>
-            </a:gs>
-            <a:gs pos="100000">
-              <a:schemeClr val="phClr">
-                <a:tint val="81000"/>
-                <a:lumMod val="105000"/>
-                <a:satMod val="109000"/>
-              </a:schemeClr>
-            </a:gs>
-          </a:gsLst>
-          <a:lin ang="5400000" scaled="0"/>
-        </a:gradFill>
-        <a:gradFill>
-          <a:gsLst>
-            <a:gs pos="0">
-              <a:schemeClr val="phClr">
-                <a:tint val="94000"/>
-                <a:lumMod val="102000"/>
-                <a:satMod val="103000"/>
-              </a:schemeClr>
-            </a:gs>
-            <a:gs pos="50000">
-              <a:schemeClr val="phClr">
-                <a:shade val="100000"/>
-                <a:lumMod val="100000"/>
-                <a:satMod val="110000"/>
-              </a:schemeClr>
-            </a:gs>
-            <a:gs pos="100000">
-              <a:schemeClr val="phClr">
-                <a:shade val="78000"/>
-                <a:lumMod val="99000"/>
-                <a:satMod val="120000"/>
-              </a:schemeClr>
-            </a:gs>
-          </a:gsLst>
-          <a:lin ang="5400000" scaled="0"/>
-        </a:gradFill>
-      </a:fillStyleLst>
-      <a:lnStyleLst>
-        <a:ln w="12700">
-          <a:solidFill>
-            <a:schemeClr val="phClr"/>
-          </a:solidFill>
-          <a:prstDash val="solid"/>
-        </a:ln>
-        <a:ln w="19050">
-          <a:solidFill>
-            <a:schemeClr val="phClr"/>
-          </a:solidFill>
-          <a:prstDash val="solid"/>
-        </a:ln>
-        <a:ln w="25400">
-          <a:solidFill>
-            <a:schemeClr val="phClr"/>
-          </a:solidFill>
-          <a:prstDash val="solid"/>
-        </a:ln>
-      </a:lnStyleLst>
-      <a:effectStyleLst>
-        <a:effectStyle>
-          <a:effectLst/>
-        </a:effectStyle>
-        <a:effectStyle>
-          <a:effectLst/>
-        </a:effectStyle>
-        <a:effectStyle>
-          <a:effectLst>
-            <a:outerShdw blurRad="57150" dist="19050" dir="5400000">
-              <a:srgbClr val="000000">
-                <a:alpha val="16000"/>
-              </a:srgbClr>
-            </a:outerShdw>
-          </a:effectLst>
-        </a:effectStyle>
-        <a:effectStyle>
-          <a:effectLst>
-            <a:outerShdw blurRad="19050" dist="9525" dir="5400000">
-              <a:srgbClr val="000000">
-                <a:alpha val="6000"/>
-              </a:srgbClr>
-            </a:outerShdw>
-          </a:effectLst>
-        </a:effectStyle>
-        <a:effectStyle>
-          <a:effectLst>
-            <a:outerShdw blurRad="28575" dist="9525" dir="5400000">
-              <a:srgbClr val="000000">
-                <a:alpha val="8000"/>
-              </a:srgbClr>
-            </a:outerShdw>
-          </a:effectLst>
-        </a:effectStyle>
-        <a:effectStyle>
-          <a:effectLst>
-            <a:outerShdw blurRad="57150" dist="19050" dir="5400000">
-              <a:srgbClr val="000000">
-                <a:alpha val="10000"/>
-              </a:srgbClr>
-            </a:outerShdw>
-          </a:effectLst>
-        </a:effectStyle>
-        <a:effectStyle>
-          <a:effectLst>
-            <a:outerShdw blurRad="114300" dist="38100" dir="5400000">
-              <a:srgbClr val="000000">
-                <a:alpha val="12000"/>
-              </a:srgbClr>
-            </a:outerShdw>
-          </a:effectLst>
-        </a:effectStyle>
-        <a:effectStyle>
-          <a:effectLst>
-            <a:outerShdw blurRad="171450" dist="57150" dir="5400000">
-              <a:srgbClr val="000000">
-                <a:alpha val="16000"/>
-              </a:srgbClr>
-            </a:outerShdw>
-          </a:effectLst>
-        </a:effectStyle>
-        <a:effectStyle>
-          <a:effectLst>
-            <a:outerShdw blurRad="266700" dist="95250" dir="5400000">
-              <a:srgbClr val="000000">
-                <a:alpha val="24000"/>
-              </a:srgbClr>
-            </a:outerShdw>
-          </a:effectLst>
-        </a:effectStyle>
-      </a:effectStyleLst>
-      <a:bgFillStyleLst>
-        <a:solidFill>
-          <a:schemeClr val="phClr"/>
-        </a:solidFill>
-        <a:solidFill>
-          <a:schemeClr val="phClr">
-            <a:tint val="95000"/>
-            <a:satMod val="170000"/>
-          </a:schemeClr>
-        </a:solidFill>
-        <a:gradFill>
-          <a:gsLst>
-            <a:gs pos="0">
-              <a:schemeClr val="phClr">
-                <a:tint val="93000"/>
-                <a:shade val="98000"/>
-                <a:lumMod val="102000"/>
-                <a:satMod val="150000"/>
-              </a:schemeClr>
-            </a:gs>
-            <a:gs pos="50000">
-              <a:schemeClr val="phClr">
-                <a:tint val="98000"/>
-                <a:shade val="90000"/>
-                <a:lumMod val="103000"/>
-                <a:satMod val="130000"/>
-              </a:schemeClr>
-            </a:gs>
-            <a:gs pos="100000">
-              <a:schemeClr val="phClr">
-                <a:shade val="63000"/>
-                <a:satMod val="120000"/>
-              </a:schemeClr>
-            </a:gs>
-          </a:gsLst>
-          <a:lin ang="5400000" scaled="0"/>
-        </a:gradFill>
-      </a:bgFillStyleLst>
-    </a:fmtScheme>
-  </a:themeElements>
-</a:theme>
-</file>
-
 <file path=ppt/slides/slide1.xml><?xml version="1.0" encoding="utf-8"?>
-<p:sld xmlns:p="http://schemas.openxmlformats.org/presentationml/2006/main">
+<p:sld xmlns:a="http://schemas.openxmlformats.org/drawingml/2006/main" xmlns:r="http://schemas.openxmlformats.org/officeDocument/2006/relationships" xmlns:p="http://schemas.openxmlformats.org/presentationml/2006/main">
   <p:cSld>
     <p:bg>
       <p:bgPr>
-        <a:solidFill xmlns:a="http://schemas.openxmlformats.org/drawingml/2006/main">
+        <a:solidFill>
           <a:srgbClr val="0B1F3A"/>
         </a:solidFill>
+        <a:effectLst/>
       </p:bgPr>
     </p:bg>
     <p:spTree>
@@ -3372,41 +3086,46 @@
         <p:nvPr/>
       </p:nvGrpSpPr>
       <p:grpSpPr>
-        <a:xfrm xmlns:a="http://schemas.openxmlformats.org/drawingml/2006/main"/>
+        <a:xfrm>
+          <a:off x="0" y="0"/>
+          <a:ext cx="0" cy="0"/>
+          <a:chOff x="0" y="0"/>
+          <a:chExt cx="0" cy="0"/>
+        </a:xfrm>
       </p:grpSpPr>
       <p:sp>
         <p:nvSpPr>
           <p:cNvPr id="4" name="project-title">
-            <a:extLst xmlns:a="http://schemas.openxmlformats.org/drawingml/2006/main">
+            <a:extLst>
               <a:ext uri="{FF2B5EF4-FFF2-40B4-BE49-F238E27FC236}">
                 <a16:creationId xmlns:a16="http://schemas.microsoft.com/office/drawing/2014/main" id="{E2932B8F-6636-4274-B5E9-789DBC2635C0}"/>
               </a:ext>
             </a:extLst>
           </p:cNvPr>
           <p:cNvSpPr>
-            <a:spLocks xmlns:a="http://schemas.openxmlformats.org/drawingml/2006/main" noGrp="1"/>
+            <a:spLocks noGrp="1"/>
           </p:cNvSpPr>
           <p:nvPr/>
         </p:nvSpPr>
         <p:spPr>
-          <a:xfrm xmlns:a="http://schemas.openxmlformats.org/drawingml/2006/main">
+          <a:xfrm>
             <a:off x="800100" y="1790700"/>
             <a:ext cx="9144000" cy="914400"/>
           </a:xfrm>
-          <a:prstGeom xmlns:a="http://schemas.openxmlformats.org/drawingml/2006/main" prst="rect">
+          <a:prstGeom prst="rect">
             <a:avLst/>
           </a:prstGeom>
-          <a:noFill xmlns:a="http://schemas.openxmlformats.org/drawingml/2006/main"/>
-          <a:ln xmlns:a="http://schemas.openxmlformats.org/drawingml/2006/main" w="0">
+          <a:noFill/>
+          <a:ln w="0">
             <a:noFill/>
             <a:prstDash val="solid"/>
           </a:ln>
         </p:spPr>
         <p:txBody>
-          <a:bodyPr xmlns:a="http://schemas.openxmlformats.org/drawingml/2006/main" lIns="0" tIns="0" rIns="0" bIns="0" anchor="t">
+          <a:bodyPr lIns="0" tIns="0" rIns="0" bIns="0" anchor="t">
             <a:noAutofit/>
           </a:bodyPr>
-          <a:lstStyle xmlns:a="http://schemas.openxmlformats.org/drawingml/2006/main">
+          <a:lstStyle>
             <a:defPPr algn="l">
               <a:defRPr sz="5400" b="1">
                 <a:solidFill>
@@ -3418,7 +3137,7 @@
               </a:defRPr>
             </a:defPPr>
           </a:lstStyle>
-          <a:p xmlns:a="http://schemas.openxmlformats.org/drawingml/2006/main">
+          <a:p>
             <a:pPr algn="l">
               <a:buNone/>
               <a:defRPr sz="5400" b="1">
@@ -3447,36 +3166,36 @@
       <p:sp>
         <p:nvSpPr>
           <p:cNvPr id="2" name="project-subtitle">
-            <a:extLst xmlns:a="http://schemas.openxmlformats.org/drawingml/2006/main">
+            <a:extLst>
               <a:ext uri="{FF2B5EF4-FFF2-40B4-BE49-F238E27FC236}">
                 <a16:creationId xmlns:a16="http://schemas.microsoft.com/office/drawing/2014/main" id="{360A7EE7-C4C8-4DB0-B6DA-5A45277517A8}"/>
               </a:ext>
             </a:extLst>
           </p:cNvPr>
           <p:cNvSpPr>
-            <a:spLocks xmlns:a="http://schemas.openxmlformats.org/drawingml/2006/main" noGrp="1"/>
+            <a:spLocks noGrp="1"/>
           </p:cNvSpPr>
           <p:nvPr/>
         </p:nvSpPr>
         <p:spPr>
-          <a:xfrm xmlns:a="http://schemas.openxmlformats.org/drawingml/2006/main">
+          <a:xfrm>
             <a:off x="838200" y="2857500"/>
             <a:ext cx="8477250" cy="533400"/>
           </a:xfrm>
-          <a:prstGeom xmlns:a="http://schemas.openxmlformats.org/drawingml/2006/main" prst="rect">
+          <a:prstGeom prst="rect">
             <a:avLst/>
           </a:prstGeom>
-          <a:noFill xmlns:a="http://schemas.openxmlformats.org/drawingml/2006/main"/>
-          <a:ln xmlns:a="http://schemas.openxmlformats.org/drawingml/2006/main" w="0">
+          <a:noFill/>
+          <a:ln w="0">
             <a:noFill/>
             <a:prstDash val="solid"/>
           </a:ln>
         </p:spPr>
         <p:txBody>
-          <a:bodyPr xmlns:a="http://schemas.openxmlformats.org/drawingml/2006/main" lIns="0" tIns="0" rIns="0" bIns="0" anchor="t">
+          <a:bodyPr lIns="0" tIns="0" rIns="0" bIns="0" anchor="t">
             <a:noAutofit/>
           </a:bodyPr>
-          <a:lstStyle xmlns:a="http://schemas.openxmlformats.org/drawingml/2006/main">
+          <a:lstStyle>
             <a:defPPr algn="l">
               <a:defRPr sz="2550">
                 <a:solidFill>
@@ -3488,7 +3207,7 @@
               </a:defRPr>
             </a:defPPr>
           </a:lstStyle>
-          <a:p xmlns:a="http://schemas.openxmlformats.org/drawingml/2006/main">
+          <a:p>
             <a:pPr algn="l">
               <a:buNone/>
               <a:defRPr sz="2550">
@@ -3517,36 +3236,36 @@
       <p:sp>
         <p:nvSpPr>
           <p:cNvPr id="3" name="presenter">
-            <a:extLst xmlns:a="http://schemas.openxmlformats.org/drawingml/2006/main">
+            <a:extLst>
               <a:ext uri="{FF2B5EF4-FFF2-40B4-BE49-F238E27FC236}">
                 <a16:creationId xmlns:a16="http://schemas.microsoft.com/office/drawing/2014/main" id="{93D8277C-BE8E-488D-AB46-186917166F49}"/>
               </a:ext>
             </a:extLst>
           </p:cNvPr>
           <p:cNvSpPr>
-            <a:spLocks xmlns:a="http://schemas.openxmlformats.org/drawingml/2006/main" noGrp="1"/>
+            <a:spLocks noGrp="1"/>
           </p:cNvSpPr>
           <p:nvPr/>
         </p:nvSpPr>
         <p:spPr>
-          <a:xfrm xmlns:a="http://schemas.openxmlformats.org/drawingml/2006/main">
+          <a:xfrm>
             <a:off x="838200" y="5191125"/>
             <a:ext cx="9334500" cy="361950"/>
           </a:xfrm>
-          <a:prstGeom xmlns:a="http://schemas.openxmlformats.org/drawingml/2006/main" prst="rect">
+          <a:prstGeom prst="rect">
             <a:avLst/>
           </a:prstGeom>
-          <a:noFill xmlns:a="http://schemas.openxmlformats.org/drawingml/2006/main"/>
-          <a:ln xmlns:a="http://schemas.openxmlformats.org/drawingml/2006/main" w="0">
+          <a:noFill/>
+          <a:ln w="0">
             <a:noFill/>
             <a:prstDash val="solid"/>
           </a:ln>
         </p:spPr>
         <p:txBody>
-          <a:bodyPr xmlns:a="http://schemas.openxmlformats.org/drawingml/2006/main" lIns="0" tIns="0" rIns="0" bIns="0" anchor="t">
+          <a:bodyPr lIns="0" tIns="0" rIns="0" bIns="0" anchor="t">
             <a:noAutofit/>
           </a:bodyPr>
-          <a:lstStyle xmlns:a="http://schemas.openxmlformats.org/drawingml/2006/main">
+          <a:lstStyle>
             <a:defPPr algn="l">
               <a:defRPr sz="1725">
                 <a:solidFill>
@@ -3558,7 +3277,7 @@
               </a:defRPr>
             </a:defPPr>
           </a:lstStyle>
-          <a:p xmlns:a="http://schemas.openxmlformats.org/drawingml/2006/main">
+          <a:p>
             <a:pPr algn="l">
               <a:buNone/>
               <a:defRPr sz="1725">
@@ -3591,17 +3310,21 @@
       </p:ext>
     </p:extLst>
   </p:cSld>
+  <p:clrMapOvr>
+    <a:masterClrMapping/>
+  </p:clrMapOvr>
 </p:sld>
 </file>
 
 <file path=ppt/slides/slide2.xml><?xml version="1.0" encoding="utf-8"?>
-<p:sld xmlns:p="http://schemas.openxmlformats.org/presentationml/2006/main">
+<p:sld xmlns:a="http://schemas.openxmlformats.org/drawingml/2006/main" xmlns:r="http://schemas.openxmlformats.org/officeDocument/2006/relationships" xmlns:p="http://schemas.openxmlformats.org/presentationml/2006/main">
   <p:cSld>
     <p:bg>
       <p:bgPr>
-        <a:solidFill xmlns:a="http://schemas.openxmlformats.org/drawingml/2006/main">
+        <a:solidFill>
           <a:srgbClr val="F4F7FA"/>
         </a:solidFill>
+        <a:effectLst/>
       </p:bgPr>
     </p:bg>
     <p:spTree>
@@ -3611,41 +3334,46 @@
         <p:nvPr/>
       </p:nvGrpSpPr>
       <p:grpSpPr>
-        <a:xfrm xmlns:a="http://schemas.openxmlformats.org/drawingml/2006/main"/>
+        <a:xfrm>
+          <a:off x="0" y="0"/>
+          <a:ext cx="0" cy="0"/>
+          <a:chOff x="0" y="0"/>
+          <a:chExt cx="0" cy="0"/>
+        </a:xfrm>
       </p:grpSpPr>
       <p:sp>
         <p:nvSpPr>
           <p:cNvPr id="5" name="slide-title">
-            <a:extLst xmlns:a="http://schemas.openxmlformats.org/drawingml/2006/main">
+            <a:extLst>
               <a:ext uri="{FF2B5EF4-FFF2-40B4-BE49-F238E27FC236}">
                 <a16:creationId xmlns:a16="http://schemas.microsoft.com/office/drawing/2014/main" id="{CEC6E462-E116-426D-ADAD-44466177A0EA}"/>
               </a:ext>
             </a:extLst>
           </p:cNvPr>
           <p:cNvSpPr>
-            <a:spLocks xmlns:a="http://schemas.openxmlformats.org/drawingml/2006/main" noGrp="1"/>
+            <a:spLocks noGrp="1"/>
           </p:cNvSpPr>
           <p:nvPr/>
         </p:nvSpPr>
         <p:spPr>
-          <a:xfrm xmlns:a="http://schemas.openxmlformats.org/drawingml/2006/main">
+          <a:xfrm>
             <a:off x="685800" y="457200"/>
             <a:ext cx="10820400" cy="590550"/>
           </a:xfrm>
-          <a:prstGeom xmlns:a="http://schemas.openxmlformats.org/drawingml/2006/main" prst="rect">
+          <a:prstGeom prst="rect">
             <a:avLst/>
           </a:prstGeom>
-          <a:noFill xmlns:a="http://schemas.openxmlformats.org/drawingml/2006/main"/>
-          <a:ln xmlns:a="http://schemas.openxmlformats.org/drawingml/2006/main" w="0">
+          <a:noFill/>
+          <a:ln w="0">
             <a:noFill/>
             <a:prstDash val="solid"/>
           </a:ln>
         </p:spPr>
         <p:txBody>
-          <a:bodyPr xmlns:a="http://schemas.openxmlformats.org/drawingml/2006/main" lIns="0" tIns="0" rIns="0" bIns="0" anchor="t">
+          <a:bodyPr lIns="0" tIns="0" rIns="0" bIns="0" anchor="t">
             <a:noAutofit/>
           </a:bodyPr>
-          <a:lstStyle xmlns:a="http://schemas.openxmlformats.org/drawingml/2006/main">
+          <a:lstStyle>
             <a:defPPr algn="l">
               <a:defRPr sz="3450" b="1">
                 <a:solidFill>
@@ -3657,7 +3385,7 @@
               </a:defRPr>
             </a:defPPr>
           </a:lstStyle>
-          <a:p xmlns:a="http://schemas.openxmlformats.org/drawingml/2006/main">
+          <a:p>
             <a:pPr algn="l">
               <a:buNone/>
               <a:defRPr sz="3450" b="1">
@@ -3686,36 +3414,36 @@
       <p:sp>
         <p:nvSpPr>
           <p:cNvPr id="2" name="product-purpose">
-            <a:extLst xmlns:a="http://schemas.openxmlformats.org/drawingml/2006/main">
+            <a:extLst>
               <a:ext uri="{FF2B5EF4-FFF2-40B4-BE49-F238E27FC236}">
                 <a16:creationId xmlns:a16="http://schemas.microsoft.com/office/drawing/2014/main" id="{ED29EEF4-E010-40BB-95BF-3DAFDD5BA0F0}"/>
               </a:ext>
             </a:extLst>
           </p:cNvPr>
           <p:cNvSpPr>
-            <a:spLocks xmlns:a="http://schemas.openxmlformats.org/drawingml/2006/main" noGrp="1"/>
+            <a:spLocks noGrp="1"/>
           </p:cNvSpPr>
           <p:nvPr/>
         </p:nvSpPr>
         <p:spPr>
-          <a:xfrm xmlns:a="http://schemas.openxmlformats.org/drawingml/2006/main">
+          <a:xfrm>
             <a:off x="685800" y="1562100"/>
             <a:ext cx="4572000" cy="1085850"/>
           </a:xfrm>
-          <a:prstGeom xmlns:a="http://schemas.openxmlformats.org/drawingml/2006/main" prst="rect">
+          <a:prstGeom prst="rect">
             <a:avLst/>
           </a:prstGeom>
-          <a:noFill xmlns:a="http://schemas.openxmlformats.org/drawingml/2006/main"/>
-          <a:ln xmlns:a="http://schemas.openxmlformats.org/drawingml/2006/main" w="0">
+          <a:noFill/>
+          <a:ln w="0">
             <a:noFill/>
             <a:prstDash val="solid"/>
           </a:ln>
         </p:spPr>
         <p:txBody>
-          <a:bodyPr xmlns:a="http://schemas.openxmlformats.org/drawingml/2006/main" lIns="0" tIns="0" rIns="0" bIns="0" anchor="t">
+          <a:bodyPr lIns="0" tIns="0" rIns="0" bIns="0" anchor="t">
             <a:noAutofit/>
           </a:bodyPr>
-          <a:lstStyle xmlns:a="http://schemas.openxmlformats.org/drawingml/2006/main">
+          <a:lstStyle>
             <a:defPPr algn="l">
               <a:defRPr sz="2175" b="1">
                 <a:solidFill>
@@ -3727,7 +3455,7 @@
               </a:defRPr>
             </a:defPPr>
           </a:lstStyle>
-          <a:p xmlns:a="http://schemas.openxmlformats.org/drawingml/2006/main">
+          <a:p>
             <a:pPr algn="l">
               <a:buNone/>
               <a:defRPr sz="2175" b="1">
@@ -3756,36 +3484,36 @@
       <p:sp>
         <p:nvSpPr>
           <p:cNvPr id="3" name="product-details">
-            <a:extLst xmlns:a="http://schemas.openxmlformats.org/drawingml/2006/main">
+            <a:extLst>
               <a:ext uri="{FF2B5EF4-FFF2-40B4-BE49-F238E27FC236}">
                 <a16:creationId xmlns:a16="http://schemas.microsoft.com/office/drawing/2014/main" id="{F5D18EF4-5675-43A2-8AE3-FD84F5B6898D}"/>
               </a:ext>
             </a:extLst>
           </p:cNvPr>
           <p:cNvSpPr>
-            <a:spLocks xmlns:a="http://schemas.openxmlformats.org/drawingml/2006/main" noGrp="1"/>
+            <a:spLocks noGrp="1"/>
           </p:cNvSpPr>
           <p:nvPr/>
         </p:nvSpPr>
         <p:spPr>
-          <a:xfrm xmlns:a="http://schemas.openxmlformats.org/drawingml/2006/main">
+          <a:xfrm>
             <a:off x="685800" y="3143250"/>
             <a:ext cx="4667250" cy="1714500"/>
           </a:xfrm>
-          <a:prstGeom xmlns:a="http://schemas.openxmlformats.org/drawingml/2006/main" prst="rect">
+          <a:prstGeom prst="rect">
             <a:avLst/>
           </a:prstGeom>
-          <a:noFill xmlns:a="http://schemas.openxmlformats.org/drawingml/2006/main"/>
-          <a:ln xmlns:a="http://schemas.openxmlformats.org/drawingml/2006/main" w="0">
+          <a:noFill/>
+          <a:ln w="0">
             <a:noFill/>
             <a:prstDash val="solid"/>
           </a:ln>
         </p:spPr>
         <p:txBody>
-          <a:bodyPr xmlns:a="http://schemas.openxmlformats.org/drawingml/2006/main" lIns="0" tIns="0" rIns="0" bIns="0" anchor="t">
+          <a:bodyPr lIns="0" tIns="0" rIns="0" bIns="0" anchor="t">
             <a:noAutofit/>
           </a:bodyPr>
-          <a:lstStyle xmlns:a="http://schemas.openxmlformats.org/drawingml/2006/main">
+          <a:lstStyle>
             <a:defPPr algn="l">
               <a:defRPr sz="1800">
                 <a:solidFill>
@@ -3797,7 +3525,7 @@
               </a:defRPr>
             </a:defPPr>
           </a:lstStyle>
-          <a:p xmlns:a="http://schemas.openxmlformats.org/drawingml/2006/main">
+          <a:p>
             <a:pPr algn="l">
               <a:buNone/>
               <a:defRPr sz="1800">
@@ -3825,28 +3553,28 @@
       </p:sp>
       <p:pic>
         <p:nvPicPr>
-          <p:cNvPr id="4" name="">
-            <a:extLst xmlns:a="http://schemas.openxmlformats.org/drawingml/2006/main">
+          <p:cNvPr id="4" name="Picture 3">
+            <a:extLst>
               <a:ext uri="{FF2B5EF4-FFF2-40B4-BE49-F238E27FC236}">
                 <a16:creationId xmlns:a16="http://schemas.microsoft.com/office/drawing/2014/main" id="{3F8AEE42-E828-4634-9127-06B1B4E05D44}"/>
               </a:ext>
             </a:extLst>
           </p:cNvPr>
           <p:cNvPicPr>
-            <a:picLocks xmlns:a="http://schemas.openxmlformats.org/drawingml/2006/main" noChangeAspect="1"/>
+            <a:picLocks noChangeAspect="1"/>
           </p:cNvPicPr>
           <p:nvPr/>
         </p:nvPicPr>
         <p:blipFill>
-          <a:blip xmlns:r="http://schemas.openxmlformats.org/officeDocument/2006/relationships" xmlns:a="http://schemas.openxmlformats.org/drawingml/2006/main" r:embed="R82486c023e9c43a2"/>
-          <a:stretch xmlns:a="http://schemas.openxmlformats.org/drawingml/2006/main"/>
+          <a:blip r:embed="rId3"/>
+          <a:stretch/>
         </p:blipFill>
         <p:spPr>
-          <a:xfrm xmlns:a="http://schemas.openxmlformats.org/drawingml/2006/main">
+          <a:xfrm>
             <a:off x="5810250" y="1622690"/>
             <a:ext cx="5695950" cy="3955521"/>
           </a:xfrm>
-          <a:prstGeom xmlns:a="http://schemas.openxmlformats.org/drawingml/2006/main" prst="rect">
+          <a:prstGeom prst="rect">
             <a:avLst/>
           </a:prstGeom>
         </p:spPr>
@@ -3858,17 +3586,21 @@
       </p:ext>
     </p:extLst>
   </p:cSld>
+  <p:clrMapOvr>
+    <a:masterClrMapping/>
+  </p:clrMapOvr>
 </p:sld>
 </file>
 
 <file path=ppt/slides/slide3.xml><?xml version="1.0" encoding="utf-8"?>
-<p:sld xmlns:p="http://schemas.openxmlformats.org/presentationml/2006/main">
+<p:sld xmlns:a="http://schemas.openxmlformats.org/drawingml/2006/main" xmlns:r="http://schemas.openxmlformats.org/officeDocument/2006/relationships" xmlns:p="http://schemas.openxmlformats.org/presentationml/2006/main">
   <p:cSld>
     <p:bg>
       <p:bgPr>
-        <a:solidFill xmlns:a="http://schemas.openxmlformats.org/drawingml/2006/main">
+        <a:solidFill>
           <a:srgbClr val="FFFFFF"/>
         </a:solidFill>
+        <a:effectLst/>
       </p:bgPr>
     </p:bg>
     <p:spTree>
@@ -3878,32 +3610,37 @@
         <p:nvPr/>
       </p:nvGrpSpPr>
       <p:grpSpPr>
-        <a:xfrm xmlns:a="http://schemas.openxmlformats.org/drawingml/2006/main"/>
+        <a:xfrm>
+          <a:off x="0" y="0"/>
+          <a:ext cx="0" cy="0"/>
+          <a:chOff x="0" y="0"/>
+          <a:chExt cx="0" cy="0"/>
+        </a:xfrm>
       </p:grpSpPr>
       <p:cxnSp>
         <p:nvCxnSpPr>
-          <p:cNvPr id="9" name="">
-            <a:extLst xmlns:a="http://schemas.openxmlformats.org/drawingml/2006/main">
+          <p:cNvPr id="9" name="Straight Arrow Connector 8">
+            <a:extLst>
               <a:ext uri="{FF2B5EF4-FFF2-40B4-BE49-F238E27FC236}">
                 <a16:creationId xmlns:a16="http://schemas.microsoft.com/office/drawing/2014/main" id="{3933C9BF-8191-442E-A681-A6432579856B}"/>
               </a:ext>
             </a:extLst>
           </p:cNvPr>
           <p:cNvCxnSpPr>
-            <a:stCxn xmlns:a="http://schemas.openxmlformats.org/drawingml/2006/main" id="5" idx="3"/>
-            <a:endCxn xmlns:a="http://schemas.openxmlformats.org/drawingml/2006/main" id="6" idx="1"/>
+            <a:stCxn id="5" idx="3"/>
+            <a:endCxn id="6" idx="1"/>
           </p:cNvCxnSpPr>
           <p:nvPr/>
         </p:nvCxnSpPr>
         <p:spPr>
-          <a:xfrm xmlns:a="http://schemas.openxmlformats.org/drawingml/2006/main">
+          <a:xfrm>
             <a:off x="8458200" y="3228975"/>
             <a:ext cx="800100" cy="0"/>
           </a:xfrm>
-          <a:prstGeom xmlns:a="http://schemas.openxmlformats.org/drawingml/2006/main" prst="straightConnector1">
+          <a:prstGeom prst="straightConnector1">
             <a:avLst/>
           </a:prstGeom>
-          <a:ln xmlns:a="http://schemas.openxmlformats.org/drawingml/2006/main" w="28575">
+          <a:ln w="28575">
             <a:solidFill>
               <a:srgbClr val="1D4ED8"/>
             </a:solidFill>
@@ -3914,28 +3651,28 @@
       </p:cxnSp>
       <p:cxnSp>
         <p:nvCxnSpPr>
-          <p:cNvPr id="8" name="">
-            <a:extLst xmlns:a="http://schemas.openxmlformats.org/drawingml/2006/main">
+          <p:cNvPr id="8" name="Straight Arrow Connector 7">
+            <a:extLst>
               <a:ext uri="{FF2B5EF4-FFF2-40B4-BE49-F238E27FC236}">
                 <a16:creationId xmlns:a16="http://schemas.microsoft.com/office/drawing/2014/main" id="{5829F6B6-21F4-446F-ABEF-2B6897F6D821}"/>
               </a:ext>
             </a:extLst>
           </p:cNvPr>
           <p:cNvCxnSpPr>
-            <a:stCxn xmlns:a="http://schemas.openxmlformats.org/drawingml/2006/main" id="4" idx="3"/>
-            <a:endCxn xmlns:a="http://schemas.openxmlformats.org/drawingml/2006/main" id="5" idx="1"/>
+            <a:stCxn id="4" idx="3"/>
+            <a:endCxn id="5" idx="1"/>
           </p:cNvCxnSpPr>
           <p:nvPr/>
         </p:nvCxnSpPr>
         <p:spPr>
-          <a:xfrm xmlns:a="http://schemas.openxmlformats.org/drawingml/2006/main">
+          <a:xfrm>
             <a:off x="5562600" y="3228975"/>
             <a:ext cx="800100" cy="0"/>
           </a:xfrm>
-          <a:prstGeom xmlns:a="http://schemas.openxmlformats.org/drawingml/2006/main" prst="straightConnector1">
+          <a:prstGeom prst="straightConnector1">
             <a:avLst/>
           </a:prstGeom>
-          <a:ln xmlns:a="http://schemas.openxmlformats.org/drawingml/2006/main" w="28575">
+          <a:ln w="28575">
             <a:solidFill>
               <a:srgbClr val="1D4ED8"/>
             </a:solidFill>
@@ -3946,28 +3683,28 @@
       </p:cxnSp>
       <p:cxnSp>
         <p:nvCxnSpPr>
-          <p:cNvPr id="7" name="">
-            <a:extLst xmlns:a="http://schemas.openxmlformats.org/drawingml/2006/main">
+          <p:cNvPr id="7" name="Straight Arrow Connector 6">
+            <a:extLst>
               <a:ext uri="{FF2B5EF4-FFF2-40B4-BE49-F238E27FC236}">
                 <a16:creationId xmlns:a16="http://schemas.microsoft.com/office/drawing/2014/main" id="{70F39450-2E3C-448E-B972-FD712D7ACEB1}"/>
               </a:ext>
             </a:extLst>
           </p:cNvPr>
           <p:cNvCxnSpPr>
-            <a:stCxn xmlns:a="http://schemas.openxmlformats.org/drawingml/2006/main" id="3" idx="3"/>
-            <a:endCxn xmlns:a="http://schemas.openxmlformats.org/drawingml/2006/main" id="4" idx="1"/>
+            <a:stCxn id="3" idx="3"/>
+            <a:endCxn id="4" idx="1"/>
           </p:cNvCxnSpPr>
           <p:nvPr/>
         </p:nvCxnSpPr>
         <p:spPr>
-          <a:xfrm xmlns:a="http://schemas.openxmlformats.org/drawingml/2006/main">
+          <a:xfrm>
             <a:off x="2667000" y="3228975"/>
             <a:ext cx="762000" cy="0"/>
           </a:xfrm>
-          <a:prstGeom xmlns:a="http://schemas.openxmlformats.org/drawingml/2006/main" prst="straightConnector1">
+          <a:prstGeom prst="straightConnector1">
             <a:avLst/>
           </a:prstGeom>
-          <a:ln xmlns:a="http://schemas.openxmlformats.org/drawingml/2006/main" w="28575">
+          <a:ln w="28575">
             <a:solidFill>
               <a:srgbClr val="1D4ED8"/>
             </a:solidFill>
@@ -3979,36 +3716,36 @@
       <p:sp>
         <p:nvSpPr>
           <p:cNvPr id="12" name="slide-title">
-            <a:extLst xmlns:a="http://schemas.openxmlformats.org/drawingml/2006/main">
+            <a:extLst>
               <a:ext uri="{FF2B5EF4-FFF2-40B4-BE49-F238E27FC236}">
                 <a16:creationId xmlns:a16="http://schemas.microsoft.com/office/drawing/2014/main" id="{ABEF843E-D7F6-4011-93BF-751A21ED4EBF}"/>
               </a:ext>
             </a:extLst>
           </p:cNvPr>
           <p:cNvSpPr>
-            <a:spLocks xmlns:a="http://schemas.openxmlformats.org/drawingml/2006/main" noGrp="1"/>
+            <a:spLocks noGrp="1"/>
           </p:cNvSpPr>
           <p:nvPr/>
         </p:nvSpPr>
         <p:spPr>
-          <a:xfrm xmlns:a="http://schemas.openxmlformats.org/drawingml/2006/main">
+          <a:xfrm>
             <a:off x="685800" y="457200"/>
             <a:ext cx="10820400" cy="590550"/>
           </a:xfrm>
-          <a:prstGeom xmlns:a="http://schemas.openxmlformats.org/drawingml/2006/main" prst="rect">
+          <a:prstGeom prst="rect">
             <a:avLst/>
           </a:prstGeom>
-          <a:noFill xmlns:a="http://schemas.openxmlformats.org/drawingml/2006/main"/>
-          <a:ln xmlns:a="http://schemas.openxmlformats.org/drawingml/2006/main" w="0">
+          <a:noFill/>
+          <a:ln w="0">
             <a:noFill/>
             <a:prstDash val="solid"/>
           </a:ln>
         </p:spPr>
         <p:txBody>
-          <a:bodyPr xmlns:a="http://schemas.openxmlformats.org/drawingml/2006/main" lIns="0" tIns="0" rIns="0" bIns="0" anchor="t">
+          <a:bodyPr lIns="0" tIns="0" rIns="0" bIns="0" anchor="t">
             <a:noAutofit/>
           </a:bodyPr>
-          <a:lstStyle xmlns:a="http://schemas.openxmlformats.org/drawingml/2006/main">
+          <a:lstStyle>
             <a:defPPr algn="l">
               <a:defRPr sz="3450" b="1">
                 <a:solidFill>
@@ -4020,7 +3757,7 @@
               </a:defRPr>
             </a:defPPr>
           </a:lstStyle>
-          <a:p xmlns:a="http://schemas.openxmlformats.org/drawingml/2006/main">
+          <a:p>
             <a:pPr algn="l">
               <a:buNone/>
               <a:defRPr sz="3450" b="1">
@@ -4049,36 +3786,36 @@
       <p:sp>
         <p:nvSpPr>
           <p:cNvPr id="2" name="architecture-intro">
-            <a:extLst xmlns:a="http://schemas.openxmlformats.org/drawingml/2006/main">
+            <a:extLst>
               <a:ext uri="{FF2B5EF4-FFF2-40B4-BE49-F238E27FC236}">
                 <a16:creationId xmlns:a16="http://schemas.microsoft.com/office/drawing/2014/main" id="{C6A77BCF-ADBF-4676-BF5A-9BEF0399B92B}"/>
               </a:ext>
             </a:extLst>
           </p:cNvPr>
           <p:cNvSpPr>
-            <a:spLocks xmlns:a="http://schemas.openxmlformats.org/drawingml/2006/main" noGrp="1"/>
+            <a:spLocks noGrp="1"/>
           </p:cNvSpPr>
           <p:nvPr/>
         </p:nvSpPr>
         <p:spPr>
-          <a:xfrm xmlns:a="http://schemas.openxmlformats.org/drawingml/2006/main">
+          <a:xfrm>
             <a:off x="685800" y="1371600"/>
             <a:ext cx="10382250" cy="666750"/>
           </a:xfrm>
-          <a:prstGeom xmlns:a="http://schemas.openxmlformats.org/drawingml/2006/main" prst="rect">
+          <a:prstGeom prst="rect">
             <a:avLst/>
           </a:prstGeom>
-          <a:noFill xmlns:a="http://schemas.openxmlformats.org/drawingml/2006/main"/>
-          <a:ln xmlns:a="http://schemas.openxmlformats.org/drawingml/2006/main" w="0">
+          <a:noFill/>
+          <a:ln w="0">
             <a:noFill/>
             <a:prstDash val="solid"/>
           </a:ln>
         </p:spPr>
         <p:txBody>
-          <a:bodyPr xmlns:a="http://schemas.openxmlformats.org/drawingml/2006/main" lIns="0" tIns="0" rIns="0" bIns="0" anchor="t">
+          <a:bodyPr lIns="0" tIns="0" rIns="0" bIns="0" anchor="t">
             <a:noAutofit/>
           </a:bodyPr>
-          <a:lstStyle xmlns:a="http://schemas.openxmlformats.org/drawingml/2006/main">
+          <a:lstStyle>
             <a:defPPr algn="l">
               <a:defRPr sz="1875">
                 <a:solidFill>
@@ -4090,7 +3827,7 @@
               </a:defRPr>
             </a:defPPr>
           </a:lstStyle>
-          <a:p xmlns:a="http://schemas.openxmlformats.org/drawingml/2006/main">
+          <a:p>
             <a:pPr algn="l">
               <a:buNone/>
               <a:defRPr sz="1875">
@@ -4119,31 +3856,31 @@
       <p:sp>
         <p:nvSpPr>
           <p:cNvPr id="3" name="browser">
-            <a:extLst xmlns:a="http://schemas.openxmlformats.org/drawingml/2006/main">
+            <a:extLst>
               <a:ext uri="{FF2B5EF4-FFF2-40B4-BE49-F238E27FC236}">
                 <a16:creationId xmlns:a16="http://schemas.microsoft.com/office/drawing/2014/main" id="{E81B717F-17D0-4110-91BA-7D80BACDC361}"/>
               </a:ext>
             </a:extLst>
           </p:cNvPr>
           <p:cNvSpPr>
-            <a:spLocks xmlns:a="http://schemas.openxmlformats.org/drawingml/2006/main" noGrp="1"/>
+            <a:spLocks noGrp="1"/>
           </p:cNvSpPr>
           <p:nvPr/>
         </p:nvSpPr>
         <p:spPr>
-          <a:xfrm xmlns:a="http://schemas.openxmlformats.org/drawingml/2006/main">
+          <a:xfrm>
             <a:off x="685800" y="2667000"/>
             <a:ext cx="1981200" cy="1123950"/>
           </a:xfrm>
-          <a:prstGeom xmlns:a="http://schemas.openxmlformats.org/drawingml/2006/main" prst="roundRect">
+          <a:prstGeom prst="roundRect">
             <a:avLst>
               <a:gd name="adj" fmla="val 10169"/>
             </a:avLst>
           </a:prstGeom>
-          <a:solidFill xmlns:a="http://schemas.openxmlformats.org/drawingml/2006/main">
+          <a:solidFill>
             <a:srgbClr val="EAF1FC"/>
           </a:solidFill>
-          <a:ln xmlns:a="http://schemas.openxmlformats.org/drawingml/2006/main" w="11430">
+          <a:ln w="11430">
             <a:solidFill>
               <a:srgbClr val="D5DEE8"/>
             </a:solidFill>
@@ -4151,10 +3888,10 @@
           </a:ln>
         </p:spPr>
         <p:txBody>
-          <a:bodyPr xmlns:a="http://schemas.openxmlformats.org/drawingml/2006/main" lIns="114300" tIns="76200" rIns="114300" bIns="76200" anchor="ctr">
+          <a:bodyPr lIns="114300" tIns="76200" rIns="114300" bIns="76200" anchor="ctr">
             <a:noAutofit/>
           </a:bodyPr>
-          <a:lstStyle xmlns:a="http://schemas.openxmlformats.org/drawingml/2006/main">
+          <a:lstStyle>
             <a:defPPr algn="ctr">
               <a:defRPr sz="1800" b="1">
                 <a:solidFill>
@@ -4166,7 +3903,7 @@
               </a:defRPr>
             </a:defPPr>
           </a:lstStyle>
-          <a:p xmlns:a="http://schemas.openxmlformats.org/drawingml/2006/main">
+          <a:p>
             <a:pPr algn="ctr">
               <a:buNone/>
               <a:defRPr sz="1800" b="1">
@@ -4195,31 +3932,31 @@
       <p:sp>
         <p:nvSpPr>
           <p:cNvPr id="4" name="frontend">
-            <a:extLst xmlns:a="http://schemas.openxmlformats.org/drawingml/2006/main">
+            <a:extLst>
               <a:ext uri="{FF2B5EF4-FFF2-40B4-BE49-F238E27FC236}">
                 <a16:creationId xmlns:a16="http://schemas.microsoft.com/office/drawing/2014/main" id="{2C53DC85-9B89-48CE-BEFF-992439C43036}"/>
               </a:ext>
             </a:extLst>
           </p:cNvPr>
           <p:cNvSpPr>
-            <a:spLocks xmlns:a="http://schemas.openxmlformats.org/drawingml/2006/main" noGrp="1"/>
+            <a:spLocks noGrp="1"/>
           </p:cNvSpPr>
           <p:nvPr/>
         </p:nvSpPr>
         <p:spPr>
-          <a:xfrm xmlns:a="http://schemas.openxmlformats.org/drawingml/2006/main">
+          <a:xfrm>
             <a:off x="3429000" y="2667000"/>
             <a:ext cx="2133600" cy="1123950"/>
           </a:xfrm>
-          <a:prstGeom xmlns:a="http://schemas.openxmlformats.org/drawingml/2006/main" prst="roundRect">
+          <a:prstGeom prst="roundRect">
             <a:avLst>
               <a:gd name="adj" fmla="val 10169"/>
             </a:avLst>
           </a:prstGeom>
-          <a:solidFill xmlns:a="http://schemas.openxmlformats.org/drawingml/2006/main">
+          <a:solidFill>
             <a:srgbClr val="E5F4F1"/>
           </a:solidFill>
-          <a:ln xmlns:a="http://schemas.openxmlformats.org/drawingml/2006/main" w="11430">
+          <a:ln w="11430">
             <a:solidFill>
               <a:srgbClr val="D5DEE8"/>
             </a:solidFill>
@@ -4227,10 +3964,10 @@
           </a:ln>
         </p:spPr>
         <p:txBody>
-          <a:bodyPr xmlns:a="http://schemas.openxmlformats.org/drawingml/2006/main" lIns="114300" tIns="76200" rIns="114300" bIns="76200" anchor="ctr">
+          <a:bodyPr lIns="114300" tIns="76200" rIns="114300" bIns="76200" anchor="ctr">
             <a:noAutofit/>
           </a:bodyPr>
-          <a:lstStyle xmlns:a="http://schemas.openxmlformats.org/drawingml/2006/main">
+          <a:lstStyle>
             <a:defPPr algn="ctr">
               <a:defRPr sz="1800" b="1">
                 <a:solidFill>
@@ -4242,7 +3979,7 @@
               </a:defRPr>
             </a:defPPr>
           </a:lstStyle>
-          <a:p xmlns:a="http://schemas.openxmlformats.org/drawingml/2006/main">
+          <a:p>
             <a:pPr algn="ctr">
               <a:buNone/>
               <a:defRPr sz="1800" b="1">
@@ -4266,7 +4003,7 @@
               <a:t>React + Nginx</a:t>
             </a:r>
           </a:p>
-          <a:p xmlns:a="http://schemas.openxmlformats.org/drawingml/2006/main">
+          <a:p>
             <a:pPr algn="ctr">
               <a:buNone/>
               <a:defRPr sz="1800" b="1">
@@ -4295,31 +4032,31 @@
       <p:sp>
         <p:nvSpPr>
           <p:cNvPr id="5" name="backend">
-            <a:extLst xmlns:a="http://schemas.openxmlformats.org/drawingml/2006/main">
+            <a:extLst>
               <a:ext uri="{FF2B5EF4-FFF2-40B4-BE49-F238E27FC236}">
                 <a16:creationId xmlns:a16="http://schemas.microsoft.com/office/drawing/2014/main" id="{19F68B01-4EEC-4955-9832-5F95B37A195F}"/>
               </a:ext>
             </a:extLst>
           </p:cNvPr>
           <p:cNvSpPr>
-            <a:spLocks xmlns:a="http://schemas.openxmlformats.org/drawingml/2006/main" noGrp="1"/>
+            <a:spLocks noGrp="1"/>
           </p:cNvSpPr>
           <p:nvPr/>
         </p:nvSpPr>
         <p:spPr>
-          <a:xfrm xmlns:a="http://schemas.openxmlformats.org/drawingml/2006/main">
+          <a:xfrm>
             <a:off x="6362700" y="2667000"/>
             <a:ext cx="2095500" cy="1123950"/>
           </a:xfrm>
-          <a:prstGeom xmlns:a="http://schemas.openxmlformats.org/drawingml/2006/main" prst="roundRect">
+          <a:prstGeom prst="roundRect">
             <a:avLst>
               <a:gd name="adj" fmla="val 10169"/>
             </a:avLst>
           </a:prstGeom>
-          <a:solidFill xmlns:a="http://schemas.openxmlformats.org/drawingml/2006/main">
+          <a:solidFill>
             <a:srgbClr val="EAF1FC"/>
           </a:solidFill>
-          <a:ln xmlns:a="http://schemas.openxmlformats.org/drawingml/2006/main" w="11430">
+          <a:ln w="11430">
             <a:solidFill>
               <a:srgbClr val="D5DEE8"/>
             </a:solidFill>
@@ -4327,10 +4064,10 @@
           </a:ln>
         </p:spPr>
         <p:txBody>
-          <a:bodyPr xmlns:a="http://schemas.openxmlformats.org/drawingml/2006/main" lIns="114300" tIns="76200" rIns="114300" bIns="76200" anchor="ctr">
+          <a:bodyPr lIns="114300" tIns="76200" rIns="114300" bIns="76200" anchor="ctr">
             <a:noAutofit/>
           </a:bodyPr>
-          <a:lstStyle xmlns:a="http://schemas.openxmlformats.org/drawingml/2006/main">
+          <a:lstStyle>
             <a:defPPr algn="ctr">
               <a:defRPr sz="1800" b="1">
                 <a:solidFill>
@@ -4342,7 +4079,7 @@
               </a:defRPr>
             </a:defPPr>
           </a:lstStyle>
-          <a:p xmlns:a="http://schemas.openxmlformats.org/drawingml/2006/main">
+          <a:p>
             <a:pPr algn="ctr">
               <a:buNone/>
               <a:defRPr sz="1800" b="1">
@@ -4366,7 +4103,7 @@
               <a:t>FastAPI</a:t>
             </a:r>
           </a:p>
-          <a:p xmlns:a="http://schemas.openxmlformats.org/drawingml/2006/main">
+          <a:p>
             <a:pPr algn="ctr">
               <a:buNone/>
               <a:defRPr sz="1800" b="1">
@@ -4395,31 +4132,31 @@
       <p:sp>
         <p:nvSpPr>
           <p:cNvPr id="6" name="database">
-            <a:extLst xmlns:a="http://schemas.openxmlformats.org/drawingml/2006/main">
+            <a:extLst>
               <a:ext uri="{FF2B5EF4-FFF2-40B4-BE49-F238E27FC236}">
                 <a16:creationId xmlns:a16="http://schemas.microsoft.com/office/drawing/2014/main" id="{35F6EDB0-B1D0-4A78-B191-4596FA5A40B6}"/>
               </a:ext>
             </a:extLst>
           </p:cNvPr>
           <p:cNvSpPr>
-            <a:spLocks xmlns:a="http://schemas.openxmlformats.org/drawingml/2006/main" noGrp="1"/>
+            <a:spLocks noGrp="1"/>
           </p:cNvSpPr>
           <p:nvPr/>
         </p:nvSpPr>
         <p:spPr>
-          <a:xfrm xmlns:a="http://schemas.openxmlformats.org/drawingml/2006/main">
+          <a:xfrm>
             <a:off x="9258300" y="2667000"/>
             <a:ext cx="2247900" cy="1123950"/>
           </a:xfrm>
-          <a:prstGeom xmlns:a="http://schemas.openxmlformats.org/drawingml/2006/main" prst="roundRect">
+          <a:prstGeom prst="roundRect">
             <a:avLst>
               <a:gd name="adj" fmla="val 10169"/>
             </a:avLst>
           </a:prstGeom>
-          <a:solidFill xmlns:a="http://schemas.openxmlformats.org/drawingml/2006/main">
+          <a:solidFill>
             <a:srgbClr val="FFF1E8"/>
           </a:solidFill>
-          <a:ln xmlns:a="http://schemas.openxmlformats.org/drawingml/2006/main" w="11430">
+          <a:ln w="11430">
             <a:solidFill>
               <a:srgbClr val="D5DEE8"/>
             </a:solidFill>
@@ -4427,10 +4164,10 @@
           </a:ln>
         </p:spPr>
         <p:txBody>
-          <a:bodyPr xmlns:a="http://schemas.openxmlformats.org/drawingml/2006/main" lIns="114300" tIns="76200" rIns="114300" bIns="76200" anchor="ctr">
+          <a:bodyPr lIns="114300" tIns="76200" rIns="114300" bIns="76200" anchor="ctr">
             <a:noAutofit/>
           </a:bodyPr>
-          <a:lstStyle xmlns:a="http://schemas.openxmlformats.org/drawingml/2006/main">
+          <a:lstStyle>
             <a:defPPr algn="ctr">
               <a:defRPr sz="1800" b="1">
                 <a:solidFill>
@@ -4442,7 +4179,7 @@
               </a:defRPr>
             </a:defPPr>
           </a:lstStyle>
-          <a:p xmlns:a="http://schemas.openxmlformats.org/drawingml/2006/main">
+          <a:p>
             <a:pPr algn="ctr">
               <a:buNone/>
               <a:defRPr sz="1800" b="1">
@@ -4466,7 +4203,7 @@
               <a:t>PostgreSQL 16</a:t>
             </a:r>
           </a:p>
-          <a:p xmlns:a="http://schemas.openxmlformats.org/drawingml/2006/main">
+          <a:p>
             <a:pPr algn="ctr">
               <a:buNone/>
               <a:defRPr sz="1800" b="1">
@@ -4495,36 +4232,36 @@
       <p:sp>
         <p:nvSpPr>
           <p:cNvPr id="10" name="observability-flow">
-            <a:extLst xmlns:a="http://schemas.openxmlformats.org/drawingml/2006/main">
+            <a:extLst>
               <a:ext uri="{FF2B5EF4-FFF2-40B4-BE49-F238E27FC236}">
                 <a16:creationId xmlns:a16="http://schemas.microsoft.com/office/drawing/2014/main" id="{760D6E01-81DE-427E-BEAA-A2BABCB8CA9B}"/>
               </a:ext>
             </a:extLst>
           </p:cNvPr>
           <p:cNvSpPr>
-            <a:spLocks xmlns:a="http://schemas.openxmlformats.org/drawingml/2006/main" noGrp="1"/>
+            <a:spLocks noGrp="1"/>
           </p:cNvSpPr>
           <p:nvPr/>
         </p:nvSpPr>
         <p:spPr>
-          <a:xfrm xmlns:a="http://schemas.openxmlformats.org/drawingml/2006/main">
+          <a:xfrm>
             <a:off x="2381250" y="4524375"/>
             <a:ext cx="7429500" cy="495300"/>
           </a:xfrm>
-          <a:prstGeom xmlns:a="http://schemas.openxmlformats.org/drawingml/2006/main" prst="rect">
+          <a:prstGeom prst="rect">
             <a:avLst/>
           </a:prstGeom>
-          <a:noFill xmlns:a="http://schemas.openxmlformats.org/drawingml/2006/main"/>
-          <a:ln xmlns:a="http://schemas.openxmlformats.org/drawingml/2006/main" w="0">
+          <a:noFill/>
+          <a:ln w="0">
             <a:noFill/>
             <a:prstDash val="solid"/>
           </a:ln>
         </p:spPr>
         <p:txBody>
-          <a:bodyPr xmlns:a="http://schemas.openxmlformats.org/drawingml/2006/main" lIns="0" tIns="0" rIns="0" bIns="0" anchor="t">
+          <a:bodyPr lIns="0" tIns="0" rIns="0" bIns="0" anchor="t">
             <a:noAutofit/>
           </a:bodyPr>
-          <a:lstStyle xmlns:a="http://schemas.openxmlformats.org/drawingml/2006/main">
+          <a:lstStyle>
             <a:defPPr algn="ctr">
               <a:defRPr sz="2175" b="1">
                 <a:solidFill>
@@ -4536,7 +4273,7 @@
               </a:defRPr>
             </a:defPPr>
           </a:lstStyle>
-          <a:p xmlns:a="http://schemas.openxmlformats.org/drawingml/2006/main">
+          <a:p>
             <a:pPr algn="ctr">
               <a:buNone/>
               <a:defRPr sz="2175" b="1">
@@ -4565,36 +4302,36 @@
       <p:sp>
         <p:nvSpPr>
           <p:cNvPr id="11" name="migration-note">
-            <a:extLst xmlns:a="http://schemas.openxmlformats.org/drawingml/2006/main">
+            <a:extLst>
               <a:ext uri="{FF2B5EF4-FFF2-40B4-BE49-F238E27FC236}">
                 <a16:creationId xmlns:a16="http://schemas.microsoft.com/office/drawing/2014/main" id="{3AB33F64-3018-44F9-A8E1-8AB824E2EFE1}"/>
               </a:ext>
             </a:extLst>
           </p:cNvPr>
           <p:cNvSpPr>
-            <a:spLocks xmlns:a="http://schemas.openxmlformats.org/drawingml/2006/main" noGrp="1"/>
+            <a:spLocks noGrp="1"/>
           </p:cNvSpPr>
           <p:nvPr/>
         </p:nvSpPr>
         <p:spPr>
-          <a:xfrm xmlns:a="http://schemas.openxmlformats.org/drawingml/2006/main">
+          <a:xfrm>
             <a:off x="1428750" y="5381625"/>
             <a:ext cx="9334500" cy="419100"/>
           </a:xfrm>
-          <a:prstGeom xmlns:a="http://schemas.openxmlformats.org/drawingml/2006/main" prst="rect">
+          <a:prstGeom prst="rect">
             <a:avLst/>
           </a:prstGeom>
-          <a:noFill xmlns:a="http://schemas.openxmlformats.org/drawingml/2006/main"/>
-          <a:ln xmlns:a="http://schemas.openxmlformats.org/drawingml/2006/main" w="0">
+          <a:noFill/>
+          <a:ln w="0">
             <a:noFill/>
             <a:prstDash val="solid"/>
           </a:ln>
         </p:spPr>
         <p:txBody>
-          <a:bodyPr xmlns:a="http://schemas.openxmlformats.org/drawingml/2006/main" lIns="0" tIns="0" rIns="0" bIns="0" anchor="t">
+          <a:bodyPr lIns="0" tIns="0" rIns="0" bIns="0" anchor="t">
             <a:noAutofit/>
           </a:bodyPr>
-          <a:lstStyle xmlns:a="http://schemas.openxmlformats.org/drawingml/2006/main">
+          <a:lstStyle>
             <a:defPPr algn="ctr">
               <a:defRPr sz="1650">
                 <a:solidFill>
@@ -4606,7 +4343,7 @@
               </a:defRPr>
             </a:defPPr>
           </a:lstStyle>
-          <a:p xmlns:a="http://schemas.openxmlformats.org/drawingml/2006/main">
+          <a:p>
             <a:pPr algn="ctr">
               <a:buNone/>
               <a:defRPr sz="1650">
@@ -4639,17 +4376,21 @@
       </p:ext>
     </p:extLst>
   </p:cSld>
+  <p:clrMapOvr>
+    <a:masterClrMapping/>
+  </p:clrMapOvr>
 </p:sld>
 </file>
 
 <file path=ppt/slides/slide4.xml><?xml version="1.0" encoding="utf-8"?>
-<p:sld xmlns:p="http://schemas.openxmlformats.org/presentationml/2006/main">
+<p:sld xmlns:a="http://schemas.openxmlformats.org/drawingml/2006/main" xmlns:r="http://schemas.openxmlformats.org/officeDocument/2006/relationships" xmlns:p="http://schemas.openxmlformats.org/presentationml/2006/main">
   <p:cSld>
     <p:bg>
       <p:bgPr>
-        <a:solidFill xmlns:a="http://schemas.openxmlformats.org/drawingml/2006/main">
+        <a:solidFill>
           <a:srgbClr val="F4F7FA"/>
         </a:solidFill>
+        <a:effectLst/>
       </p:bgPr>
     </p:bg>
     <p:spTree>
@@ -4659,41 +4400,46 @@
         <p:nvPr/>
       </p:nvGrpSpPr>
       <p:grpSpPr>
-        <a:xfrm xmlns:a="http://schemas.openxmlformats.org/drawingml/2006/main"/>
+        <a:xfrm>
+          <a:off x="0" y="0"/>
+          <a:ext cx="0" cy="0"/>
+          <a:chOff x="0" y="0"/>
+          <a:chExt cx="0" cy="0"/>
+        </a:xfrm>
       </p:grpSpPr>
       <p:sp>
         <p:nvSpPr>
           <p:cNvPr id="6" name="slide-title">
-            <a:extLst xmlns:a="http://schemas.openxmlformats.org/drawingml/2006/main">
+            <a:extLst>
               <a:ext uri="{FF2B5EF4-FFF2-40B4-BE49-F238E27FC236}">
                 <a16:creationId xmlns:a16="http://schemas.microsoft.com/office/drawing/2014/main" id="{4180DB1C-ECEB-4DAC-AEC5-1C6CF098B23D}"/>
               </a:ext>
             </a:extLst>
           </p:cNvPr>
           <p:cNvSpPr>
-            <a:spLocks xmlns:a="http://schemas.openxmlformats.org/drawingml/2006/main" noGrp="1"/>
+            <a:spLocks noGrp="1"/>
           </p:cNvSpPr>
           <p:nvPr/>
         </p:nvSpPr>
         <p:spPr>
-          <a:xfrm xmlns:a="http://schemas.openxmlformats.org/drawingml/2006/main">
+          <a:xfrm>
             <a:off x="685800" y="457200"/>
             <a:ext cx="10820400" cy="590550"/>
           </a:xfrm>
-          <a:prstGeom xmlns:a="http://schemas.openxmlformats.org/drawingml/2006/main" prst="rect">
+          <a:prstGeom prst="rect">
             <a:avLst/>
           </a:prstGeom>
-          <a:noFill xmlns:a="http://schemas.openxmlformats.org/drawingml/2006/main"/>
-          <a:ln xmlns:a="http://schemas.openxmlformats.org/drawingml/2006/main" w="0">
+          <a:noFill/>
+          <a:ln w="0">
             <a:noFill/>
             <a:prstDash val="solid"/>
           </a:ln>
         </p:spPr>
         <p:txBody>
-          <a:bodyPr xmlns:a="http://schemas.openxmlformats.org/drawingml/2006/main" lIns="0" tIns="0" rIns="0" bIns="0" anchor="t">
+          <a:bodyPr lIns="0" tIns="0" rIns="0" bIns="0" anchor="t">
             <a:noAutofit/>
           </a:bodyPr>
-          <a:lstStyle xmlns:a="http://schemas.openxmlformats.org/drawingml/2006/main">
+          <a:lstStyle>
             <a:defPPr algn="l">
               <a:defRPr sz="3450" b="1">
                 <a:solidFill>
@@ -4705,7 +4451,7 @@
               </a:defRPr>
             </a:defPPr>
           </a:lstStyle>
-          <a:p xmlns:a="http://schemas.openxmlformats.org/drawingml/2006/main">
+          <a:p>
             <a:pPr algn="l">
               <a:buNone/>
               <a:defRPr sz="3450" b="1">
@@ -4733,28 +4479,28 @@
       </p:sp>
       <p:pic>
         <p:nvPicPr>
-          <p:cNvPr id="2" name="">
-            <a:extLst xmlns:a="http://schemas.openxmlformats.org/drawingml/2006/main">
+          <p:cNvPr id="2" name="Picture 1">
+            <a:extLst>
               <a:ext uri="{FF2B5EF4-FFF2-40B4-BE49-F238E27FC236}">
                 <a16:creationId xmlns:a16="http://schemas.microsoft.com/office/drawing/2014/main" id="{ADA7F3FA-8DA5-4B7C-966D-7F660C747316}"/>
               </a:ext>
             </a:extLst>
           </p:cNvPr>
           <p:cNvPicPr>
-            <a:picLocks xmlns:a="http://schemas.openxmlformats.org/drawingml/2006/main" noChangeAspect="1"/>
+            <a:picLocks noChangeAspect="1"/>
           </p:cNvPicPr>
           <p:nvPr/>
         </p:nvPicPr>
         <p:blipFill>
-          <a:blip xmlns:r="http://schemas.openxmlformats.org/officeDocument/2006/relationships" xmlns:a="http://schemas.openxmlformats.org/drawingml/2006/main" r:embed="Rb2a5a5deb95e40a6"/>
-          <a:stretch xmlns:a="http://schemas.openxmlformats.org/drawingml/2006/main"/>
+          <a:blip r:embed="rId3"/>
+          <a:stretch/>
         </p:blipFill>
         <p:spPr>
-          <a:xfrm xmlns:a="http://schemas.openxmlformats.org/drawingml/2006/main">
+          <a:xfrm>
             <a:off x="685800" y="1490795"/>
             <a:ext cx="6048375" cy="4200260"/>
           </a:xfrm>
-          <a:prstGeom xmlns:a="http://schemas.openxmlformats.org/drawingml/2006/main" prst="rect">
+          <a:prstGeom prst="rect">
             <a:avLst/>
           </a:prstGeom>
         </p:spPr>
@@ -4762,36 +4508,36 @@
       <p:sp>
         <p:nvSpPr>
           <p:cNvPr id="3" name="quality-count">
-            <a:extLst xmlns:a="http://schemas.openxmlformats.org/drawingml/2006/main">
+            <a:extLst>
               <a:ext uri="{FF2B5EF4-FFF2-40B4-BE49-F238E27FC236}">
                 <a16:creationId xmlns:a16="http://schemas.microsoft.com/office/drawing/2014/main" id="{35AA9E03-FA05-4B26-9016-CD8FA19EE214}"/>
               </a:ext>
             </a:extLst>
           </p:cNvPr>
           <p:cNvSpPr>
-            <a:spLocks xmlns:a="http://schemas.openxmlformats.org/drawingml/2006/main" noGrp="1"/>
+            <a:spLocks noGrp="1"/>
           </p:cNvSpPr>
           <p:nvPr/>
         </p:nvSpPr>
         <p:spPr>
-          <a:xfrm xmlns:a="http://schemas.openxmlformats.org/drawingml/2006/main">
+          <a:xfrm>
             <a:off x="7334250" y="1695450"/>
             <a:ext cx="3905250" cy="647700"/>
           </a:xfrm>
-          <a:prstGeom xmlns:a="http://schemas.openxmlformats.org/drawingml/2006/main" prst="rect">
+          <a:prstGeom prst="rect">
             <a:avLst/>
           </a:prstGeom>
-          <a:noFill xmlns:a="http://schemas.openxmlformats.org/drawingml/2006/main"/>
-          <a:ln xmlns:a="http://schemas.openxmlformats.org/drawingml/2006/main" w="0">
+          <a:noFill/>
+          <a:ln w="0">
             <a:noFill/>
             <a:prstDash val="solid"/>
           </a:ln>
         </p:spPr>
         <p:txBody>
-          <a:bodyPr xmlns:a="http://schemas.openxmlformats.org/drawingml/2006/main" lIns="0" tIns="0" rIns="0" bIns="0" anchor="t">
+          <a:bodyPr lIns="0" tIns="0" rIns="0" bIns="0" anchor="t">
             <a:noAutofit/>
           </a:bodyPr>
-          <a:lstStyle xmlns:a="http://schemas.openxmlformats.org/drawingml/2006/main">
+          <a:lstStyle>
             <a:defPPr algn="l">
               <a:defRPr sz="3000" b="1">
                 <a:solidFill>
@@ -4803,7 +4549,7 @@
               </a:defRPr>
             </a:defPPr>
           </a:lstStyle>
-          <a:p xmlns:a="http://schemas.openxmlformats.org/drawingml/2006/main">
+          <a:p>
             <a:pPr algn="l">
               <a:buNone/>
               <a:defRPr sz="3000" b="1">
@@ -4832,36 +4578,36 @@
       <p:sp>
         <p:nvSpPr>
           <p:cNvPr id="4" name="quality-details">
-            <a:extLst xmlns:a="http://schemas.openxmlformats.org/drawingml/2006/main">
+            <a:extLst>
               <a:ext uri="{FF2B5EF4-FFF2-40B4-BE49-F238E27FC236}">
                 <a16:creationId xmlns:a16="http://schemas.microsoft.com/office/drawing/2014/main" id="{827F1364-8350-41C1-8A14-236EAC35FAEB}"/>
               </a:ext>
             </a:extLst>
           </p:cNvPr>
           <p:cNvSpPr>
-            <a:spLocks xmlns:a="http://schemas.openxmlformats.org/drawingml/2006/main" noGrp="1"/>
+            <a:spLocks noGrp="1"/>
           </p:cNvSpPr>
           <p:nvPr/>
         </p:nvSpPr>
         <p:spPr>
-          <a:xfrm xmlns:a="http://schemas.openxmlformats.org/drawingml/2006/main">
+          <a:xfrm>
             <a:off x="7334250" y="2647950"/>
             <a:ext cx="4000500" cy="2143125"/>
           </a:xfrm>
-          <a:prstGeom xmlns:a="http://schemas.openxmlformats.org/drawingml/2006/main" prst="rect">
+          <a:prstGeom prst="rect">
             <a:avLst/>
           </a:prstGeom>
-          <a:noFill xmlns:a="http://schemas.openxmlformats.org/drawingml/2006/main"/>
-          <a:ln xmlns:a="http://schemas.openxmlformats.org/drawingml/2006/main" w="0">
+          <a:noFill/>
+          <a:ln w="0">
             <a:noFill/>
             <a:prstDash val="solid"/>
           </a:ln>
         </p:spPr>
         <p:txBody>
-          <a:bodyPr xmlns:a="http://schemas.openxmlformats.org/drawingml/2006/main" lIns="0" tIns="0" rIns="0" bIns="0" anchor="t">
+          <a:bodyPr lIns="0" tIns="0" rIns="0" bIns="0" anchor="t">
             <a:noAutofit/>
           </a:bodyPr>
-          <a:lstStyle xmlns:a="http://schemas.openxmlformats.org/drawingml/2006/main">
+          <a:lstStyle>
             <a:defPPr algn="l">
               <a:defRPr sz="1800">
                 <a:solidFill>
@@ -4873,7 +4619,7 @@
               </a:defRPr>
             </a:defPPr>
           </a:lstStyle>
-          <a:p xmlns:a="http://schemas.openxmlformats.org/drawingml/2006/main">
+          <a:p>
             <a:pPr algn="l">
               <a:buNone/>
               <a:defRPr sz="1800">
@@ -4902,36 +4648,36 @@
       <p:sp>
         <p:nvSpPr>
           <p:cNvPr id="5" name="quality-capture-note">
-            <a:extLst xmlns:a="http://schemas.openxmlformats.org/drawingml/2006/main">
+            <a:extLst>
               <a:ext uri="{FF2B5EF4-FFF2-40B4-BE49-F238E27FC236}">
                 <a16:creationId xmlns:a16="http://schemas.microsoft.com/office/drawing/2014/main" id="{387341A9-151A-4D80-A63E-F48255D3D4E5}"/>
               </a:ext>
             </a:extLst>
           </p:cNvPr>
           <p:cNvSpPr>
-            <a:spLocks xmlns:a="http://schemas.openxmlformats.org/drawingml/2006/main" noGrp="1"/>
+            <a:spLocks noGrp="1"/>
           </p:cNvSpPr>
           <p:nvPr/>
         </p:nvSpPr>
         <p:spPr>
-          <a:xfrm xmlns:a="http://schemas.openxmlformats.org/drawingml/2006/main">
+          <a:xfrm>
             <a:off x="7334250" y="5143500"/>
             <a:ext cx="4000500" cy="533400"/>
           </a:xfrm>
-          <a:prstGeom xmlns:a="http://schemas.openxmlformats.org/drawingml/2006/main" prst="rect">
+          <a:prstGeom prst="rect">
             <a:avLst/>
           </a:prstGeom>
-          <a:noFill xmlns:a="http://schemas.openxmlformats.org/drawingml/2006/main"/>
-          <a:ln xmlns:a="http://schemas.openxmlformats.org/drawingml/2006/main" w="0">
+          <a:noFill/>
+          <a:ln w="0">
             <a:noFill/>
             <a:prstDash val="solid"/>
           </a:ln>
         </p:spPr>
         <p:txBody>
-          <a:bodyPr xmlns:a="http://schemas.openxmlformats.org/drawingml/2006/main" lIns="0" tIns="0" rIns="0" bIns="0" anchor="t">
+          <a:bodyPr lIns="0" tIns="0" rIns="0" bIns="0" anchor="t">
             <a:noAutofit/>
           </a:bodyPr>
-          <a:lstStyle xmlns:a="http://schemas.openxmlformats.org/drawingml/2006/main">
+          <a:lstStyle>
             <a:defPPr algn="l">
               <a:defRPr sz="1650" b="1">
                 <a:solidFill>
@@ -4943,7 +4689,7 @@
               </a:defRPr>
             </a:defPPr>
           </a:lstStyle>
-          <a:p xmlns:a="http://schemas.openxmlformats.org/drawingml/2006/main">
+          <a:p>
             <a:pPr algn="l">
               <a:buNone/>
               <a:defRPr sz="1650" b="1">
@@ -4976,17 +4722,21 @@
       </p:ext>
     </p:extLst>
   </p:cSld>
+  <p:clrMapOvr>
+    <a:masterClrMapping/>
+  </p:clrMapOvr>
 </p:sld>
 </file>
 
 <file path=ppt/slides/slide5.xml><?xml version="1.0" encoding="utf-8"?>
-<p:sld xmlns:p="http://schemas.openxmlformats.org/presentationml/2006/main">
+<p:sld xmlns:a="http://schemas.openxmlformats.org/drawingml/2006/main" xmlns:r="http://schemas.openxmlformats.org/officeDocument/2006/relationships" xmlns:p="http://schemas.openxmlformats.org/presentationml/2006/main">
   <p:cSld>
     <p:bg>
       <p:bgPr>
-        <a:solidFill xmlns:a="http://schemas.openxmlformats.org/drawingml/2006/main">
+        <a:solidFill>
           <a:srgbClr val="FFFFFF"/>
         </a:solidFill>
+        <a:effectLst/>
       </p:bgPr>
     </p:bg>
     <p:spTree>
@@ -4996,41 +4746,46 @@
         <p:nvPr/>
       </p:nvGrpSpPr>
       <p:grpSpPr>
-        <a:xfrm xmlns:a="http://schemas.openxmlformats.org/drawingml/2006/main"/>
+        <a:xfrm>
+          <a:off x="0" y="0"/>
+          <a:ext cx="0" cy="0"/>
+          <a:chOff x="0" y="0"/>
+          <a:chExt cx="0" cy="0"/>
+        </a:xfrm>
       </p:grpSpPr>
       <p:sp>
         <p:nvSpPr>
           <p:cNvPr id="6" name="slide-title">
-            <a:extLst xmlns:a="http://schemas.openxmlformats.org/drawingml/2006/main">
+            <a:extLst>
               <a:ext uri="{FF2B5EF4-FFF2-40B4-BE49-F238E27FC236}">
                 <a16:creationId xmlns:a16="http://schemas.microsoft.com/office/drawing/2014/main" id="{88B3B0DF-53C5-4106-A68F-B12469C71407}"/>
               </a:ext>
             </a:extLst>
           </p:cNvPr>
           <p:cNvSpPr>
-            <a:spLocks xmlns:a="http://schemas.openxmlformats.org/drawingml/2006/main" noGrp="1"/>
+            <a:spLocks noGrp="1"/>
           </p:cNvSpPr>
           <p:nvPr/>
         </p:nvSpPr>
         <p:spPr>
-          <a:xfrm xmlns:a="http://schemas.openxmlformats.org/drawingml/2006/main">
+          <a:xfrm>
             <a:off x="685800" y="457200"/>
             <a:ext cx="10820400" cy="590550"/>
           </a:xfrm>
-          <a:prstGeom xmlns:a="http://schemas.openxmlformats.org/drawingml/2006/main" prst="rect">
+          <a:prstGeom prst="rect">
             <a:avLst/>
           </a:prstGeom>
-          <a:noFill xmlns:a="http://schemas.openxmlformats.org/drawingml/2006/main"/>
-          <a:ln xmlns:a="http://schemas.openxmlformats.org/drawingml/2006/main" w="0">
+          <a:noFill/>
+          <a:ln w="0">
             <a:noFill/>
             <a:prstDash val="solid"/>
           </a:ln>
         </p:spPr>
         <p:txBody>
-          <a:bodyPr xmlns:a="http://schemas.openxmlformats.org/drawingml/2006/main" lIns="0" tIns="0" rIns="0" bIns="0" anchor="t">
+          <a:bodyPr lIns="0" tIns="0" rIns="0" bIns="0" anchor="t">
             <a:noAutofit/>
           </a:bodyPr>
-          <a:lstStyle xmlns:a="http://schemas.openxmlformats.org/drawingml/2006/main">
+          <a:lstStyle>
             <a:defPPr algn="l">
               <a:defRPr sz="3450" b="1">
                 <a:solidFill>
@@ -5042,7 +4797,7 @@
               </a:defRPr>
             </a:defPPr>
           </a:lstStyle>
-          <a:p xmlns:a="http://schemas.openxmlformats.org/drawingml/2006/main">
+          <a:p>
             <a:pPr algn="l">
               <a:buNone/>
               <a:defRPr sz="3450" b="1">
@@ -5071,36 +4826,36 @@
       <p:sp>
         <p:nvSpPr>
           <p:cNvPr id="2" name="linux-summary">
-            <a:extLst xmlns:a="http://schemas.openxmlformats.org/drawingml/2006/main">
+            <a:extLst>
               <a:ext uri="{FF2B5EF4-FFF2-40B4-BE49-F238E27FC236}">
                 <a16:creationId xmlns:a16="http://schemas.microsoft.com/office/drawing/2014/main" id="{BC20912C-5B56-4B9D-8C75-6A6E0994C4AF}"/>
               </a:ext>
             </a:extLst>
           </p:cNvPr>
           <p:cNvSpPr>
-            <a:spLocks xmlns:a="http://schemas.openxmlformats.org/drawingml/2006/main" noGrp="1"/>
+            <a:spLocks noGrp="1"/>
           </p:cNvSpPr>
           <p:nvPr/>
         </p:nvSpPr>
         <p:spPr>
-          <a:xfrm xmlns:a="http://schemas.openxmlformats.org/drawingml/2006/main">
+          <a:xfrm>
             <a:off x="781050" y="1581150"/>
             <a:ext cx="10334625" cy="685800"/>
           </a:xfrm>
-          <a:prstGeom xmlns:a="http://schemas.openxmlformats.org/drawingml/2006/main" prst="rect">
+          <a:prstGeom prst="rect">
             <a:avLst/>
           </a:prstGeom>
-          <a:noFill xmlns:a="http://schemas.openxmlformats.org/drawingml/2006/main"/>
-          <a:ln xmlns:a="http://schemas.openxmlformats.org/drawingml/2006/main" w="0">
+          <a:noFill/>
+          <a:ln w="0">
             <a:noFill/>
             <a:prstDash val="solid"/>
           </a:ln>
         </p:spPr>
         <p:txBody>
-          <a:bodyPr xmlns:a="http://schemas.openxmlformats.org/drawingml/2006/main" lIns="0" tIns="0" rIns="0" bIns="0" anchor="t">
+          <a:bodyPr lIns="0" tIns="0" rIns="0" bIns="0" anchor="t">
             <a:noAutofit/>
           </a:bodyPr>
-          <a:lstStyle xmlns:a="http://schemas.openxmlformats.org/drawingml/2006/main">
+          <a:lstStyle>
             <a:defPPr algn="l">
               <a:defRPr sz="2325" b="1">
                 <a:solidFill>
@@ -5112,7 +4867,7 @@
               </a:defRPr>
             </a:defPPr>
           </a:lstStyle>
-          <a:p xmlns:a="http://schemas.openxmlformats.org/drawingml/2006/main">
+          <a:p>
             <a:pPr algn="l">
               <a:buNone/>
               <a:defRPr sz="2325" b="1">
@@ -5141,36 +4896,36 @@
       <p:sp>
         <p:nvSpPr>
           <p:cNvPr id="3" name="docker-facts">
-            <a:extLst xmlns:a="http://schemas.openxmlformats.org/drawingml/2006/main">
+            <a:extLst>
               <a:ext uri="{FF2B5EF4-FFF2-40B4-BE49-F238E27FC236}">
                 <a16:creationId xmlns:a16="http://schemas.microsoft.com/office/drawing/2014/main" id="{B046478C-3BED-417D-9F07-F648B25C0273}"/>
               </a:ext>
             </a:extLst>
           </p:cNvPr>
           <p:cNvSpPr>
-            <a:spLocks xmlns:a="http://schemas.openxmlformats.org/drawingml/2006/main" noGrp="1"/>
+            <a:spLocks noGrp="1"/>
           </p:cNvSpPr>
           <p:nvPr/>
         </p:nvSpPr>
         <p:spPr>
-          <a:xfrm xmlns:a="http://schemas.openxmlformats.org/drawingml/2006/main">
+          <a:xfrm>
             <a:off x="781050" y="2714625"/>
             <a:ext cx="5048250" cy="2400300"/>
           </a:xfrm>
-          <a:prstGeom xmlns:a="http://schemas.openxmlformats.org/drawingml/2006/main" prst="rect">
+          <a:prstGeom prst="rect">
             <a:avLst/>
           </a:prstGeom>
-          <a:noFill xmlns:a="http://schemas.openxmlformats.org/drawingml/2006/main"/>
-          <a:ln xmlns:a="http://schemas.openxmlformats.org/drawingml/2006/main" w="0">
+          <a:noFill/>
+          <a:ln w="0">
             <a:noFill/>
             <a:prstDash val="solid"/>
           </a:ln>
         </p:spPr>
         <p:txBody>
-          <a:bodyPr xmlns:a="http://schemas.openxmlformats.org/drawingml/2006/main" lIns="0" tIns="0" rIns="0" bIns="0" anchor="t">
+          <a:bodyPr lIns="0" tIns="0" rIns="0" bIns="0" anchor="t">
             <a:noAutofit/>
           </a:bodyPr>
-          <a:lstStyle xmlns:a="http://schemas.openxmlformats.org/drawingml/2006/main">
+          <a:lstStyle>
             <a:defPPr algn="l">
               <a:defRPr sz="1875">
                 <a:solidFill>
@@ -5182,7 +4937,7 @@
               </a:defRPr>
             </a:defPPr>
           </a:lstStyle>
-          <a:p xmlns:a="http://schemas.openxmlformats.org/drawingml/2006/main">
+          <a:p>
             <a:pPr algn="l">
               <a:buNone/>
               <a:defRPr sz="1875">
@@ -5211,36 +4966,36 @@
       <p:sp>
         <p:nvSpPr>
           <p:cNvPr id="4" name="linux-completion">
-            <a:extLst xmlns:a="http://schemas.openxmlformats.org/drawingml/2006/main">
+            <a:extLst>
               <a:ext uri="{FF2B5EF4-FFF2-40B4-BE49-F238E27FC236}">
                 <a16:creationId xmlns:a16="http://schemas.microsoft.com/office/drawing/2014/main" id="{49EFBE5B-D1F8-4715-A237-4AEE4E64E9DC}"/>
               </a:ext>
             </a:extLst>
           </p:cNvPr>
           <p:cNvSpPr>
-            <a:spLocks xmlns:a="http://schemas.openxmlformats.org/drawingml/2006/main" noGrp="1"/>
+            <a:spLocks noGrp="1"/>
           </p:cNvSpPr>
           <p:nvPr/>
         </p:nvSpPr>
         <p:spPr>
-          <a:xfrm xmlns:a="http://schemas.openxmlformats.org/drawingml/2006/main">
+          <a:xfrm>
             <a:off x="6572250" y="2714625"/>
             <a:ext cx="4762500" cy="1447800"/>
           </a:xfrm>
-          <a:prstGeom xmlns:a="http://schemas.openxmlformats.org/drawingml/2006/main" prst="rect">
+          <a:prstGeom prst="rect">
             <a:avLst/>
           </a:prstGeom>
-          <a:noFill xmlns:a="http://schemas.openxmlformats.org/drawingml/2006/main"/>
-          <a:ln xmlns:a="http://schemas.openxmlformats.org/drawingml/2006/main" w="0">
+          <a:noFill/>
+          <a:ln w="0">
             <a:noFill/>
             <a:prstDash val="solid"/>
           </a:ln>
         </p:spPr>
         <p:txBody>
-          <a:bodyPr xmlns:a="http://schemas.openxmlformats.org/drawingml/2006/main" lIns="0" tIns="0" rIns="0" bIns="0" anchor="t">
+          <a:bodyPr lIns="0" tIns="0" rIns="0" bIns="0" anchor="t">
             <a:noAutofit/>
           </a:bodyPr>
-          <a:lstStyle xmlns:a="http://schemas.openxmlformats.org/drawingml/2006/main">
+          <a:lstStyle>
             <a:defPPr algn="l">
               <a:defRPr sz="1875">
                 <a:solidFill>
@@ -5252,7 +5007,7 @@
               </a:defRPr>
             </a:defPPr>
           </a:lstStyle>
-          <a:p xmlns:a="http://schemas.openxmlformats.org/drawingml/2006/main">
+          <a:p>
             <a:pPr algn="l">
               <a:buNone/>
               <a:defRPr sz="1875">
@@ -5281,36 +5036,36 @@
       <p:sp>
         <p:nvSpPr>
           <p:cNvPr id="5" name="compose-screenshot">
-            <a:extLst xmlns:a="http://schemas.openxmlformats.org/drawingml/2006/main">
+            <a:extLst>
               <a:ext uri="{FF2B5EF4-FFF2-40B4-BE49-F238E27FC236}">
                 <a16:creationId xmlns:a16="http://schemas.microsoft.com/office/drawing/2014/main" id="{D06B5AC2-8B99-41AF-94CA-80606FD093E8}"/>
               </a:ext>
             </a:extLst>
           </p:cNvPr>
           <p:cNvSpPr>
-            <a:spLocks xmlns:a="http://schemas.openxmlformats.org/drawingml/2006/main" noGrp="1"/>
+            <a:spLocks noGrp="1"/>
           </p:cNvSpPr>
           <p:nvPr/>
         </p:nvSpPr>
         <p:spPr>
-          <a:xfrm xmlns:a="http://schemas.openxmlformats.org/drawingml/2006/main">
+          <a:xfrm>
             <a:off x="6572250" y="4667250"/>
             <a:ext cx="4762500" cy="990600"/>
           </a:xfrm>
-          <a:prstGeom xmlns:a="http://schemas.openxmlformats.org/drawingml/2006/main" prst="rect">
+          <a:prstGeom prst="rect">
             <a:avLst/>
           </a:prstGeom>
-          <a:noFill xmlns:a="http://schemas.openxmlformats.org/drawingml/2006/main"/>
-          <a:ln xmlns:a="http://schemas.openxmlformats.org/drawingml/2006/main" w="0">
+          <a:noFill/>
+          <a:ln w="0">
             <a:noFill/>
             <a:prstDash val="solid"/>
           </a:ln>
         </p:spPr>
         <p:txBody>
-          <a:bodyPr xmlns:a="http://schemas.openxmlformats.org/drawingml/2006/main" lIns="0" tIns="0" rIns="0" bIns="0" anchor="t">
+          <a:bodyPr lIns="0" tIns="0" rIns="0" bIns="0" anchor="t">
             <a:noAutofit/>
           </a:bodyPr>
-          <a:lstStyle xmlns:a="http://schemas.openxmlformats.org/drawingml/2006/main">
+          <a:lstStyle>
             <a:defPPr algn="l">
               <a:defRPr sz="1650" b="1">
                 <a:solidFill>
@@ -5322,7 +5077,7 @@
               </a:defRPr>
             </a:defPPr>
           </a:lstStyle>
-          <a:p xmlns:a="http://schemas.openxmlformats.org/drawingml/2006/main">
+          <a:p>
             <a:pPr algn="l">
               <a:buNone/>
               <a:defRPr sz="1650" b="1">
@@ -5346,7 +5101,7 @@
               <a:t>Browser evidence: screenshot 14</a:t>
             </a:r>
           </a:p>
-          <a:p xmlns:a="http://schemas.openxmlformats.org/drawingml/2006/main">
+          <a:p>
             <a:pPr algn="l">
               <a:buNone/>
               <a:defRPr sz="1650" b="1">
@@ -5379,17 +5134,21 @@
       </p:ext>
     </p:extLst>
   </p:cSld>
+  <p:clrMapOvr>
+    <a:masterClrMapping/>
+  </p:clrMapOvr>
 </p:sld>
 </file>
 
 <file path=ppt/slides/slide6.xml><?xml version="1.0" encoding="utf-8"?>
-<p:sld xmlns:p="http://schemas.openxmlformats.org/presentationml/2006/main">
+<p:sld xmlns:a="http://schemas.openxmlformats.org/drawingml/2006/main" xmlns:r="http://schemas.openxmlformats.org/officeDocument/2006/relationships" xmlns:p="http://schemas.openxmlformats.org/presentationml/2006/main">
   <p:cSld>
     <p:bg>
       <p:bgPr>
-        <a:solidFill xmlns:a="http://schemas.openxmlformats.org/drawingml/2006/main">
+        <a:solidFill>
           <a:srgbClr val="F4F7FA"/>
         </a:solidFill>
+        <a:effectLst/>
       </p:bgPr>
     </p:bg>
     <p:spTree>
@@ -5399,41 +5158,46 @@
         <p:nvPr/>
       </p:nvGrpSpPr>
       <p:grpSpPr>
-        <a:xfrm xmlns:a="http://schemas.openxmlformats.org/drawingml/2006/main"/>
+        <a:xfrm>
+          <a:off x="0" y="0"/>
+          <a:ext cx="0" cy="0"/>
+          <a:chOff x="0" y="0"/>
+          <a:chExt cx="0" cy="0"/>
+        </a:xfrm>
       </p:grpSpPr>
       <p:sp>
         <p:nvSpPr>
           <p:cNvPr id="6" name="slide-title">
-            <a:extLst xmlns:a="http://schemas.openxmlformats.org/drawingml/2006/main">
+            <a:extLst>
               <a:ext uri="{FF2B5EF4-FFF2-40B4-BE49-F238E27FC236}">
                 <a16:creationId xmlns:a16="http://schemas.microsoft.com/office/drawing/2014/main" id="{D1E888A3-D5C5-405A-8994-7CC1D5D5C239}"/>
               </a:ext>
             </a:extLst>
           </p:cNvPr>
           <p:cNvSpPr>
-            <a:spLocks xmlns:a="http://schemas.openxmlformats.org/drawingml/2006/main" noGrp="1"/>
+            <a:spLocks noGrp="1"/>
           </p:cNvSpPr>
           <p:nvPr/>
         </p:nvSpPr>
         <p:spPr>
-          <a:xfrm xmlns:a="http://schemas.openxmlformats.org/drawingml/2006/main">
+          <a:xfrm>
             <a:off x="685800" y="457200"/>
             <a:ext cx="10820400" cy="590550"/>
           </a:xfrm>
-          <a:prstGeom xmlns:a="http://schemas.openxmlformats.org/drawingml/2006/main" prst="rect">
+          <a:prstGeom prst="rect">
             <a:avLst/>
           </a:prstGeom>
-          <a:noFill xmlns:a="http://schemas.openxmlformats.org/drawingml/2006/main"/>
-          <a:ln xmlns:a="http://schemas.openxmlformats.org/drawingml/2006/main" w="0">
+          <a:noFill/>
+          <a:ln w="0">
             <a:noFill/>
             <a:prstDash val="solid"/>
           </a:ln>
         </p:spPr>
         <p:txBody>
-          <a:bodyPr xmlns:a="http://schemas.openxmlformats.org/drawingml/2006/main" lIns="0" tIns="0" rIns="0" bIns="0" anchor="t">
+          <a:bodyPr lIns="0" tIns="0" rIns="0" bIns="0" anchor="t">
             <a:noAutofit/>
           </a:bodyPr>
-          <a:lstStyle xmlns:a="http://schemas.openxmlformats.org/drawingml/2006/main">
+          <a:lstStyle>
             <a:defPPr algn="l">
               <a:defRPr sz="3450" b="1">
                 <a:solidFill>
@@ -5445,7 +5209,7 @@
               </a:defRPr>
             </a:defPPr>
           </a:lstStyle>
-          <a:p xmlns:a="http://schemas.openxmlformats.org/drawingml/2006/main">
+          <a:p>
             <a:pPr algn="l">
               <a:buNone/>
               <a:defRPr sz="3450" b="1">
@@ -5474,36 +5238,36 @@
       <p:sp>
         <p:nvSpPr>
           <p:cNvPr id="2" name="k8s-summary">
-            <a:extLst xmlns:a="http://schemas.openxmlformats.org/drawingml/2006/main">
+            <a:extLst>
               <a:ext uri="{FF2B5EF4-FFF2-40B4-BE49-F238E27FC236}">
                 <a16:creationId xmlns:a16="http://schemas.microsoft.com/office/drawing/2014/main" id="{1C859776-CAB0-4472-BBB8-614B98FAAEC8}"/>
               </a:ext>
             </a:extLst>
           </p:cNvPr>
           <p:cNvSpPr>
-            <a:spLocks xmlns:a="http://schemas.openxmlformats.org/drawingml/2006/main" noGrp="1"/>
+            <a:spLocks noGrp="1"/>
           </p:cNvSpPr>
           <p:nvPr/>
         </p:nvSpPr>
         <p:spPr>
-          <a:xfrm xmlns:a="http://schemas.openxmlformats.org/drawingml/2006/main">
+          <a:xfrm>
             <a:off x="685800" y="1428750"/>
             <a:ext cx="4524375" cy="685800"/>
           </a:xfrm>
-          <a:prstGeom xmlns:a="http://schemas.openxmlformats.org/drawingml/2006/main" prst="rect">
+          <a:prstGeom prst="rect">
             <a:avLst/>
           </a:prstGeom>
-          <a:noFill xmlns:a="http://schemas.openxmlformats.org/drawingml/2006/main"/>
-          <a:ln xmlns:a="http://schemas.openxmlformats.org/drawingml/2006/main" w="0">
+          <a:noFill/>
+          <a:ln w="0">
             <a:noFill/>
             <a:prstDash val="solid"/>
           </a:ln>
         </p:spPr>
         <p:txBody>
-          <a:bodyPr xmlns:a="http://schemas.openxmlformats.org/drawingml/2006/main" lIns="0" tIns="0" rIns="0" bIns="0" anchor="t">
+          <a:bodyPr lIns="0" tIns="0" rIns="0" bIns="0" anchor="t">
             <a:noAutofit/>
           </a:bodyPr>
-          <a:lstStyle xmlns:a="http://schemas.openxmlformats.org/drawingml/2006/main">
+          <a:lstStyle>
             <a:defPPr algn="l">
               <a:defRPr sz="2325" b="1">
                 <a:solidFill>
@@ -5515,7 +5279,7 @@
               </a:defRPr>
             </a:defPPr>
           </a:lstStyle>
-          <a:p xmlns:a="http://schemas.openxmlformats.org/drawingml/2006/main">
+          <a:p>
             <a:pPr algn="l">
               <a:buNone/>
               <a:defRPr sz="2325" b="1">
@@ -5544,36 +5308,36 @@
       <p:sp>
         <p:nvSpPr>
           <p:cNvPr id="3" name="k8s-details">
-            <a:extLst xmlns:a="http://schemas.openxmlformats.org/drawingml/2006/main">
+            <a:extLst>
               <a:ext uri="{FF2B5EF4-FFF2-40B4-BE49-F238E27FC236}">
                 <a16:creationId xmlns:a16="http://schemas.microsoft.com/office/drawing/2014/main" id="{C2175F57-2BE8-41F1-BF34-656251AF1548}"/>
               </a:ext>
             </a:extLst>
           </p:cNvPr>
           <p:cNvSpPr>
-            <a:spLocks xmlns:a="http://schemas.openxmlformats.org/drawingml/2006/main" noGrp="1"/>
+            <a:spLocks noGrp="1"/>
           </p:cNvSpPr>
           <p:nvPr/>
         </p:nvSpPr>
         <p:spPr>
-          <a:xfrm xmlns:a="http://schemas.openxmlformats.org/drawingml/2006/main">
+          <a:xfrm>
             <a:off x="685800" y="2400300"/>
             <a:ext cx="4333875" cy="2171700"/>
           </a:xfrm>
-          <a:prstGeom xmlns:a="http://schemas.openxmlformats.org/drawingml/2006/main" prst="rect">
+          <a:prstGeom prst="rect">
             <a:avLst/>
           </a:prstGeom>
-          <a:noFill xmlns:a="http://schemas.openxmlformats.org/drawingml/2006/main"/>
-          <a:ln xmlns:a="http://schemas.openxmlformats.org/drawingml/2006/main" w="0">
+          <a:noFill/>
+          <a:ln w="0">
             <a:noFill/>
             <a:prstDash val="solid"/>
           </a:ln>
         </p:spPr>
         <p:txBody>
-          <a:bodyPr xmlns:a="http://schemas.openxmlformats.org/drawingml/2006/main" lIns="0" tIns="0" rIns="0" bIns="0" anchor="t">
+          <a:bodyPr lIns="0" tIns="0" rIns="0" bIns="0" anchor="t">
             <a:noAutofit/>
           </a:bodyPr>
-          <a:lstStyle xmlns:a="http://schemas.openxmlformats.org/drawingml/2006/main">
+          <a:lstStyle>
             <a:defPPr algn="l">
               <a:defRPr sz="1875">
                 <a:solidFill>
@@ -5585,7 +5349,7 @@
               </a:defRPr>
             </a:defPPr>
           </a:lstStyle>
-          <a:p xmlns:a="http://schemas.openxmlformats.org/drawingml/2006/main">
+          <a:p>
             <a:pPr algn="l">
               <a:buNone/>
               <a:defRPr sz="1875">
@@ -5609,7 +5373,7 @@
               <a:t>Two backend replicas</a:t>
             </a:r>
           </a:p>
-          <a:p xmlns:a="http://schemas.openxmlformats.org/drawingml/2006/main">
+          <a:p>
             <a:pPr algn="l">
               <a:buNone/>
               <a:defRPr sz="1875">
@@ -5633,7 +5397,7 @@
               <a:t>Two frontend replicas</a:t>
             </a:r>
           </a:p>
-          <a:p xmlns:a="http://schemas.openxmlformats.org/drawingml/2006/main">
+          <a:p>
             <a:pPr algn="l">
               <a:buNone/>
               <a:defRPr sz="1875">
@@ -5657,7 +5421,7 @@
               <a:t>One PostgreSQL pod</a:t>
             </a:r>
           </a:p>
-          <a:p xmlns:a="http://schemas.openxmlformats.org/drawingml/2006/main">
+          <a:p>
             <a:pPr algn="l">
               <a:buNone/>
               <a:defRPr sz="1875">
@@ -5686,36 +5450,36 @@
       <p:sp>
         <p:nvSpPr>
           <p:cNvPr id="4" name="k8s-capture">
-            <a:extLst xmlns:a="http://schemas.openxmlformats.org/drawingml/2006/main">
+            <a:extLst>
               <a:ext uri="{FF2B5EF4-FFF2-40B4-BE49-F238E27FC236}">
                 <a16:creationId xmlns:a16="http://schemas.microsoft.com/office/drawing/2014/main" id="{E6B4547C-F31C-41D5-BBE0-FA77F54AA741}"/>
               </a:ext>
             </a:extLst>
           </p:cNvPr>
           <p:cNvSpPr>
-            <a:spLocks xmlns:a="http://schemas.openxmlformats.org/drawingml/2006/main" noGrp="1"/>
+            <a:spLocks noGrp="1"/>
           </p:cNvSpPr>
           <p:nvPr/>
         </p:nvSpPr>
         <p:spPr>
-          <a:xfrm xmlns:a="http://schemas.openxmlformats.org/drawingml/2006/main">
+          <a:xfrm>
             <a:off x="685800" y="4972050"/>
             <a:ext cx="4429125" cy="857250"/>
           </a:xfrm>
-          <a:prstGeom xmlns:a="http://schemas.openxmlformats.org/drawingml/2006/main" prst="rect">
+          <a:prstGeom prst="rect">
             <a:avLst/>
           </a:prstGeom>
-          <a:noFill xmlns:a="http://schemas.openxmlformats.org/drawingml/2006/main"/>
-          <a:ln xmlns:a="http://schemas.openxmlformats.org/drawingml/2006/main" w="0">
+          <a:noFill/>
+          <a:ln w="0">
             <a:noFill/>
             <a:prstDash val="solid"/>
           </a:ln>
         </p:spPr>
         <p:txBody>
-          <a:bodyPr xmlns:a="http://schemas.openxmlformats.org/drawingml/2006/main" lIns="0" tIns="0" rIns="0" bIns="0" anchor="t">
+          <a:bodyPr lIns="0" tIns="0" rIns="0" bIns="0" anchor="t">
             <a:noAutofit/>
           </a:bodyPr>
-          <a:lstStyle xmlns:a="http://schemas.openxmlformats.org/drawingml/2006/main">
+          <a:lstStyle>
             <a:defPPr algn="l">
               <a:defRPr sz="1575" b="1">
                 <a:solidFill>
@@ -5727,7 +5491,7 @@
               </a:defRPr>
             </a:defPPr>
           </a:lstStyle>
-          <a:p xmlns:a="http://schemas.openxmlformats.org/drawingml/2006/main">
+          <a:p>
             <a:pPr algn="l">
               <a:buNone/>
               <a:defRPr sz="1575" b="1">
@@ -5755,28 +5519,28 @@
       </p:sp>
       <p:pic>
         <p:nvPicPr>
-          <p:cNvPr id="5" name="">
-            <a:extLst xmlns:a="http://schemas.openxmlformats.org/drawingml/2006/main">
+          <p:cNvPr id="5" name="Picture 4">
+            <a:extLst>
               <a:ext uri="{FF2B5EF4-FFF2-40B4-BE49-F238E27FC236}">
                 <a16:creationId xmlns:a16="http://schemas.microsoft.com/office/drawing/2014/main" id="{EAA1AD99-E11A-493C-8170-41438A3901F1}"/>
               </a:ext>
             </a:extLst>
           </p:cNvPr>
           <p:cNvPicPr>
-            <a:picLocks xmlns:a="http://schemas.openxmlformats.org/drawingml/2006/main" noChangeAspect="1"/>
+            <a:picLocks noChangeAspect="1"/>
           </p:cNvPicPr>
           <p:nvPr/>
         </p:nvPicPr>
         <p:blipFill>
-          <a:blip xmlns:r="http://schemas.openxmlformats.org/officeDocument/2006/relationships" xmlns:a="http://schemas.openxmlformats.org/drawingml/2006/main" r:embed="Rd587d8842e95445c"/>
-          <a:stretch xmlns:a="http://schemas.openxmlformats.org/drawingml/2006/main"/>
+          <a:blip r:embed="rId3"/>
+          <a:stretch/>
         </p:blipFill>
         <p:spPr>
-          <a:xfrm xmlns:a="http://schemas.openxmlformats.org/drawingml/2006/main">
+          <a:xfrm>
             <a:off x="5410200" y="1498071"/>
             <a:ext cx="6096000" cy="4233333"/>
           </a:xfrm>
-          <a:prstGeom xmlns:a="http://schemas.openxmlformats.org/drawingml/2006/main" prst="rect">
+          <a:prstGeom prst="rect">
             <a:avLst/>
           </a:prstGeom>
         </p:spPr>
@@ -5788,17 +5552,21 @@
       </p:ext>
     </p:extLst>
   </p:cSld>
+  <p:clrMapOvr>
+    <a:masterClrMapping/>
+  </p:clrMapOvr>
 </p:sld>
 </file>
 
 <file path=ppt/slides/slide7.xml><?xml version="1.0" encoding="utf-8"?>
-<p:sld xmlns:p="http://schemas.openxmlformats.org/presentationml/2006/main">
+<p:sld xmlns:a="http://schemas.openxmlformats.org/drawingml/2006/main" xmlns:r="http://schemas.openxmlformats.org/officeDocument/2006/relationships" xmlns:p="http://schemas.openxmlformats.org/presentationml/2006/main">
   <p:cSld>
     <p:bg>
       <p:bgPr>
-        <a:solidFill xmlns:a="http://schemas.openxmlformats.org/drawingml/2006/main">
+        <a:solidFill>
           <a:srgbClr val="FFFFFF"/>
         </a:solidFill>
+        <a:effectLst/>
       </p:bgPr>
     </p:bg>
     <p:spTree>
@@ -5808,41 +5576,46 @@
         <p:nvPr/>
       </p:nvGrpSpPr>
       <p:grpSpPr>
-        <a:xfrm xmlns:a="http://schemas.openxmlformats.org/drawingml/2006/main"/>
+        <a:xfrm>
+          <a:off x="0" y="0"/>
+          <a:ext cx="0" cy="0"/>
+          <a:chOff x="0" y="0"/>
+          <a:chExt cx="0" cy="0"/>
+        </a:xfrm>
       </p:grpSpPr>
       <p:sp>
         <p:nvSpPr>
           <p:cNvPr id="5" name="slide-title">
-            <a:extLst xmlns:a="http://schemas.openxmlformats.org/drawingml/2006/main">
+            <a:extLst>
               <a:ext uri="{FF2B5EF4-FFF2-40B4-BE49-F238E27FC236}">
                 <a16:creationId xmlns:a16="http://schemas.microsoft.com/office/drawing/2014/main" id="{835C925D-0DDB-420F-A784-D79CCDB28989}"/>
               </a:ext>
             </a:extLst>
           </p:cNvPr>
           <p:cNvSpPr>
-            <a:spLocks xmlns:a="http://schemas.openxmlformats.org/drawingml/2006/main" noGrp="1"/>
+            <a:spLocks noGrp="1"/>
           </p:cNvSpPr>
           <p:nvPr/>
         </p:nvSpPr>
         <p:spPr>
-          <a:xfrm xmlns:a="http://schemas.openxmlformats.org/drawingml/2006/main">
+          <a:xfrm>
             <a:off x="685800" y="457200"/>
             <a:ext cx="10820400" cy="590550"/>
           </a:xfrm>
-          <a:prstGeom xmlns:a="http://schemas.openxmlformats.org/drawingml/2006/main" prst="rect">
+          <a:prstGeom prst="rect">
             <a:avLst/>
           </a:prstGeom>
-          <a:noFill xmlns:a="http://schemas.openxmlformats.org/drawingml/2006/main"/>
-          <a:ln xmlns:a="http://schemas.openxmlformats.org/drawingml/2006/main" w="0">
+          <a:noFill/>
+          <a:ln w="0">
             <a:noFill/>
             <a:prstDash val="solid"/>
           </a:ln>
         </p:spPr>
         <p:txBody>
-          <a:bodyPr xmlns:a="http://schemas.openxmlformats.org/drawingml/2006/main" lIns="0" tIns="0" rIns="0" bIns="0" anchor="t">
+          <a:bodyPr lIns="0" tIns="0" rIns="0" bIns="0" anchor="t">
             <a:noAutofit/>
           </a:bodyPr>
-          <a:lstStyle xmlns:a="http://schemas.openxmlformats.org/drawingml/2006/main">
+          <a:lstStyle>
             <a:defPPr algn="l">
               <a:defRPr sz="3450" b="1">
                 <a:solidFill>
@@ -5854,7 +5627,7 @@
               </a:defRPr>
             </a:defPPr>
           </a:lstStyle>
-          <a:p xmlns:a="http://schemas.openxmlformats.org/drawingml/2006/main">
+          <a:p>
             <a:pPr algn="l">
               <a:buNone/>
               <a:defRPr sz="3450" b="1">
@@ -5882,56 +5655,56 @@
       </p:sp>
       <p:pic>
         <p:nvPicPr>
-          <p:cNvPr id="2" name="">
-            <a:extLst xmlns:a="http://schemas.openxmlformats.org/drawingml/2006/main">
+          <p:cNvPr id="2" name="Picture 1">
+            <a:extLst>
               <a:ext uri="{FF2B5EF4-FFF2-40B4-BE49-F238E27FC236}">
                 <a16:creationId xmlns:a16="http://schemas.microsoft.com/office/drawing/2014/main" id="{B4388E93-8130-479F-AC0C-888E8023B963}"/>
               </a:ext>
             </a:extLst>
           </p:cNvPr>
           <p:cNvPicPr>
-            <a:picLocks xmlns:a="http://schemas.openxmlformats.org/drawingml/2006/main" noChangeAspect="1"/>
+            <a:picLocks noChangeAspect="1"/>
           </p:cNvPicPr>
           <p:nvPr/>
         </p:nvPicPr>
         <p:blipFill>
-          <a:blip xmlns:r="http://schemas.openxmlformats.org/officeDocument/2006/relationships" xmlns:a="http://schemas.openxmlformats.org/drawingml/2006/main" r:embed="R38d9511345ef4e3a"/>
-          <a:stretch xmlns:a="http://schemas.openxmlformats.org/drawingml/2006/main"/>
+          <a:blip r:embed="rId3"/>
+          <a:stretch/>
         </p:blipFill>
         <p:spPr>
-          <a:xfrm xmlns:a="http://schemas.openxmlformats.org/drawingml/2006/main">
+          <a:xfrm>
             <a:off x="916132" y="1428750"/>
             <a:ext cx="4682836" cy="3219450"/>
           </a:xfrm>
-          <a:prstGeom xmlns:a="http://schemas.openxmlformats.org/drawingml/2006/main" prst="rect">
+          <a:prstGeom prst="rect">
             <a:avLst/>
           </a:prstGeom>
         </p:spPr>
       </p:pic>
       <p:pic>
         <p:nvPicPr>
-          <p:cNvPr id="3" name="">
-            <a:extLst xmlns:a="http://schemas.openxmlformats.org/drawingml/2006/main">
+          <p:cNvPr id="3" name="Picture 2">
+            <a:extLst>
               <a:ext uri="{FF2B5EF4-FFF2-40B4-BE49-F238E27FC236}">
                 <a16:creationId xmlns:a16="http://schemas.microsoft.com/office/drawing/2014/main" id="{F13FF220-D7D3-4C2F-B93C-E9E3183E3FE6}"/>
               </a:ext>
             </a:extLst>
           </p:cNvPr>
           <p:cNvPicPr>
-            <a:picLocks xmlns:a="http://schemas.openxmlformats.org/drawingml/2006/main" noChangeAspect="1"/>
+            <a:picLocks noChangeAspect="1"/>
           </p:cNvPicPr>
           <p:nvPr/>
         </p:nvPicPr>
         <p:blipFill>
-          <a:blip xmlns:r="http://schemas.openxmlformats.org/officeDocument/2006/relationships" xmlns:a="http://schemas.openxmlformats.org/drawingml/2006/main" r:embed="R5cc81b14a7084549"/>
-          <a:stretch xmlns:a="http://schemas.openxmlformats.org/drawingml/2006/main"/>
+          <a:blip r:embed="rId4"/>
+          <a:stretch/>
         </p:blipFill>
         <p:spPr>
-          <a:xfrm xmlns:a="http://schemas.openxmlformats.org/drawingml/2006/main">
+          <a:xfrm>
             <a:off x="6593032" y="1428750"/>
             <a:ext cx="4682836" cy="3219450"/>
           </a:xfrm>
-          <a:prstGeom xmlns:a="http://schemas.openxmlformats.org/drawingml/2006/main" prst="rect">
+          <a:prstGeom prst="rect">
             <a:avLst/>
           </a:prstGeom>
         </p:spPr>
@@ -5939,36 +5712,36 @@
       <p:sp>
         <p:nvSpPr>
           <p:cNvPr id="4" name="observability-caption">
-            <a:extLst xmlns:a="http://schemas.openxmlformats.org/drawingml/2006/main">
+            <a:extLst>
               <a:ext uri="{FF2B5EF4-FFF2-40B4-BE49-F238E27FC236}">
                 <a16:creationId xmlns:a16="http://schemas.microsoft.com/office/drawing/2014/main" id="{F3B8F968-92C5-4602-B157-1833878ACCBF}"/>
               </a:ext>
             </a:extLst>
           </p:cNvPr>
           <p:cNvSpPr>
-            <a:spLocks xmlns:a="http://schemas.openxmlformats.org/drawingml/2006/main" noGrp="1"/>
+            <a:spLocks noGrp="1"/>
           </p:cNvSpPr>
           <p:nvPr/>
         </p:nvSpPr>
         <p:spPr>
-          <a:xfrm xmlns:a="http://schemas.openxmlformats.org/drawingml/2006/main">
+          <a:xfrm>
             <a:off x="971550" y="5219700"/>
             <a:ext cx="10191750" cy="666750"/>
           </a:xfrm>
-          <a:prstGeom xmlns:a="http://schemas.openxmlformats.org/drawingml/2006/main" prst="rect">
+          <a:prstGeom prst="rect">
             <a:avLst/>
           </a:prstGeom>
-          <a:noFill xmlns:a="http://schemas.openxmlformats.org/drawingml/2006/main"/>
-          <a:ln xmlns:a="http://schemas.openxmlformats.org/drawingml/2006/main" w="0">
+          <a:noFill/>
+          <a:ln w="0">
             <a:noFill/>
             <a:prstDash val="solid"/>
           </a:ln>
         </p:spPr>
         <p:txBody>
-          <a:bodyPr xmlns:a="http://schemas.openxmlformats.org/drawingml/2006/main" lIns="0" tIns="0" rIns="0" bIns="0" anchor="t">
+          <a:bodyPr lIns="0" tIns="0" rIns="0" bIns="0" anchor="t">
             <a:noAutofit/>
           </a:bodyPr>
-          <a:lstStyle xmlns:a="http://schemas.openxmlformats.org/drawingml/2006/main">
+          <a:lstStyle>
             <a:defPPr algn="ctr">
               <a:defRPr sz="1800" b="1">
                 <a:solidFill>
@@ -5980,7 +5753,7 @@
               </a:defRPr>
             </a:defPPr>
           </a:lstStyle>
-          <a:p xmlns:a="http://schemas.openxmlformats.org/drawingml/2006/main">
+          <a:p>
             <a:pPr algn="ctr">
               <a:buNone/>
               <a:defRPr sz="1800" b="1">
@@ -6013,17 +5786,21 @@
       </p:ext>
     </p:extLst>
   </p:cSld>
+  <p:clrMapOvr>
+    <a:masterClrMapping/>
+  </p:clrMapOvr>
 </p:sld>
 </file>
 
 <file path=ppt/slides/slide8.xml><?xml version="1.0" encoding="utf-8"?>
-<p:sld xmlns:p="http://schemas.openxmlformats.org/presentationml/2006/main">
+<p:sld xmlns:a="http://schemas.openxmlformats.org/drawingml/2006/main" xmlns:r="http://schemas.openxmlformats.org/officeDocument/2006/relationships" xmlns:p="http://schemas.openxmlformats.org/presentationml/2006/main">
   <p:cSld>
     <p:bg>
       <p:bgPr>
-        <a:solidFill xmlns:a="http://schemas.openxmlformats.org/drawingml/2006/main">
+        <a:solidFill>
           <a:srgbClr val="F4F7FA"/>
         </a:solidFill>
+        <a:effectLst/>
       </p:bgPr>
     </p:bg>
     <p:spTree>
@@ -6033,41 +5810,46 @@
         <p:nvPr/>
       </p:nvGrpSpPr>
       <p:grpSpPr>
-        <a:xfrm xmlns:a="http://schemas.openxmlformats.org/drawingml/2006/main"/>
+        <a:xfrm>
+          <a:off x="0" y="0"/>
+          <a:ext cx="0" cy="0"/>
+          <a:chOff x="0" y="0"/>
+          <a:chExt cx="0" cy="0"/>
+        </a:xfrm>
       </p:grpSpPr>
       <p:sp>
         <p:nvSpPr>
           <p:cNvPr id="6" name="slide-title">
-            <a:extLst xmlns:a="http://schemas.openxmlformats.org/drawingml/2006/main">
+            <a:extLst>
               <a:ext uri="{FF2B5EF4-FFF2-40B4-BE49-F238E27FC236}">
                 <a16:creationId xmlns:a16="http://schemas.microsoft.com/office/drawing/2014/main" id="{1206E4D2-3208-46A0-A165-B60F1BBB4BBD}"/>
               </a:ext>
             </a:extLst>
           </p:cNvPr>
           <p:cNvSpPr>
-            <a:spLocks xmlns:a="http://schemas.openxmlformats.org/drawingml/2006/main" noGrp="1"/>
+            <a:spLocks noGrp="1"/>
           </p:cNvSpPr>
           <p:nvPr/>
         </p:nvSpPr>
         <p:spPr>
-          <a:xfrm xmlns:a="http://schemas.openxmlformats.org/drawingml/2006/main">
+          <a:xfrm>
             <a:off x="685800" y="457200"/>
             <a:ext cx="10820400" cy="590550"/>
           </a:xfrm>
-          <a:prstGeom xmlns:a="http://schemas.openxmlformats.org/drawingml/2006/main" prst="rect">
+          <a:prstGeom prst="rect">
             <a:avLst/>
           </a:prstGeom>
-          <a:noFill xmlns:a="http://schemas.openxmlformats.org/drawingml/2006/main"/>
-          <a:ln xmlns:a="http://schemas.openxmlformats.org/drawingml/2006/main" w="0">
+          <a:noFill/>
+          <a:ln w="0">
             <a:noFill/>
             <a:prstDash val="solid"/>
           </a:ln>
         </p:spPr>
         <p:txBody>
-          <a:bodyPr xmlns:a="http://schemas.openxmlformats.org/drawingml/2006/main" lIns="0" tIns="0" rIns="0" bIns="0" anchor="t">
+          <a:bodyPr lIns="0" tIns="0" rIns="0" bIns="0" anchor="t">
             <a:noAutofit/>
           </a:bodyPr>
-          <a:lstStyle xmlns:a="http://schemas.openxmlformats.org/drawingml/2006/main">
+          <a:lstStyle>
             <a:defPPr algn="l">
               <a:defRPr sz="3450" b="1">
                 <a:solidFill>
@@ -6079,7 +5861,7 @@
               </a:defRPr>
             </a:defPPr>
           </a:lstStyle>
-          <a:p xmlns:a="http://schemas.openxmlformats.org/drawingml/2006/main">
+          <a:p>
             <a:pPr algn="l">
               <a:buNone/>
               <a:defRPr sz="3450" b="1">
@@ -6108,36 +5890,36 @@
       <p:sp>
         <p:nvSpPr>
           <p:cNvPr id="2" name="pipeline-flow">
-            <a:extLst xmlns:a="http://schemas.openxmlformats.org/drawingml/2006/main">
+            <a:extLst>
               <a:ext uri="{FF2B5EF4-FFF2-40B4-BE49-F238E27FC236}">
                 <a16:creationId xmlns:a16="http://schemas.microsoft.com/office/drawing/2014/main" id="{DA4512F0-5B54-441B-A842-56281AD2C4AE}"/>
               </a:ext>
             </a:extLst>
           </p:cNvPr>
           <p:cNvSpPr>
-            <a:spLocks xmlns:a="http://schemas.openxmlformats.org/drawingml/2006/main" noGrp="1"/>
+            <a:spLocks noGrp="1"/>
           </p:cNvSpPr>
           <p:nvPr/>
         </p:nvSpPr>
         <p:spPr>
-          <a:xfrm xmlns:a="http://schemas.openxmlformats.org/drawingml/2006/main">
+          <a:xfrm>
             <a:off x="742950" y="1504950"/>
             <a:ext cx="5619750" cy="1524000"/>
           </a:xfrm>
-          <a:prstGeom xmlns:a="http://schemas.openxmlformats.org/drawingml/2006/main" prst="rect">
+          <a:prstGeom prst="rect">
             <a:avLst/>
           </a:prstGeom>
-          <a:noFill xmlns:a="http://schemas.openxmlformats.org/drawingml/2006/main"/>
-          <a:ln xmlns:a="http://schemas.openxmlformats.org/drawingml/2006/main" w="0">
+          <a:noFill/>
+          <a:ln w="0">
             <a:noFill/>
             <a:prstDash val="solid"/>
           </a:ln>
         </p:spPr>
         <p:txBody>
-          <a:bodyPr xmlns:a="http://schemas.openxmlformats.org/drawingml/2006/main" lIns="0" tIns="0" rIns="0" bIns="0" anchor="t">
+          <a:bodyPr lIns="0" tIns="0" rIns="0" bIns="0" anchor="t">
             <a:noAutofit/>
           </a:bodyPr>
-          <a:lstStyle xmlns:a="http://schemas.openxmlformats.org/drawingml/2006/main">
+          <a:lstStyle>
             <a:defPPr algn="l">
               <a:defRPr sz="1950" b="1">
                 <a:solidFill>
@@ -6149,7 +5931,7 @@
               </a:defRPr>
             </a:defPPr>
           </a:lstStyle>
-          <a:p xmlns:a="http://schemas.openxmlformats.org/drawingml/2006/main">
+          <a:p>
             <a:pPr algn="l">
               <a:buNone/>
               <a:defRPr sz="1950" b="1">
@@ -6173,7 +5955,7 @@
               <a:t>Workflow stages</a:t>
             </a:r>
           </a:p>
-          <a:p xmlns:a="http://schemas.openxmlformats.org/drawingml/2006/main">
+          <a:p>
             <a:pPr algn="l">
               <a:buNone/>
               <a:defRPr sz="1950" b="1">
@@ -6202,36 +5984,36 @@
       <p:sp>
         <p:nvSpPr>
           <p:cNvPr id="3" name="trivy-fact">
-            <a:extLst xmlns:a="http://schemas.openxmlformats.org/drawingml/2006/main">
+            <a:extLst>
               <a:ext uri="{FF2B5EF4-FFF2-40B4-BE49-F238E27FC236}">
                 <a16:creationId xmlns:a16="http://schemas.microsoft.com/office/drawing/2014/main" id="{9E7A6914-5230-4FBF-91FA-6F911F28B7A4}"/>
               </a:ext>
             </a:extLst>
           </p:cNvPr>
           <p:cNvSpPr>
-            <a:spLocks xmlns:a="http://schemas.openxmlformats.org/drawingml/2006/main" noGrp="1"/>
+            <a:spLocks noGrp="1"/>
           </p:cNvSpPr>
           <p:nvPr/>
         </p:nvSpPr>
         <p:spPr>
-          <a:xfrm xmlns:a="http://schemas.openxmlformats.org/drawingml/2006/main">
+          <a:xfrm>
             <a:off x="742950" y="3429000"/>
             <a:ext cx="5286375" cy="1285875"/>
           </a:xfrm>
-          <a:prstGeom xmlns:a="http://schemas.openxmlformats.org/drawingml/2006/main" prst="rect">
+          <a:prstGeom prst="rect">
             <a:avLst/>
           </a:prstGeom>
-          <a:noFill xmlns:a="http://schemas.openxmlformats.org/drawingml/2006/main"/>
-          <a:ln xmlns:a="http://schemas.openxmlformats.org/drawingml/2006/main" w="0">
+          <a:noFill/>
+          <a:ln w="0">
             <a:noFill/>
             <a:prstDash val="solid"/>
           </a:ln>
         </p:spPr>
         <p:txBody>
-          <a:bodyPr xmlns:a="http://schemas.openxmlformats.org/drawingml/2006/main" lIns="0" tIns="0" rIns="0" bIns="0" anchor="t">
+          <a:bodyPr lIns="0" tIns="0" rIns="0" bIns="0" anchor="t">
             <a:noAutofit/>
           </a:bodyPr>
-          <a:lstStyle xmlns:a="http://schemas.openxmlformats.org/drawingml/2006/main">
+          <a:lstStyle>
             <a:defPPr algn="l">
               <a:defRPr sz="1800">
                 <a:solidFill>
@@ -6243,7 +6025,7 @@
               </a:defRPr>
             </a:defPPr>
           </a:lstStyle>
-          <a:p xmlns:a="http://schemas.openxmlformats.org/drawingml/2006/main">
+          <a:p>
             <a:pPr algn="l">
               <a:buNone/>
               <a:defRPr sz="1800">
@@ -6272,36 +6054,36 @@
       <p:sp>
         <p:nvSpPr>
           <p:cNvPr id="4" name="pipeline-gap">
-            <a:extLst xmlns:a="http://schemas.openxmlformats.org/drawingml/2006/main">
+            <a:extLst>
               <a:ext uri="{FF2B5EF4-FFF2-40B4-BE49-F238E27FC236}">
                 <a16:creationId xmlns:a16="http://schemas.microsoft.com/office/drawing/2014/main" id="{E48D86C5-8EC3-4ACA-A0EF-D9682590F1D4}"/>
               </a:ext>
             </a:extLst>
           </p:cNvPr>
           <p:cNvSpPr>
-            <a:spLocks xmlns:a="http://schemas.openxmlformats.org/drawingml/2006/main" noGrp="1"/>
+            <a:spLocks noGrp="1"/>
           </p:cNvSpPr>
           <p:nvPr/>
         </p:nvSpPr>
         <p:spPr>
-          <a:xfrm xmlns:a="http://schemas.openxmlformats.org/drawingml/2006/main">
+          <a:xfrm>
             <a:off x="7000875" y="1695450"/>
             <a:ext cx="4333875" cy="1695450"/>
           </a:xfrm>
-          <a:prstGeom xmlns:a="http://schemas.openxmlformats.org/drawingml/2006/main" prst="rect">
+          <a:prstGeom prst="rect">
             <a:avLst/>
           </a:prstGeom>
-          <a:noFill xmlns:a="http://schemas.openxmlformats.org/drawingml/2006/main"/>
-          <a:ln xmlns:a="http://schemas.openxmlformats.org/drawingml/2006/main" w="0">
+          <a:noFill/>
+          <a:ln w="0">
             <a:noFill/>
             <a:prstDash val="solid"/>
           </a:ln>
         </p:spPr>
         <p:txBody>
-          <a:bodyPr xmlns:a="http://schemas.openxmlformats.org/drawingml/2006/main" lIns="0" tIns="0" rIns="0" bIns="0" anchor="t">
+          <a:bodyPr lIns="0" tIns="0" rIns="0" bIns="0" anchor="t">
             <a:noAutofit/>
           </a:bodyPr>
-          <a:lstStyle xmlns:a="http://schemas.openxmlformats.org/drawingml/2006/main">
+          <a:lstStyle>
             <a:defPPr algn="l">
               <a:defRPr sz="1875" b="1">
                 <a:solidFill>
@@ -6313,7 +6095,7 @@
               </a:defRPr>
             </a:defPPr>
           </a:lstStyle>
-          <a:p xmlns:a="http://schemas.openxmlformats.org/drawingml/2006/main">
+          <a:p>
             <a:pPr algn="l">
               <a:buNone/>
               <a:defRPr sz="1875" b="1">
@@ -6342,36 +6124,36 @@
       <p:sp>
         <p:nvSpPr>
           <p:cNvPr id="5" name="history-fact">
-            <a:extLst xmlns:a="http://schemas.openxmlformats.org/drawingml/2006/main">
+            <a:extLst>
               <a:ext uri="{FF2B5EF4-FFF2-40B4-BE49-F238E27FC236}">
                 <a16:creationId xmlns:a16="http://schemas.microsoft.com/office/drawing/2014/main" id="{FA6BB9B9-D47C-4C3C-8C73-E8D4F53742D6}"/>
               </a:ext>
             </a:extLst>
           </p:cNvPr>
           <p:cNvSpPr>
-            <a:spLocks xmlns:a="http://schemas.openxmlformats.org/drawingml/2006/main" noGrp="1"/>
+            <a:spLocks noGrp="1"/>
           </p:cNvSpPr>
           <p:nvPr/>
         </p:nvSpPr>
         <p:spPr>
-          <a:xfrm xmlns:a="http://schemas.openxmlformats.org/drawingml/2006/main">
+          <a:xfrm>
             <a:off x="7000875" y="4000500"/>
             <a:ext cx="4333875" cy="1200150"/>
           </a:xfrm>
-          <a:prstGeom xmlns:a="http://schemas.openxmlformats.org/drawingml/2006/main" prst="rect">
+          <a:prstGeom prst="rect">
             <a:avLst/>
           </a:prstGeom>
-          <a:noFill xmlns:a="http://schemas.openxmlformats.org/drawingml/2006/main"/>
-          <a:ln xmlns:a="http://schemas.openxmlformats.org/drawingml/2006/main" w="0">
+          <a:noFill/>
+          <a:ln w="0">
             <a:noFill/>
             <a:prstDash val="solid"/>
           </a:ln>
         </p:spPr>
         <p:txBody>
-          <a:bodyPr xmlns:a="http://schemas.openxmlformats.org/drawingml/2006/main" lIns="0" tIns="0" rIns="0" bIns="0" anchor="t">
+          <a:bodyPr lIns="0" tIns="0" rIns="0" bIns="0" anchor="t">
             <a:noAutofit/>
           </a:bodyPr>
-          <a:lstStyle xmlns:a="http://schemas.openxmlformats.org/drawingml/2006/main">
+          <a:lstStyle>
             <a:defPPr algn="l">
               <a:defRPr sz="1725">
                 <a:solidFill>
@@ -6383,7 +6165,7 @@
               </a:defRPr>
             </a:defPPr>
           </a:lstStyle>
-          <a:p xmlns:a="http://schemas.openxmlformats.org/drawingml/2006/main">
+          <a:p>
             <a:pPr algn="l">
               <a:buNone/>
               <a:defRPr sz="1725">
@@ -6416,315 +6198,9 @@
       </p:ext>
     </p:extLst>
   </p:cSld>
-</p:sld>
-</file>
-
-<file path=ppt/slides/slide9.xml><?xml version="1.0" encoding="utf-8"?>
-<p:sld xmlns:p="http://schemas.openxmlformats.org/presentationml/2006/main">
-  <p:cSld>
-    <p:bg>
-      <p:bgPr>
-        <a:solidFill xmlns:a="http://schemas.openxmlformats.org/drawingml/2006/main">
-          <a:srgbClr val="0B1F3A"/>
-        </a:solidFill>
-      </p:bgPr>
-    </p:bg>
-    <p:spTree>
-      <p:nvGrpSpPr>
-        <p:cNvPr id="1" name=""/>
-        <p:cNvGrpSpPr/>
-        <p:nvPr/>
-      </p:nvGrpSpPr>
-      <p:grpSpPr>
-        <a:xfrm xmlns:a="http://schemas.openxmlformats.org/drawingml/2006/main"/>
-      </p:grpSpPr>
-      <p:sp>
-        <p:nvSpPr>
-          <p:cNvPr id="5" name="pending-title">
-            <a:extLst xmlns:a="http://schemas.openxmlformats.org/drawingml/2006/main">
-              <a:ext uri="{FF2B5EF4-FFF2-40B4-BE49-F238E27FC236}">
-                <a16:creationId xmlns:a16="http://schemas.microsoft.com/office/drawing/2014/main" id="{AA79E1F8-2643-44DD-9547-2E99D213DE14}"/>
-              </a:ext>
-            </a:extLst>
-          </p:cNvPr>
-          <p:cNvSpPr>
-            <a:spLocks xmlns:a="http://schemas.openxmlformats.org/drawingml/2006/main" noGrp="1"/>
-          </p:cNvSpPr>
-          <p:nvPr/>
-        </p:nvSpPr>
-        <p:spPr>
-          <a:xfrm xmlns:a="http://schemas.openxmlformats.org/drawingml/2006/main">
-            <a:off x="685800" y="552450"/>
-            <a:ext cx="10668000" cy="666750"/>
-          </a:xfrm>
-          <a:prstGeom xmlns:a="http://schemas.openxmlformats.org/drawingml/2006/main" prst="rect">
-            <a:avLst/>
-          </a:prstGeom>
-          <a:noFill xmlns:a="http://schemas.openxmlformats.org/drawingml/2006/main"/>
-          <a:ln xmlns:a="http://schemas.openxmlformats.org/drawingml/2006/main" w="0">
-            <a:noFill/>
-            <a:prstDash val="solid"/>
-          </a:ln>
-        </p:spPr>
-        <p:txBody>
-          <a:bodyPr xmlns:a="http://schemas.openxmlformats.org/drawingml/2006/main" lIns="0" tIns="0" rIns="0" bIns="0" anchor="t">
-            <a:noAutofit/>
-          </a:bodyPr>
-          <a:lstStyle xmlns:a="http://schemas.openxmlformats.org/drawingml/2006/main">
-            <a:defPPr algn="l">
-              <a:defRPr sz="3600" b="1">
-                <a:solidFill>
-                  <a:srgbClr val="FFFFFF"/>
-                </a:solidFill>
-                <a:latin typeface="Arial"/>
-                <a:ea typeface="Arial"/>
-                <a:cs typeface="Arial"/>
-              </a:defRPr>
-            </a:defPPr>
-          </a:lstStyle>
-          <a:p xmlns:a="http://schemas.openxmlformats.org/drawingml/2006/main">
-            <a:pPr algn="l">
-              <a:buNone/>
-              <a:defRPr sz="3600" b="1">
-                <a:solidFill>
-                  <a:srgbClr val="FFFFFF"/>
-                </a:solidFill>
-                <a:latin typeface="Arial"/>
-                <a:ea typeface="Arial"/>
-                <a:cs typeface="Arial"/>
-              </a:defRPr>
-            </a:pPr>
-            <a:r>
-              <a:rPr sz="3600" b="1">
-                <a:solidFill>
-                  <a:srgbClr val="FFFFFF"/>
-                </a:solidFill>
-                <a:latin typeface="Arial"/>
-                <a:ea typeface="Arial"/>
-                <a:cs typeface="Arial"/>
-              </a:rPr>
-              <a:t>CI is green; AWS deployment is next</a:t>
-            </a:r>
-          </a:p>
-        </p:txBody>
-      </p:sp>
-      <p:sp>
-        <p:nvSpPr>
-          <p:cNvPr id="2" name="aws-status">
-            <a:extLst xmlns:a="http://schemas.openxmlformats.org/drawingml/2006/main">
-              <a:ext uri="{FF2B5EF4-FFF2-40B4-BE49-F238E27FC236}">
-                <a16:creationId xmlns:a16="http://schemas.microsoft.com/office/drawing/2014/main" id="{5408E57C-9DBC-4220-BA91-73D67060243D}"/>
-              </a:ext>
-            </a:extLst>
-          </p:cNvPr>
-          <p:cNvSpPr>
-            <a:spLocks xmlns:a="http://schemas.openxmlformats.org/drawingml/2006/main" noGrp="1"/>
-          </p:cNvSpPr>
-          <p:nvPr/>
-        </p:nvSpPr>
-        <p:spPr>
-          <a:xfrm xmlns:a="http://schemas.openxmlformats.org/drawingml/2006/main">
-            <a:off x="742950" y="1685925"/>
-            <a:ext cx="10287000" cy="1285875"/>
-          </a:xfrm>
-          <a:prstGeom xmlns:a="http://schemas.openxmlformats.org/drawingml/2006/main" prst="rect">
-            <a:avLst/>
-          </a:prstGeom>
-          <a:noFill xmlns:a="http://schemas.openxmlformats.org/drawingml/2006/main"/>
-          <a:ln xmlns:a="http://schemas.openxmlformats.org/drawingml/2006/main" w="0">
-            <a:noFill/>
-            <a:prstDash val="solid"/>
-          </a:ln>
-        </p:spPr>
-        <p:txBody>
-          <a:bodyPr xmlns:a="http://schemas.openxmlformats.org/drawingml/2006/main" lIns="0" tIns="0" rIns="0" bIns="0" anchor="t">
-            <a:noAutofit/>
-          </a:bodyPr>
-          <a:lstStyle xmlns:a="http://schemas.openxmlformats.org/drawingml/2006/main">
-            <a:defPPr algn="l">
-              <a:defRPr sz="2025">
-                <a:solidFill>
-                  <a:srgbClr val="D7E6F7"/>
-                </a:solidFill>
-                <a:latin typeface="Arial"/>
-                <a:ea typeface="Arial"/>
-                <a:cs typeface="Arial"/>
-              </a:defRPr>
-            </a:defPPr>
-          </a:lstStyle>
-          <a:p xmlns:a="http://schemas.openxmlformats.org/drawingml/2006/main">
-            <a:pPr algn="l">
-              <a:buNone/>
-              <a:defRPr sz="2025">
-                <a:solidFill>
-                  <a:srgbClr val="D7E6F7"/>
-                </a:solidFill>
-                <a:latin typeface="Arial"/>
-                <a:ea typeface="Arial"/>
-                <a:cs typeface="Arial"/>
-              </a:defRPr>
-            </a:pPr>
-            <a:r>
-              <a:rPr sz="2025">
-                <a:solidFill>
-                  <a:srgbClr val="D7E6F7"/>
-                </a:solidFill>
-                <a:latin typeface="Arial"/>
-                <a:ea typeface="Arial"/>
-                <a:cs typeface="Arial"/>
-              </a:rPr>
-              <a:t>Terraform `fmt`, `init`, and `validate` passed. AWS credentials are not connected to this workspace, so plan, apply, EKS deployment, and destroy have not run.</a:t>
-            </a:r>
-          </a:p>
-        </p:txBody>
-      </p:sp>
-      <p:sp>
-        <p:nvSpPr>
-          <p:cNvPr id="3" name="submission-status">
-            <a:extLst xmlns:a="http://schemas.openxmlformats.org/drawingml/2006/main">
-              <a:ext uri="{FF2B5EF4-FFF2-40B4-BE49-F238E27FC236}">
-                <a16:creationId xmlns:a16="http://schemas.microsoft.com/office/drawing/2014/main" id="{225D9850-C81D-4F2A-816A-3E702FC869B4}"/>
-              </a:ext>
-            </a:extLst>
-          </p:cNvPr>
-          <p:cNvSpPr>
-            <a:spLocks xmlns:a="http://schemas.openxmlformats.org/drawingml/2006/main" noGrp="1"/>
-          </p:cNvSpPr>
-          <p:nvPr/>
-        </p:nvSpPr>
-        <p:spPr>
-          <a:xfrm xmlns:a="http://schemas.openxmlformats.org/drawingml/2006/main">
-            <a:off x="742950" y="3543300"/>
-            <a:ext cx="10287000" cy="1390650"/>
-          </a:xfrm>
-          <a:prstGeom xmlns:a="http://schemas.openxmlformats.org/drawingml/2006/main" prst="rect">
-            <a:avLst/>
-          </a:prstGeom>
-          <a:noFill xmlns:a="http://schemas.openxmlformats.org/drawingml/2006/main"/>
-          <a:ln xmlns:a="http://schemas.openxmlformats.org/drawingml/2006/main" w="0">
-            <a:noFill/>
-            <a:prstDash val="solid"/>
-          </a:ln>
-        </p:spPr>
-        <p:txBody>
-          <a:bodyPr xmlns:a="http://schemas.openxmlformats.org/drawingml/2006/main" lIns="0" tIns="0" rIns="0" bIns="0" anchor="t">
-            <a:noAutofit/>
-          </a:bodyPr>
-          <a:lstStyle xmlns:a="http://schemas.openxmlformats.org/drawingml/2006/main">
-            <a:defPPr algn="l">
-              <a:defRPr sz="2025">
-                <a:solidFill>
-                  <a:srgbClr val="FFFFFF"/>
-                </a:solidFill>
-                <a:latin typeface="Arial"/>
-                <a:ea typeface="Arial"/>
-                <a:cs typeface="Arial"/>
-              </a:defRPr>
-            </a:defPPr>
-          </a:lstStyle>
-          <a:p xmlns:a="http://schemas.openxmlformats.org/drawingml/2006/main">
-            <a:pPr algn="l">
-              <a:buNone/>
-              <a:defRPr sz="2025">
-                <a:solidFill>
-                  <a:srgbClr val="FFFFFF"/>
-                </a:solidFill>
-                <a:latin typeface="Arial"/>
-                <a:ea typeface="Arial"/>
-                <a:cs typeface="Arial"/>
-              </a:defRPr>
-            </a:pPr>
-            <a:r>
-              <a:rPr sz="2025">
-                <a:solidFill>
-                  <a:srgbClr val="FFFFFF"/>
-                </a:solidFill>
-                <a:latin typeface="Arial"/>
-                <a:ea typeface="Arial"/>
-                <a:cs typeface="Arial"/>
-              </a:rPr>
-              <a:t>Run #4 passed tests, the frontend build, and both Trivy scans. Public SHA-tagged images were published to GHCR. Deployment skipped because the workflow deploys only from main. Next: connect AWS and deploy to EKS with Helm.</a:t>
-            </a:r>
-          </a:p>
-        </p:txBody>
-      </p:sp>
-      <p:sp>
-        <p:nvSpPr>
-          <p:cNvPr id="4" name="closing">
-            <a:extLst xmlns:a="http://schemas.openxmlformats.org/drawingml/2006/main">
-              <a:ext uri="{FF2B5EF4-FFF2-40B4-BE49-F238E27FC236}">
-                <a16:creationId xmlns:a16="http://schemas.microsoft.com/office/drawing/2014/main" id="{C64B3E96-40F5-4A91-B9F3-CBE015CB5363}"/>
-              </a:ext>
-            </a:extLst>
-          </p:cNvPr>
-          <p:cNvSpPr>
-            <a:spLocks xmlns:a="http://schemas.openxmlformats.org/drawingml/2006/main" noGrp="1"/>
-          </p:cNvSpPr>
-          <p:nvPr/>
-        </p:nvSpPr>
-        <p:spPr>
-          <a:xfrm xmlns:a="http://schemas.openxmlformats.org/drawingml/2006/main">
-            <a:off x="742950" y="5629275"/>
-            <a:ext cx="10287000" cy="428625"/>
-          </a:xfrm>
-          <a:prstGeom xmlns:a="http://schemas.openxmlformats.org/drawingml/2006/main" prst="rect">
-            <a:avLst/>
-          </a:prstGeom>
-          <a:noFill xmlns:a="http://schemas.openxmlformats.org/drawingml/2006/main"/>
-          <a:ln xmlns:a="http://schemas.openxmlformats.org/drawingml/2006/main" w="0">
-            <a:noFill/>
-            <a:prstDash val="solid"/>
-          </a:ln>
-        </p:spPr>
-        <p:txBody>
-          <a:bodyPr xmlns:a="http://schemas.openxmlformats.org/drawingml/2006/main" lIns="0" tIns="0" rIns="0" bIns="0" anchor="t">
-            <a:noAutofit/>
-          </a:bodyPr>
-          <a:lstStyle xmlns:a="http://schemas.openxmlformats.org/drawingml/2006/main">
-            <a:defPPr algn="l">
-              <a:defRPr sz="1725" b="1">
-                <a:solidFill>
-                  <a:srgbClr val="92D9D0"/>
-                </a:solidFill>
-                <a:latin typeface="Arial"/>
-                <a:ea typeface="Arial"/>
-                <a:cs typeface="Arial"/>
-              </a:defRPr>
-            </a:defPPr>
-          </a:lstStyle>
-          <a:p xmlns:a="http://schemas.openxmlformats.org/drawingml/2006/main">
-            <a:pPr algn="l">
-              <a:buNone/>
-              <a:defRPr sz="1725" b="1">
-                <a:solidFill>
-                  <a:srgbClr val="92D9D0"/>
-                </a:solidFill>
-                <a:latin typeface="Arial"/>
-                <a:ea typeface="Arial"/>
-                <a:cs typeface="Arial"/>
-              </a:defRPr>
-            </a:pPr>
-            <a:r>
-              <a:rPr sz="1725" b="1">
-                <a:solidFill>
-                  <a:srgbClr val="92D9D0"/>
-                </a:solidFill>
-                <a:latin typeface="Arial"/>
-                <a:ea typeface="Arial"/>
-                <a:cs typeface="Arial"/>
-              </a:rPr>
-              <a:t>CampusFix is a custom campus support application, not a TaskBoard clone.</a:t>
-            </a:r>
-          </a:p>
-        </p:txBody>
-      </p:sp>
-    </p:spTree>
-    <p:extLst>
-      <p:ext uri="{BB962C8B-B14F-4D97-AF65-F5344CB8AC3E}">
-        <p14:creationId xmlns:p14="http://schemas.microsoft.com/office/powerpoint/2010/main" val="545301366"/>
-      </p:ext>
-    </p:extLst>
-  </p:cSld>
+  <p:clrMapOvr>
+    <a:masterClrMapping/>
+  </p:clrMapOvr>
 </p:sld>
 </file>
 
@@ -6970,5 +6446,254 @@
       </a:bgFillStyleLst>
     </a:fmtScheme>
   </a:themeElements>
+  <a:objectDefaults/>
+  <a:extraClrSchemeLst/>
+</a:theme>
+</file>
+
+<file path=ppt/theme/theme2.xml><?xml version="1.0" encoding="utf-8"?>
+<a:theme xmlns:a="http://schemas.openxmlformats.org/drawingml/2006/main" name="ChatGPT">
+  <a:themeElements>
+    <a:clrScheme name="ChatGPT">
+      <a:dk1>
+        <a:srgbClr val="000000"/>
+      </a:dk1>
+      <a:lt1>
+        <a:srgbClr val="FFFFFF"/>
+      </a:lt1>
+      <a:dk2>
+        <a:srgbClr val="0E2841"/>
+      </a:dk2>
+      <a:lt2>
+        <a:srgbClr val="E8E8E8"/>
+      </a:lt2>
+      <a:accent1>
+        <a:srgbClr val="156082"/>
+      </a:accent1>
+      <a:accent2>
+        <a:srgbClr val="E97132"/>
+      </a:accent2>
+      <a:accent3>
+        <a:srgbClr val="196B24"/>
+      </a:accent3>
+      <a:accent4>
+        <a:srgbClr val="0F9ED5"/>
+      </a:accent4>
+      <a:accent5>
+        <a:srgbClr val="A02B93"/>
+      </a:accent5>
+      <a:accent6>
+        <a:srgbClr val="4EA72E"/>
+      </a:accent6>
+      <a:hlink>
+        <a:srgbClr val="467886"/>
+      </a:hlink>
+      <a:folHlink>
+        <a:srgbClr val="96607D"/>
+      </a:folHlink>
+    </a:clrScheme>
+    <a:fontScheme name="">
+      <a:majorFont>
+        <a:latin typeface="Aptos"/>
+        <a:ea typeface=""/>
+        <a:cs typeface=""/>
+      </a:majorFont>
+      <a:minorFont>
+        <a:latin typeface="Aptos"/>
+        <a:ea typeface=""/>
+        <a:cs typeface=""/>
+      </a:minorFont>
+    </a:fontScheme>
+    <a:fmtScheme name="ChatGPT">
+      <a:fillStyleLst>
+        <a:solidFill>
+          <a:schemeClr val="phClr"/>
+        </a:solidFill>
+        <a:gradFill>
+          <a:gsLst>
+            <a:gs pos="0">
+              <a:schemeClr val="phClr">
+                <a:tint val="67000"/>
+                <a:lumMod val="110000"/>
+                <a:satMod val="105000"/>
+              </a:schemeClr>
+            </a:gs>
+            <a:gs pos="50000">
+              <a:schemeClr val="phClr">
+                <a:tint val="73000"/>
+                <a:lumMod val="105000"/>
+                <a:satMod val="103000"/>
+              </a:schemeClr>
+            </a:gs>
+            <a:gs pos="100000">
+              <a:schemeClr val="phClr">
+                <a:tint val="81000"/>
+                <a:lumMod val="105000"/>
+                <a:satMod val="109000"/>
+              </a:schemeClr>
+            </a:gs>
+          </a:gsLst>
+          <a:lin ang="5400000" scaled="0"/>
+        </a:gradFill>
+        <a:gradFill>
+          <a:gsLst>
+            <a:gs pos="0">
+              <a:schemeClr val="phClr">
+                <a:tint val="94000"/>
+                <a:lumMod val="102000"/>
+                <a:satMod val="103000"/>
+              </a:schemeClr>
+            </a:gs>
+            <a:gs pos="50000">
+              <a:schemeClr val="phClr">
+                <a:shade val="100000"/>
+                <a:lumMod val="100000"/>
+                <a:satMod val="110000"/>
+              </a:schemeClr>
+            </a:gs>
+            <a:gs pos="100000">
+              <a:schemeClr val="phClr">
+                <a:shade val="78000"/>
+                <a:lumMod val="99000"/>
+                <a:satMod val="120000"/>
+              </a:schemeClr>
+            </a:gs>
+          </a:gsLst>
+          <a:lin ang="5400000" scaled="0"/>
+        </a:gradFill>
+      </a:fillStyleLst>
+      <a:lnStyleLst>
+        <a:ln w="12700">
+          <a:solidFill>
+            <a:schemeClr val="phClr"/>
+          </a:solidFill>
+          <a:prstDash val="solid"/>
+        </a:ln>
+        <a:ln w="19050">
+          <a:solidFill>
+            <a:schemeClr val="phClr"/>
+          </a:solidFill>
+          <a:prstDash val="solid"/>
+        </a:ln>
+        <a:ln w="25400">
+          <a:solidFill>
+            <a:schemeClr val="phClr"/>
+          </a:solidFill>
+          <a:prstDash val="solid"/>
+        </a:ln>
+      </a:lnStyleLst>
+      <a:effectStyleLst>
+        <a:effectStyle>
+          <a:effectLst/>
+        </a:effectStyle>
+        <a:effectStyle>
+          <a:effectLst/>
+        </a:effectStyle>
+        <a:effectStyle>
+          <a:effectLst>
+            <a:outerShdw blurRad="57150" dist="19050" dir="5400000">
+              <a:srgbClr val="000000">
+                <a:alpha val="16000"/>
+              </a:srgbClr>
+            </a:outerShdw>
+          </a:effectLst>
+        </a:effectStyle>
+        <a:effectStyle>
+          <a:effectLst>
+            <a:outerShdw blurRad="19050" dist="9525" dir="5400000">
+              <a:srgbClr val="000000">
+                <a:alpha val="6000"/>
+              </a:srgbClr>
+            </a:outerShdw>
+          </a:effectLst>
+        </a:effectStyle>
+        <a:effectStyle>
+          <a:effectLst>
+            <a:outerShdw blurRad="28575" dist="9525" dir="5400000">
+              <a:srgbClr val="000000">
+                <a:alpha val="8000"/>
+              </a:srgbClr>
+            </a:outerShdw>
+          </a:effectLst>
+        </a:effectStyle>
+        <a:effectStyle>
+          <a:effectLst>
+            <a:outerShdw blurRad="57150" dist="19050" dir="5400000">
+              <a:srgbClr val="000000">
+                <a:alpha val="10000"/>
+              </a:srgbClr>
+            </a:outerShdw>
+          </a:effectLst>
+        </a:effectStyle>
+        <a:effectStyle>
+          <a:effectLst>
+            <a:outerShdw blurRad="114300" dist="38100" dir="5400000">
+              <a:srgbClr val="000000">
+                <a:alpha val="12000"/>
+              </a:srgbClr>
+            </a:outerShdw>
+          </a:effectLst>
+        </a:effectStyle>
+        <a:effectStyle>
+          <a:effectLst>
+            <a:outerShdw blurRad="171450" dist="57150" dir="5400000">
+              <a:srgbClr val="000000">
+                <a:alpha val="16000"/>
+              </a:srgbClr>
+            </a:outerShdw>
+          </a:effectLst>
+        </a:effectStyle>
+        <a:effectStyle>
+          <a:effectLst>
+            <a:outerShdw blurRad="266700" dist="95250" dir="5400000">
+              <a:srgbClr val="000000">
+                <a:alpha val="24000"/>
+              </a:srgbClr>
+            </a:outerShdw>
+          </a:effectLst>
+        </a:effectStyle>
+      </a:effectStyleLst>
+      <a:bgFillStyleLst>
+        <a:solidFill>
+          <a:schemeClr val="phClr"/>
+        </a:solidFill>
+        <a:solidFill>
+          <a:schemeClr val="phClr">
+            <a:tint val="95000"/>
+            <a:satMod val="170000"/>
+          </a:schemeClr>
+        </a:solidFill>
+        <a:gradFill>
+          <a:gsLst>
+            <a:gs pos="0">
+              <a:schemeClr val="phClr">
+                <a:tint val="93000"/>
+                <a:shade val="98000"/>
+                <a:lumMod val="102000"/>
+                <a:satMod val="150000"/>
+              </a:schemeClr>
+            </a:gs>
+            <a:gs pos="50000">
+              <a:schemeClr val="phClr">
+                <a:tint val="98000"/>
+                <a:shade val="90000"/>
+                <a:lumMod val="103000"/>
+                <a:satMod val="130000"/>
+              </a:schemeClr>
+            </a:gs>
+            <a:gs pos="100000">
+              <a:schemeClr val="phClr">
+                <a:shade val="63000"/>
+                <a:satMod val="120000"/>
+              </a:schemeClr>
+            </a:gs>
+          </a:gsLst>
+          <a:lin ang="5400000" scaled="0"/>
+        </a:gradFill>
+      </a:bgFillStyleLst>
+    </a:fmtScheme>
+  </a:themeElements>
+  <a:objectDefaults/>
+  <a:extraClrSchemeLst/>
 </a:theme>
 </file>